--- a/docs/reports/project-status-2026-07-25.pptx
+++ b/docs/reports/project-status-2026-07-25.pptx
@@ -1781,7 +1781,7 @@
         </p:nvSpPr>
         <p:spPr>
           <a:xfrm>
-            <a:off x="502920" y="731520"/>
+            <a:off x="502920" y="685800"/>
             <a:ext cx="6217920" cy="320040"/>
           </a:xfrm>
           <a:prstGeom prst="rect">
@@ -1820,8 +1820,8 @@
         </p:nvSpPr>
         <p:spPr>
           <a:xfrm>
-            <a:off x="502920" y="1234440"/>
-            <a:ext cx="6400800" cy="640080"/>
+            <a:off x="502920" y="1143000"/>
+            <a:ext cx="6400800" cy="594360"/>
           </a:xfrm>
           <a:prstGeom prst="rect">
             <a:avLst/>
@@ -1859,8 +1859,8 @@
         </p:nvSpPr>
         <p:spPr>
           <a:xfrm>
-            <a:off x="502920" y="1920240"/>
-            <a:ext cx="6400800" cy="502920"/>
+            <a:off x="502920" y="1828800"/>
+            <a:ext cx="6400800" cy="457200"/>
           </a:xfrm>
           <a:prstGeom prst="rect">
             <a:avLst/>
@@ -1898,7 +1898,7 @@
         </p:nvSpPr>
         <p:spPr>
           <a:xfrm>
-            <a:off x="502920" y="2560320"/>
+            <a:off x="502920" y="2423160"/>
             <a:ext cx="6217920" cy="365760"/>
           </a:xfrm>
           <a:prstGeom prst="rect">
@@ -1917,7 +1917,7 @@
             <a:r>
               <a:rPr lang="en-US" sz="1500" dirty="0">
                 <a:solidFill>
-                  <a:srgbClr val="B8D4E0"/>
+                  <a:srgbClr val="C5DCE6"/>
                 </a:solidFill>
                 <a:latin typeface="Calibri" pitchFamily="34" charset="0"/>
                 <a:ea typeface="Calibri" pitchFamily="34" charset="-122"/>
@@ -1937,7 +1937,7 @@
         </p:nvSpPr>
         <p:spPr>
           <a:xfrm>
-            <a:off x="502920" y="3291840"/>
+            <a:off x="502920" y="3246120"/>
             <a:ext cx="1097280" cy="384048"/>
           </a:xfrm>
           <a:prstGeom prst="roundRect">
@@ -1959,7 +1959,7 @@
         </p:nvSpPr>
         <p:spPr>
           <a:xfrm>
-            <a:off x="502920" y="3291840"/>
+            <a:off x="502920" y="3246120"/>
             <a:ext cx="1097280" cy="384048"/>
           </a:xfrm>
           <a:prstGeom prst="rect">
@@ -1998,7 +1998,7 @@
         </p:nvSpPr>
         <p:spPr>
           <a:xfrm>
-            <a:off x="1554480" y="3291840"/>
+            <a:off x="1554480" y="3246120"/>
             <a:ext cx="228600" cy="384048"/>
           </a:xfrm>
           <a:prstGeom prst="rect">
@@ -2015,7 +2015,7 @@
               <a:buNone/>
             </a:pPr>
             <a:r>
-              <a:rPr lang="en-US" sz="1400" dirty="0">
+              <a:rPr lang="en-US" sz="1600" b="1" dirty="0">
                 <a:solidFill>
                   <a:srgbClr val="02C39A"/>
                 </a:solidFill>
@@ -2025,7 +2025,7 @@
               </a:rPr>
               <a:t>→</a:t>
             </a:r>
-            <a:endParaRPr lang="en-US" sz="1400" dirty="0"/>
+            <a:endParaRPr lang="en-US" sz="1600" dirty="0"/>
           </a:p>
         </p:txBody>
       </p:sp>
@@ -2037,7 +2037,7 @@
         </p:nvSpPr>
         <p:spPr>
           <a:xfrm>
-            <a:off x="1737360" y="3291840"/>
+            <a:off x="1737360" y="3246120"/>
             <a:ext cx="1097280" cy="384048"/>
           </a:xfrm>
           <a:prstGeom prst="roundRect">
@@ -2059,7 +2059,7 @@
         </p:nvSpPr>
         <p:spPr>
           <a:xfrm>
-            <a:off x="1737360" y="3291840"/>
+            <a:off x="1737360" y="3246120"/>
             <a:ext cx="1097280" cy="384048"/>
           </a:xfrm>
           <a:prstGeom prst="rect">
@@ -2098,7 +2098,7 @@
         </p:nvSpPr>
         <p:spPr>
           <a:xfrm>
-            <a:off x="2788920" y="3291840"/>
+            <a:off x="2788920" y="3246120"/>
             <a:ext cx="228600" cy="384048"/>
           </a:xfrm>
           <a:prstGeom prst="rect">
@@ -2115,7 +2115,7 @@
               <a:buNone/>
             </a:pPr>
             <a:r>
-              <a:rPr lang="en-US" sz="1400" dirty="0">
+              <a:rPr lang="en-US" sz="1600" b="1" dirty="0">
                 <a:solidFill>
                   <a:srgbClr val="02C39A"/>
                 </a:solidFill>
@@ -2125,7 +2125,7 @@
               </a:rPr>
               <a:t>→</a:t>
             </a:r>
-            <a:endParaRPr lang="en-US" sz="1400" dirty="0"/>
+            <a:endParaRPr lang="en-US" sz="1600" dirty="0"/>
           </a:p>
         </p:txBody>
       </p:sp>
@@ -2137,7 +2137,7 @@
         </p:nvSpPr>
         <p:spPr>
           <a:xfrm>
-            <a:off x="2971800" y="3291840"/>
+            <a:off x="2971800" y="3246120"/>
             <a:ext cx="1097280" cy="384048"/>
           </a:xfrm>
           <a:prstGeom prst="roundRect">
@@ -2159,7 +2159,7 @@
         </p:nvSpPr>
         <p:spPr>
           <a:xfrm>
-            <a:off x="2971800" y="3291840"/>
+            <a:off x="2971800" y="3246120"/>
             <a:ext cx="1097280" cy="384048"/>
           </a:xfrm>
           <a:prstGeom prst="rect">
@@ -2198,7 +2198,7 @@
         </p:nvSpPr>
         <p:spPr>
           <a:xfrm>
-            <a:off x="4023360" y="3291840"/>
+            <a:off x="4023360" y="3246120"/>
             <a:ext cx="228600" cy="384048"/>
           </a:xfrm>
           <a:prstGeom prst="rect">
@@ -2215,7 +2215,7 @@
               <a:buNone/>
             </a:pPr>
             <a:r>
-              <a:rPr lang="en-US" sz="1400" dirty="0">
+              <a:rPr lang="en-US" sz="1600" b="1" dirty="0">
                 <a:solidFill>
                   <a:srgbClr val="02C39A"/>
                 </a:solidFill>
@@ -2225,7 +2225,7 @@
               </a:rPr>
               <a:t>→</a:t>
             </a:r>
-            <a:endParaRPr lang="en-US" sz="1400" dirty="0"/>
+            <a:endParaRPr lang="en-US" sz="1600" dirty="0"/>
           </a:p>
         </p:txBody>
       </p:sp>
@@ -2237,7 +2237,7 @@
         </p:nvSpPr>
         <p:spPr>
           <a:xfrm>
-            <a:off x="4206240" y="3291840"/>
+            <a:off x="4206240" y="3246120"/>
             <a:ext cx="1097280" cy="384048"/>
           </a:xfrm>
           <a:prstGeom prst="roundRect">
@@ -2259,7 +2259,7 @@
         </p:nvSpPr>
         <p:spPr>
           <a:xfrm>
-            <a:off x="4206240" y="3291840"/>
+            <a:off x="4206240" y="3246120"/>
             <a:ext cx="1097280" cy="384048"/>
           </a:xfrm>
           <a:prstGeom prst="rect">
@@ -2298,7 +2298,7 @@
         </p:nvSpPr>
         <p:spPr>
           <a:xfrm>
-            <a:off x="5257800" y="3291840"/>
+            <a:off x="5257800" y="3246120"/>
             <a:ext cx="228600" cy="384048"/>
           </a:xfrm>
           <a:prstGeom prst="rect">
@@ -2315,7 +2315,7 @@
               <a:buNone/>
             </a:pPr>
             <a:r>
-              <a:rPr lang="en-US" sz="1400" dirty="0">
+              <a:rPr lang="en-US" sz="1600" b="1" dirty="0">
                 <a:solidFill>
                   <a:srgbClr val="02C39A"/>
                 </a:solidFill>
@@ -2325,7 +2325,7 @@
               </a:rPr>
               <a:t>→</a:t>
             </a:r>
-            <a:endParaRPr lang="en-US" sz="1400" dirty="0"/>
+            <a:endParaRPr lang="en-US" sz="1600" dirty="0"/>
           </a:p>
         </p:txBody>
       </p:sp>
@@ -2337,7 +2337,7 @@
         </p:nvSpPr>
         <p:spPr>
           <a:xfrm>
-            <a:off x="5440680" y="3291840"/>
+            <a:off x="5440680" y="3246120"/>
             <a:ext cx="1097280" cy="384048"/>
           </a:xfrm>
           <a:prstGeom prst="roundRect">
@@ -2359,7 +2359,7 @@
         </p:nvSpPr>
         <p:spPr>
           <a:xfrm>
-            <a:off x="5440680" y="3291840"/>
+            <a:off x="5440680" y="3246120"/>
             <a:ext cx="1097280" cy="384048"/>
           </a:xfrm>
           <a:prstGeom prst="rect">
@@ -2398,7 +2398,7 @@
         </p:nvSpPr>
         <p:spPr>
           <a:xfrm>
-            <a:off x="502920" y="4160520"/>
+            <a:off x="502920" y="4023360"/>
             <a:ext cx="3657600" cy="274320"/>
           </a:xfrm>
           <a:prstGeom prst="rect">
@@ -2437,7 +2437,7 @@
         </p:nvSpPr>
         <p:spPr>
           <a:xfrm>
-            <a:off x="502920" y="4480560"/>
+            <a:off x="502920" y="4389120"/>
             <a:ext cx="5486400" cy="256032"/>
           </a:xfrm>
           <a:prstGeom prst="rect">
@@ -2454,9 +2454,9 @@
               <a:buNone/>
             </a:pPr>
             <a:r>
-              <a:rPr lang="en-US" sz="1200" dirty="0">
-                <a:solidFill>
-                  <a:srgbClr val="8FB3C4"/>
+              <a:rPr lang="en-US" sz="1300" dirty="0">
+                <a:solidFill>
+                  <a:srgbClr val="A8C8D6"/>
                 </a:solidFill>
                 <a:latin typeface="Calibri" pitchFamily="34" charset="0"/>
                 <a:ea typeface="Calibri" pitchFamily="34" charset="-122"/>
@@ -2464,7 +2464,7 @@
               </a:rPr>
               <a:t>yu-ai-code-mother · 团队维护者汇报</a:t>
             </a:r>
-            <a:endParaRPr lang="en-US" sz="1200" dirty="0"/>
+            <a:endParaRPr lang="en-US" sz="1300" dirty="0"/>
           </a:p>
         </p:txBody>
       </p:sp>
@@ -2620,7 +2620,7 @@
         <p:spPr>
           <a:xfrm>
             <a:off x="502920" y="1325880"/>
-            <a:ext cx="8046720" cy="502920"/>
+            <a:ext cx="8046720" cy="457200"/>
           </a:xfrm>
           <a:prstGeom prst="rect">
             <a:avLst/>
@@ -2638,7 +2638,7 @@
             <a:r>
               <a:rPr lang="en-US" sz="1600" dirty="0">
                 <a:solidFill>
-                  <a:srgbClr val="B8D4E0"/>
+                  <a:srgbClr val="C5DCE6"/>
                 </a:solidFill>
                 <a:latin typeface="Calibri" pitchFamily="34" charset="0"/>
                 <a:ea typeface="Calibri" pitchFamily="34" charset="-122"/>
@@ -2658,12 +2658,12 @@
         </p:nvSpPr>
         <p:spPr>
           <a:xfrm>
-            <a:off x="502920" y="2103120"/>
-            <a:ext cx="2651760" cy="1554480"/>
+            <a:off x="502920" y="2011680"/>
+            <a:ext cx="2651760" cy="1508760"/>
           </a:xfrm>
           <a:prstGeom prst="roundRect">
             <a:avLst>
-              <a:gd name="adj" fmla="val 5882"/>
+              <a:gd name="adj" fmla="val 6061"/>
             </a:avLst>
           </a:prstGeom>
           <a:solidFill>
@@ -2680,8 +2680,8 @@
         </p:nvSpPr>
         <p:spPr>
           <a:xfrm>
-            <a:off x="685800" y="2286000"/>
-            <a:ext cx="2286000" cy="274320"/>
+            <a:off x="685800" y="2194560"/>
+            <a:ext cx="2286000" cy="256032"/>
           </a:xfrm>
           <a:prstGeom prst="rect">
             <a:avLst/>
@@ -2719,7 +2719,7 @@
         </p:nvSpPr>
         <p:spPr>
           <a:xfrm>
-            <a:off x="685800" y="2651760"/>
+            <a:off x="685800" y="2560320"/>
             <a:ext cx="2286000" cy="320040"/>
           </a:xfrm>
           <a:prstGeom prst="rect">
@@ -2758,34 +2758,34 @@
         </p:nvSpPr>
         <p:spPr>
           <a:xfrm>
-            <a:off x="685800" y="3108960"/>
-            <a:ext cx="2286000" cy="411480"/>
-          </a:xfrm>
-          <a:prstGeom prst="rect">
-            <a:avLst/>
-          </a:prstGeom>
-          <a:noFill/>
-          <a:ln/>
-        </p:spPr>
-        <p:txBody>
-          <a:bodyPr wrap="square" lIns="0" tIns="0" rIns="0" bIns="0" rtlCol="0" anchor="ctr"/>
-          <a:lstStyle/>
-          <a:p>
-            <a:pPr indent="0" marL="0">
-              <a:buNone/>
-            </a:pPr>
-            <a:r>
-              <a:rPr lang="en-US" sz="1300" dirty="0">
-                <a:solidFill>
-                  <a:srgbClr val="B8D4E0"/>
-                </a:solidFill>
-                <a:latin typeface="Calibri" pitchFamily="34" charset="0"/>
-                <a:ea typeface="Calibri" pitchFamily="34" charset="-122"/>
-                <a:cs typeface="Calibri" pitchFamily="34" charset="-120"/>
-              </a:rPr>
-              <a:t>生成、编辑、部署、管理闭环已形成</a:t>
-            </a:r>
-            <a:endParaRPr lang="en-US" sz="1300" dirty="0"/>
+            <a:off x="685800" y="3017520"/>
+            <a:ext cx="2286000" cy="365760"/>
+          </a:xfrm>
+          <a:prstGeom prst="rect">
+            <a:avLst/>
+          </a:prstGeom>
+          <a:noFill/>
+          <a:ln/>
+        </p:spPr>
+        <p:txBody>
+          <a:bodyPr wrap="square" lIns="0" tIns="0" rIns="0" bIns="0" rtlCol="0" anchor="ctr"/>
+          <a:lstStyle/>
+          <a:p>
+            <a:pPr indent="0" marL="0">
+              <a:buNone/>
+            </a:pPr>
+            <a:r>
+              <a:rPr lang="en-US" sz="1400" dirty="0">
+                <a:solidFill>
+                  <a:srgbClr val="C5DCE6"/>
+                </a:solidFill>
+                <a:latin typeface="Calibri" pitchFamily="34" charset="0"/>
+                <a:ea typeface="Calibri" pitchFamily="34" charset="-122"/>
+                <a:cs typeface="Calibri" pitchFamily="34" charset="-120"/>
+              </a:rPr>
+              <a:t>生成、编辑、部署、管理已闭环</a:t>
+            </a:r>
+            <a:endParaRPr lang="en-US" sz="1400" dirty="0"/>
           </a:p>
         </p:txBody>
       </p:sp>
@@ -2797,12 +2797,12 @@
         </p:nvSpPr>
         <p:spPr>
           <a:xfrm>
-            <a:off x="3291840" y="2103120"/>
-            <a:ext cx="2651760" cy="1554480"/>
+            <a:off x="3337560" y="2011680"/>
+            <a:ext cx="2651760" cy="1508760"/>
           </a:xfrm>
           <a:prstGeom prst="roundRect">
             <a:avLst>
-              <a:gd name="adj" fmla="val 5882"/>
+              <a:gd name="adj" fmla="val 6061"/>
             </a:avLst>
           </a:prstGeom>
           <a:solidFill>
@@ -2819,8 +2819,8 @@
         </p:nvSpPr>
         <p:spPr>
           <a:xfrm>
-            <a:off x="3474720" y="2286000"/>
-            <a:ext cx="2286000" cy="274320"/>
+            <a:off x="3520440" y="2194560"/>
+            <a:ext cx="2286000" cy="256032"/>
           </a:xfrm>
           <a:prstGeom prst="rect">
             <a:avLst/>
@@ -2858,7 +2858,7 @@
         </p:nvSpPr>
         <p:spPr>
           <a:xfrm>
-            <a:off x="3474720" y="2651760"/>
+            <a:off x="3520440" y="2560320"/>
             <a:ext cx="2286000" cy="320040"/>
           </a:xfrm>
           <a:prstGeom prst="rect">
@@ -2897,26 +2897,26 @@
         </p:nvSpPr>
         <p:spPr>
           <a:xfrm>
-            <a:off x="3474720" y="3108960"/>
-            <a:ext cx="2286000" cy="411480"/>
-          </a:xfrm>
-          <a:prstGeom prst="rect">
-            <a:avLst/>
-          </a:prstGeom>
-          <a:noFill/>
-          <a:ln/>
-        </p:spPr>
-        <p:txBody>
-          <a:bodyPr wrap="square" lIns="0" tIns="0" rIns="0" bIns="0" rtlCol="0" anchor="ctr"/>
-          <a:lstStyle/>
-          <a:p>
-            <a:pPr indent="0" marL="0">
-              <a:buNone/>
-            </a:pPr>
-            <a:r>
-              <a:rPr lang="en-US" sz="1300" dirty="0">
-                <a:solidFill>
-                  <a:srgbClr val="B8D4E0"/>
+            <a:off x="3520440" y="3017520"/>
+            <a:ext cx="2286000" cy="365760"/>
+          </a:xfrm>
+          <a:prstGeom prst="rect">
+            <a:avLst/>
+          </a:prstGeom>
+          <a:noFill/>
+          <a:ln/>
+        </p:spPr>
+        <p:txBody>
+          <a:bodyPr wrap="square" lIns="0" tIns="0" rIns="0" bIns="0" rtlCol="0" anchor="ctr"/>
+          <a:lstStyle/>
+          <a:p>
+            <a:pPr indent="0" marL="0">
+              <a:buNone/>
+            </a:pPr>
+            <a:r>
+              <a:rPr lang="en-US" sz="1400" dirty="0">
+                <a:solidFill>
+                  <a:srgbClr val="C5DCE6"/>
                 </a:solidFill>
                 <a:latin typeface="Calibri" pitchFamily="34" charset="0"/>
                 <a:ea typeface="Calibri" pitchFamily="34" charset="-122"/>
@@ -2924,7 +2924,7 @@
               </a:rPr>
               <a:t>近 7 天无提交，维护节奏中断</a:t>
             </a:r>
-            <a:endParaRPr lang="en-US" sz="1300" dirty="0"/>
+            <a:endParaRPr lang="en-US" sz="1400" dirty="0"/>
           </a:p>
         </p:txBody>
       </p:sp>
@@ -2936,12 +2936,12 @@
         </p:nvSpPr>
         <p:spPr>
           <a:xfrm>
-            <a:off x="6080760" y="2103120"/>
-            <a:ext cx="2651760" cy="1554480"/>
+            <a:off x="6172200" y="2011680"/>
+            <a:ext cx="2651760" cy="1508760"/>
           </a:xfrm>
           <a:prstGeom prst="roundRect">
             <a:avLst>
-              <a:gd name="adj" fmla="val 5882"/>
+              <a:gd name="adj" fmla="val 6061"/>
             </a:avLst>
           </a:prstGeom>
           <a:solidFill>
@@ -2958,8 +2958,8 @@
         </p:nvSpPr>
         <p:spPr>
           <a:xfrm>
-            <a:off x="6263640" y="2286000"/>
-            <a:ext cx="2286000" cy="274320"/>
+            <a:off x="6355080" y="2194560"/>
+            <a:ext cx="2286000" cy="256032"/>
           </a:xfrm>
           <a:prstGeom prst="rect">
             <a:avLst/>
@@ -2997,7 +2997,7 @@
         </p:nvSpPr>
         <p:spPr>
           <a:xfrm>
-            <a:off x="6263640" y="2651760"/>
+            <a:off x="6355080" y="2560320"/>
             <a:ext cx="2286000" cy="320040"/>
           </a:xfrm>
           <a:prstGeom prst="rect">
@@ -3036,8 +3036,47 @@
         </p:nvSpPr>
         <p:spPr>
           <a:xfrm>
-            <a:off x="6263640" y="3108960"/>
-            <a:ext cx="2286000" cy="411480"/>
+            <a:off x="6355080" y="3017520"/>
+            <a:ext cx="2286000" cy="365760"/>
+          </a:xfrm>
+          <a:prstGeom prst="rect">
+            <a:avLst/>
+          </a:prstGeom>
+          <a:noFill/>
+          <a:ln/>
+        </p:spPr>
+        <p:txBody>
+          <a:bodyPr wrap="square" lIns="0" tIns="0" rIns="0" bIns="0" rtlCol="0" anchor="ctr"/>
+          <a:lstStyle/>
+          <a:p>
+            <a:pPr indent="0" marL="0">
+              <a:buNone/>
+            </a:pPr>
+            <a:r>
+              <a:rPr lang="en-US" sz="1400" dirty="0">
+                <a:solidFill>
+                  <a:srgbClr val="C5DCE6"/>
+                </a:solidFill>
+                <a:latin typeface="Calibri" pitchFamily="34" charset="0"/>
+                <a:ea typeface="Calibri" pitchFamily="34" charset="-122"/>
+                <a:cs typeface="Calibri" pitchFamily="34" charset="-120"/>
+              </a:rPr>
+              <a:t>CI 与可复现测试环境优先</a:t>
+            </a:r>
+            <a:endParaRPr lang="en-US" sz="1400" dirty="0"/>
+          </a:p>
+        </p:txBody>
+      </p:sp>
+      <p:sp>
+        <p:nvSpPr>
+          <p:cNvPr id="19" name="Text 17"/>
+          <p:cNvSpPr/>
+          <p:nvPr/>
+        </p:nvSpPr>
+        <p:spPr>
+          <a:xfrm>
+            <a:off x="502920" y="3840480"/>
+            <a:ext cx="8046720" cy="365760"/>
           </a:xfrm>
           <a:prstGeom prst="rect">
             <a:avLst/>
@@ -3055,52 +3094,13 @@
             <a:r>
               <a:rPr lang="en-US" sz="1300" dirty="0">
                 <a:solidFill>
-                  <a:srgbClr val="B8D4E0"/>
-                </a:solidFill>
-                <a:latin typeface="Calibri" pitchFamily="34" charset="0"/>
-                <a:ea typeface="Calibri" pitchFamily="34" charset="-122"/>
-                <a:cs typeface="Calibri" pitchFamily="34" charset="-120"/>
-              </a:rPr>
-              <a:t>CI 与可复现测试环境优先</a:t>
-            </a:r>
-            <a:endParaRPr lang="en-US" sz="1300" dirty="0"/>
-          </a:p>
-        </p:txBody>
-      </p:sp>
-      <p:sp>
-        <p:nvSpPr>
-          <p:cNvPr id="19" name="Text 17"/>
-          <p:cNvSpPr/>
-          <p:nvPr/>
-        </p:nvSpPr>
-        <p:spPr>
-          <a:xfrm>
-            <a:off x="502920" y="3977640"/>
-            <a:ext cx="8046720" cy="365760"/>
-          </a:xfrm>
-          <a:prstGeom prst="rect">
-            <a:avLst/>
-          </a:prstGeom>
-          <a:noFill/>
-          <a:ln/>
-        </p:spPr>
-        <p:txBody>
-          <a:bodyPr wrap="square" lIns="0" tIns="0" rIns="0" bIns="0" rtlCol="0" anchor="ctr"/>
-          <a:lstStyle/>
-          <a:p>
-            <a:pPr indent="0" marL="0">
-              <a:buNone/>
-            </a:pPr>
-            <a:r>
-              <a:rPr lang="en-US" sz="1300" dirty="0">
-                <a:solidFill>
                   <a:srgbClr val="00A896"/>
                 </a:solidFill>
                 <a:latin typeface="Calibri" pitchFamily="34" charset="0"/>
                 <a:ea typeface="Calibri" pitchFamily="34" charset="-122"/>
                 <a:cs typeface="Calibri" pitchFamily="34" charset="-120"/>
               </a:rPr>
-              <a:t>下一次状态更新重点：CI 首次运行结果 · 外部依赖隔离进度 · Issue #5 修复验证 · 核心生成链路指标</a:t>
+              <a:t>下一次更新重点：CI 首次运行结果 · 外部依赖隔离 · Issue #5 修复验证 · 核心生成链路指标</a:t>
             </a:r>
             <a:endParaRPr lang="en-US" sz="1300" dirty="0"/>
           </a:p>
@@ -3131,9 +3131,9 @@
               <a:buNone/>
             </a:pPr>
             <a:r>
-              <a:rPr lang="en-US" sz="1100" dirty="0">
-                <a:solidFill>
-                  <a:srgbClr val="7A9AAD"/>
+              <a:rPr lang="en-US" sz="1200" dirty="0">
+                <a:solidFill>
+                  <a:srgbClr val="A8C8D6"/>
                 </a:solidFill>
                 <a:latin typeface="Calibri" pitchFamily="34" charset="0"/>
                 <a:ea typeface="Calibri" pitchFamily="34" charset="-122"/>
@@ -3141,7 +3141,7 @@
               </a:rPr>
               <a:t>yu-ai-code-mother · DAILY STATUS · 2026-07-25</a:t>
             </a:r>
-            <a:endParaRPr lang="en-US" sz="1100" dirty="0"/>
+            <a:endParaRPr lang="en-US" sz="1200" dirty="0"/>
           </a:p>
         </p:txBody>
       </p:sp>
@@ -3170,9 +3170,9 @@
               <a:buNone/>
             </a:pPr>
             <a:r>
-              <a:rPr lang="en-US" sz="1100" dirty="0">
-                <a:solidFill>
-                  <a:srgbClr val="7A9AAD"/>
+              <a:rPr lang="en-US" sz="1200" dirty="0">
+                <a:solidFill>
+                  <a:srgbClr val="A8C8D6"/>
                 </a:solidFill>
                 <a:latin typeface="Calibri" pitchFamily="34" charset="0"/>
                 <a:ea typeface="Calibri" pitchFamily="34" charset="-122"/>
@@ -3180,7 +3180,7 @@
               </a:rPr>
               <a:t>10 / 10</a:t>
             </a:r>
-            <a:endParaRPr lang="en-US" sz="1100" dirty="0"/>
+            <a:endParaRPr lang="en-US" sz="1200" dirty="0"/>
           </a:p>
         </p:txBody>
       </p:sp>
@@ -3257,12 +3257,12 @@
         </p:nvSpPr>
         <p:spPr>
           <a:xfrm>
-            <a:off x="457200" y="256032"/>
-            <a:ext cx="2377440" cy="292608"/>
+            <a:off x="457200" y="292608"/>
+            <a:ext cx="2468880" cy="274320"/>
           </a:xfrm>
           <a:prstGeom prst="roundRect">
             <a:avLst>
-              <a:gd name="adj" fmla="val 18750"/>
+              <a:gd name="adj" fmla="val 20000"/>
             </a:avLst>
           </a:prstGeom>
           <a:solidFill>
@@ -3279,8 +3279,8 @@
         </p:nvSpPr>
         <p:spPr>
           <a:xfrm>
-            <a:off x="457200" y="256032"/>
-            <a:ext cx="2377440" cy="292608"/>
+            <a:off x="457200" y="292608"/>
+            <a:ext cx="2468880" cy="274320"/>
           </a:xfrm>
           <a:prstGeom prst="rect">
             <a:avLst/>
@@ -3318,24 +3318,24 @@
         </p:nvSpPr>
         <p:spPr>
           <a:xfrm>
-            <a:off x="457200" y="640080"/>
-            <a:ext cx="5486400" cy="457200"/>
-          </a:xfrm>
-          <a:prstGeom prst="rect">
-            <a:avLst/>
-          </a:prstGeom>
-          <a:noFill/>
-          <a:ln/>
-        </p:spPr>
-        <p:txBody>
-          <a:bodyPr wrap="square" lIns="0" tIns="0" rIns="0" bIns="0" rtlCol="0" anchor="ctr"/>
-          <a:lstStyle/>
-          <a:p>
-            <a:pPr indent="0" marL="0">
-              <a:buNone/>
-            </a:pPr>
-            <a:r>
-              <a:rPr lang="en-US" sz="3600" b="1" dirty="0">
+            <a:off x="457200" y="658368"/>
+            <a:ext cx="5486400" cy="411480"/>
+          </a:xfrm>
+          <a:prstGeom prst="rect">
+            <a:avLst/>
+          </a:prstGeom>
+          <a:noFill/>
+          <a:ln/>
+        </p:spPr>
+        <p:txBody>
+          <a:bodyPr wrap="square" lIns="0" tIns="0" rIns="0" bIns="0" rtlCol="0" anchor="ctr"/>
+          <a:lstStyle/>
+          <a:p>
+            <a:pPr indent="0" marL="0">
+              <a:buNone/>
+            </a:pPr>
+            <a:r>
+              <a:rPr lang="en-US" sz="3400" b="1" dirty="0">
                 <a:solidFill>
                   <a:srgbClr val="1A2B3C"/>
                 </a:solidFill>
@@ -3345,7 +3345,7 @@
               </a:rPr>
               <a:t>项目概览</a:t>
             </a:r>
-            <a:endParaRPr lang="en-US" sz="3600" dirty="0"/>
+            <a:endParaRPr lang="en-US" sz="3400" dirty="0"/>
           </a:p>
         </p:txBody>
       </p:sp>
@@ -3358,11 +3358,11 @@
         <p:spPr>
           <a:xfrm>
             <a:off x="457200" y="1234440"/>
-            <a:ext cx="1920240" cy="1234440"/>
+            <a:ext cx="1965960" cy="1097280"/>
           </a:xfrm>
           <a:prstGeom prst="roundRect">
             <a:avLst>
-              <a:gd name="adj" fmla="val 7407"/>
+              <a:gd name="adj" fmla="val 8333"/>
             </a:avLst>
           </a:prstGeom>
           <a:solidFill>
@@ -3370,7 +3370,7 @@
           </a:solidFill>
           <a:ln/>
           <a:effectLst>
-            <a:outerShdw sx="100000" sy="100000" kx="0" ky="0" algn="bl" rotWithShape="0" blurRad="101600" dist="25400" dir="8100000">
+            <a:outerShdw sx="100000" sy="100000" kx="0" ky="0" algn="bl" rotWithShape="0" blurRad="76200" dist="12700" dir="8100000">
               <a:srgbClr val="000000">
                 <a:alpha val="8000"/>
               </a:srgbClr>
@@ -3387,7 +3387,7 @@
         <p:spPr>
           <a:xfrm>
             <a:off x="457200" y="1234440"/>
-            <a:ext cx="109728" cy="1234440"/>
+            <a:ext cx="91440" cy="1097280"/>
           </a:xfrm>
           <a:prstGeom prst="rect">
             <a:avLst/>
@@ -3406,24 +3406,24 @@
         </p:nvSpPr>
         <p:spPr>
           <a:xfrm>
-            <a:off x="685800" y="1371600"/>
-            <a:ext cx="1554480" cy="640080"/>
-          </a:xfrm>
-          <a:prstGeom prst="rect">
-            <a:avLst/>
-          </a:prstGeom>
-          <a:noFill/>
-          <a:ln/>
-        </p:spPr>
-        <p:txBody>
-          <a:bodyPr wrap="square" lIns="0" tIns="0" rIns="0" bIns="0" rtlCol="0" anchor="ctr"/>
-          <a:lstStyle/>
-          <a:p>
-            <a:pPr indent="0" marL="0">
-              <a:buNone/>
-            </a:pPr>
-            <a:r>
-              <a:rPr lang="en-US" sz="3600" b="1" dirty="0">
+            <a:off x="658368" y="1325880"/>
+            <a:ext cx="1645920" cy="548640"/>
+          </a:xfrm>
+          <a:prstGeom prst="rect">
+            <a:avLst/>
+          </a:prstGeom>
+          <a:noFill/>
+          <a:ln/>
+        </p:spPr>
+        <p:txBody>
+          <a:bodyPr wrap="square" lIns="0" tIns="0" rIns="0" bIns="0" rtlCol="0" anchor="ctr"/>
+          <a:lstStyle/>
+          <a:p>
+            <a:pPr indent="0" marL="0">
+              <a:buNone/>
+            </a:pPr>
+            <a:r>
+              <a:rPr lang="en-US" sz="3200" b="1" dirty="0">
                 <a:solidFill>
                   <a:srgbClr val="065A82"/>
                 </a:solidFill>
@@ -3433,7 +3433,7 @@
               </a:rPr>
               <a:t>7</a:t>
             </a:r>
-            <a:endParaRPr lang="en-US" sz="3600" dirty="0"/>
+            <a:endParaRPr lang="en-US" sz="3200" dirty="0"/>
           </a:p>
         </p:txBody>
       </p:sp>
@@ -3445,8 +3445,8 @@
         </p:nvSpPr>
         <p:spPr>
           <a:xfrm>
-            <a:off x="685800" y="2057400"/>
-            <a:ext cx="1554480" cy="274320"/>
+            <a:off x="658368" y="1920240"/>
+            <a:ext cx="1645920" cy="274320"/>
           </a:xfrm>
           <a:prstGeom prst="rect">
             <a:avLst/>
@@ -3464,7 +3464,7 @@
             <a:r>
               <a:rPr lang="en-US" sz="1300" dirty="0">
                 <a:solidFill>
-                  <a:srgbClr val="5A6B7C"/>
+                  <a:srgbClr val="3D5163"/>
                 </a:solidFill>
                 <a:latin typeface="Calibri" pitchFamily="34" charset="0"/>
                 <a:ea typeface="Calibri" pitchFamily="34" charset="-122"/>
@@ -3484,12 +3484,12 @@
         </p:nvSpPr>
         <p:spPr>
           <a:xfrm>
-            <a:off x="2560320" y="1234440"/>
-            <a:ext cx="1920240" cy="1234440"/>
+            <a:off x="2606040" y="1234440"/>
+            <a:ext cx="1965960" cy="1097280"/>
           </a:xfrm>
           <a:prstGeom prst="roundRect">
             <a:avLst>
-              <a:gd name="adj" fmla="val 7407"/>
+              <a:gd name="adj" fmla="val 8333"/>
             </a:avLst>
           </a:prstGeom>
           <a:solidFill>
@@ -3497,7 +3497,7 @@
           </a:solidFill>
           <a:ln/>
           <a:effectLst>
-            <a:outerShdw sx="100000" sy="100000" kx="0" ky="0" algn="bl" rotWithShape="0" blurRad="101600" dist="25400" dir="8100000">
+            <a:outerShdw sx="100000" sy="100000" kx="0" ky="0" algn="bl" rotWithShape="0" blurRad="76200" dist="12700" dir="8100000">
               <a:srgbClr val="000000">
                 <a:alpha val="8000"/>
               </a:srgbClr>
@@ -3513,8 +3513,8 @@
         </p:nvSpPr>
         <p:spPr>
           <a:xfrm>
-            <a:off x="2560320" y="1234440"/>
-            <a:ext cx="109728" cy="1234440"/>
+            <a:off x="2606040" y="1234440"/>
+            <a:ext cx="91440" cy="1097280"/>
           </a:xfrm>
           <a:prstGeom prst="rect">
             <a:avLst/>
@@ -3533,24 +3533,24 @@
         </p:nvSpPr>
         <p:spPr>
           <a:xfrm>
-            <a:off x="2788920" y="1371600"/>
-            <a:ext cx="1554480" cy="640080"/>
-          </a:xfrm>
-          <a:prstGeom prst="rect">
-            <a:avLst/>
-          </a:prstGeom>
-          <a:noFill/>
-          <a:ln/>
-        </p:spPr>
-        <p:txBody>
-          <a:bodyPr wrap="square" lIns="0" tIns="0" rIns="0" bIns="0" rtlCol="0" anchor="ctr"/>
-          <a:lstStyle/>
-          <a:p>
-            <a:pPr indent="0" marL="0">
-              <a:buNone/>
-            </a:pPr>
-            <a:r>
-              <a:rPr lang="en-US" sz="3600" b="1" dirty="0">
+            <a:off x="2807208" y="1325880"/>
+            <a:ext cx="1645920" cy="548640"/>
+          </a:xfrm>
+          <a:prstGeom prst="rect">
+            <a:avLst/>
+          </a:prstGeom>
+          <a:noFill/>
+          <a:ln/>
+        </p:spPr>
+        <p:txBody>
+          <a:bodyPr wrap="square" lIns="0" tIns="0" rIns="0" bIns="0" rtlCol="0" anchor="ctr"/>
+          <a:lstStyle/>
+          <a:p>
+            <a:pPr indent="0" marL="0">
+              <a:buNone/>
+            </a:pPr>
+            <a:r>
+              <a:rPr lang="en-US" sz="3200" b="1" dirty="0">
                 <a:solidFill>
                   <a:srgbClr val="028090"/>
                 </a:solidFill>
@@ -3560,7 +3560,7 @@
               </a:rPr>
               <a:t>287</a:t>
             </a:r>
-            <a:endParaRPr lang="en-US" sz="3600" dirty="0"/>
+            <a:endParaRPr lang="en-US" sz="3200" dirty="0"/>
           </a:p>
         </p:txBody>
       </p:sp>
@@ -3572,8 +3572,8 @@
         </p:nvSpPr>
         <p:spPr>
           <a:xfrm>
-            <a:off x="2788920" y="2057400"/>
-            <a:ext cx="1554480" cy="274320"/>
+            <a:off x="2807208" y="1920240"/>
+            <a:ext cx="1645920" cy="274320"/>
           </a:xfrm>
           <a:prstGeom prst="rect">
             <a:avLst/>
@@ -3591,7 +3591,7 @@
             <a:r>
               <a:rPr lang="en-US" sz="1300" dirty="0">
                 <a:solidFill>
-                  <a:srgbClr val="5A6B7C"/>
+                  <a:srgbClr val="3D5163"/>
                 </a:solidFill>
                 <a:latin typeface="Calibri" pitchFamily="34" charset="0"/>
                 <a:ea typeface="Calibri" pitchFamily="34" charset="-122"/>
@@ -3611,12 +3611,12 @@
         </p:nvSpPr>
         <p:spPr>
           <a:xfrm>
-            <a:off x="4663440" y="1234440"/>
-            <a:ext cx="1920240" cy="1234440"/>
+            <a:off x="4754880" y="1234440"/>
+            <a:ext cx="1965960" cy="1097280"/>
           </a:xfrm>
           <a:prstGeom prst="roundRect">
             <a:avLst>
-              <a:gd name="adj" fmla="val 7407"/>
+              <a:gd name="adj" fmla="val 8333"/>
             </a:avLst>
           </a:prstGeom>
           <a:solidFill>
@@ -3624,7 +3624,7 @@
           </a:solidFill>
           <a:ln/>
           <a:effectLst>
-            <a:outerShdw sx="100000" sy="100000" kx="0" ky="0" algn="bl" rotWithShape="0" blurRad="101600" dist="25400" dir="8100000">
+            <a:outerShdw sx="100000" sy="100000" kx="0" ky="0" algn="bl" rotWithShape="0" blurRad="76200" dist="12700" dir="8100000">
               <a:srgbClr val="000000">
                 <a:alpha val="8000"/>
               </a:srgbClr>
@@ -3640,8 +3640,8 @@
         </p:nvSpPr>
         <p:spPr>
           <a:xfrm>
-            <a:off x="4663440" y="1234440"/>
-            <a:ext cx="109728" cy="1234440"/>
+            <a:off x="4754880" y="1234440"/>
+            <a:ext cx="91440" cy="1097280"/>
           </a:xfrm>
           <a:prstGeom prst="rect">
             <a:avLst/>
@@ -3660,24 +3660,24 @@
         </p:nvSpPr>
         <p:spPr>
           <a:xfrm>
-            <a:off x="4892040" y="1371600"/>
-            <a:ext cx="1554480" cy="640080"/>
-          </a:xfrm>
-          <a:prstGeom prst="rect">
-            <a:avLst/>
-          </a:prstGeom>
-          <a:noFill/>
-          <a:ln/>
-        </p:spPr>
-        <p:txBody>
-          <a:bodyPr wrap="square" lIns="0" tIns="0" rIns="0" bIns="0" rtlCol="0" anchor="ctr"/>
-          <a:lstStyle/>
-          <a:p>
-            <a:pPr indent="0" marL="0">
-              <a:buNone/>
-            </a:pPr>
-            <a:r>
-              <a:rPr lang="en-US" sz="3600" b="1" dirty="0">
+            <a:off x="4956048" y="1325880"/>
+            <a:ext cx="1645920" cy="548640"/>
+          </a:xfrm>
+          <a:prstGeom prst="rect">
+            <a:avLst/>
+          </a:prstGeom>
+          <a:noFill/>
+          <a:ln/>
+        </p:spPr>
+        <p:txBody>
+          <a:bodyPr wrap="square" lIns="0" tIns="0" rIns="0" bIns="0" rtlCol="0" anchor="ctr"/>
+          <a:lstStyle/>
+          <a:p>
+            <a:pPr indent="0" marL="0">
+              <a:buNone/>
+            </a:pPr>
+            <a:r>
+              <a:rPr lang="en-US" sz="3200" b="1" dirty="0">
                 <a:solidFill>
                   <a:srgbClr val="00A896"/>
                 </a:solidFill>
@@ -3687,7 +3687,7 @@
               </a:rPr>
               <a:t>17</a:t>
             </a:r>
-            <a:endParaRPr lang="en-US" sz="3600" dirty="0"/>
+            <a:endParaRPr lang="en-US" sz="3200" dirty="0"/>
           </a:p>
         </p:txBody>
       </p:sp>
@@ -3699,8 +3699,8 @@
         </p:nvSpPr>
         <p:spPr>
           <a:xfrm>
-            <a:off x="4892040" y="2057400"/>
-            <a:ext cx="1554480" cy="274320"/>
+            <a:off x="4956048" y="1920240"/>
+            <a:ext cx="1645920" cy="274320"/>
           </a:xfrm>
           <a:prstGeom prst="rect">
             <a:avLst/>
@@ -3718,13 +3718,13 @@
             <a:r>
               <a:rPr lang="en-US" sz="1300" dirty="0">
                 <a:solidFill>
-                  <a:srgbClr val="5A6B7C"/>
-                </a:solidFill>
-                <a:latin typeface="Calibri" pitchFamily="34" charset="0"/>
-                <a:ea typeface="Calibri" pitchFamily="34" charset="-122"/>
-                <a:cs typeface="Calibri" pitchFamily="34" charset="-120"/>
-              </a:rPr>
-              <a:t>Vue 页面与组件</a:t>
+                  <a:srgbClr val="3D5163"/>
+                </a:solidFill>
+                <a:latin typeface="Calibri" pitchFamily="34" charset="0"/>
+                <a:ea typeface="Calibri" pitchFamily="34" charset="-122"/>
+                <a:cs typeface="Calibri" pitchFamily="34" charset="-120"/>
+              </a:rPr>
+              <a:t>Vue 页面组件</a:t>
             </a:r>
             <a:endParaRPr lang="en-US" sz="1300" dirty="0"/>
           </a:p>
@@ -3738,12 +3738,12 @@
         </p:nvSpPr>
         <p:spPr>
           <a:xfrm>
-            <a:off x="6766560" y="1234440"/>
-            <a:ext cx="1920240" cy="1234440"/>
+            <a:off x="6903720" y="1234440"/>
+            <a:ext cx="1965960" cy="1097280"/>
           </a:xfrm>
           <a:prstGeom prst="roundRect">
             <a:avLst>
-              <a:gd name="adj" fmla="val 7407"/>
+              <a:gd name="adj" fmla="val 8333"/>
             </a:avLst>
           </a:prstGeom>
           <a:solidFill>
@@ -3751,7 +3751,7 @@
           </a:solidFill>
           <a:ln/>
           <a:effectLst>
-            <a:outerShdw sx="100000" sy="100000" kx="0" ky="0" algn="bl" rotWithShape="0" blurRad="101600" dist="25400" dir="8100000">
+            <a:outerShdw sx="100000" sy="100000" kx="0" ky="0" algn="bl" rotWithShape="0" blurRad="76200" dist="12700" dir="8100000">
               <a:srgbClr val="000000">
                 <a:alpha val="8000"/>
               </a:srgbClr>
@@ -3767,8 +3767,8 @@
         </p:nvSpPr>
         <p:spPr>
           <a:xfrm>
-            <a:off x="6766560" y="1234440"/>
-            <a:ext cx="109728" cy="1234440"/>
+            <a:off x="6903720" y="1234440"/>
+            <a:ext cx="91440" cy="1097280"/>
           </a:xfrm>
           <a:prstGeom prst="rect">
             <a:avLst/>
@@ -3787,24 +3787,24 @@
         </p:nvSpPr>
         <p:spPr>
           <a:xfrm>
-            <a:off x="6995160" y="1371600"/>
-            <a:ext cx="1554480" cy="640080"/>
-          </a:xfrm>
-          <a:prstGeom prst="rect">
-            <a:avLst/>
-          </a:prstGeom>
-          <a:noFill/>
-          <a:ln/>
-        </p:spPr>
-        <p:txBody>
-          <a:bodyPr wrap="square" lIns="0" tIns="0" rIns="0" bIns="0" rtlCol="0" anchor="ctr"/>
-          <a:lstStyle/>
-          <a:p>
-            <a:pPr indent="0" marL="0">
-              <a:buNone/>
-            </a:pPr>
-            <a:r>
-              <a:rPr lang="en-US" sz="3600" b="1" dirty="0">
+            <a:off x="7104888" y="1325880"/>
+            <a:ext cx="1645920" cy="548640"/>
+          </a:xfrm>
+          <a:prstGeom prst="rect">
+            <a:avLst/>
+          </a:prstGeom>
+          <a:noFill/>
+          <a:ln/>
+        </p:spPr>
+        <p:txBody>
+          <a:bodyPr wrap="square" lIns="0" tIns="0" rIns="0" bIns="0" rtlCol="0" anchor="ctr"/>
+          <a:lstStyle/>
+          <a:p>
+            <a:pPr indent="0" marL="0">
+              <a:buNone/>
+            </a:pPr>
+            <a:r>
+              <a:rPr lang="en-US" sz="3200" b="1" dirty="0">
                 <a:solidFill>
                   <a:srgbClr val="1C7293"/>
                 </a:solidFill>
@@ -3814,7 +3814,7 @@
               </a:rPr>
               <a:t>60</a:t>
             </a:r>
-            <a:endParaRPr lang="en-US" sz="3600" dirty="0"/>
+            <a:endParaRPr lang="en-US" sz="3200" dirty="0"/>
           </a:p>
         </p:txBody>
       </p:sp>
@@ -3826,8 +3826,8 @@
         </p:nvSpPr>
         <p:spPr>
           <a:xfrm>
-            <a:off x="6995160" y="2057400"/>
-            <a:ext cx="1554480" cy="274320"/>
+            <a:off x="7104888" y="1920240"/>
+            <a:ext cx="1645920" cy="274320"/>
           </a:xfrm>
           <a:prstGeom prst="rect">
             <a:avLst/>
@@ -3845,7 +3845,7 @@
             <a:r>
               <a:rPr lang="en-US" sz="1300" dirty="0">
                 <a:solidFill>
-                  <a:srgbClr val="5A6B7C"/>
+                  <a:srgbClr val="3D5163"/>
                 </a:solidFill>
                 <a:latin typeface="Calibri" pitchFamily="34" charset="0"/>
                 <a:ea typeface="Calibri" pitchFamily="34" charset="-122"/>
@@ -3865,12 +3865,12 @@
         </p:nvSpPr>
         <p:spPr>
           <a:xfrm>
-            <a:off x="457200" y="2697480"/>
-            <a:ext cx="5303520" cy="1783080"/>
+            <a:off x="457200" y="2606040"/>
+            <a:ext cx="5120640" cy="1874520"/>
           </a:xfrm>
           <a:prstGeom prst="roundRect">
             <a:avLst>
-              <a:gd name="adj" fmla="val 5128"/>
+              <a:gd name="adj" fmla="val 4878"/>
             </a:avLst>
           </a:prstGeom>
           <a:solidFill>
@@ -3887,8 +3887,8 @@
         </p:nvSpPr>
         <p:spPr>
           <a:xfrm>
-            <a:off x="685800" y="2880360"/>
-            <a:ext cx="4846320" cy="274320"/>
+            <a:off x="685800" y="2788920"/>
+            <a:ext cx="4663440" cy="256032"/>
           </a:xfrm>
           <a:prstGeom prst="rect">
             <a:avLst/>
@@ -3926,24 +3926,24 @@
         </p:nvSpPr>
         <p:spPr>
           <a:xfrm>
-            <a:off x="685800" y="3200400"/>
-            <a:ext cx="4846320" cy="365760"/>
-          </a:xfrm>
-          <a:prstGeom prst="rect">
-            <a:avLst/>
-          </a:prstGeom>
-          <a:noFill/>
-          <a:ln/>
-        </p:spPr>
-        <p:txBody>
-          <a:bodyPr wrap="square" lIns="0" tIns="0" rIns="0" bIns="0" rtlCol="0" anchor="ctr"/>
-          <a:lstStyle/>
-          <a:p>
-            <a:pPr indent="0" marL="0">
-              <a:buNone/>
-            </a:pPr>
-            <a:r>
-              <a:rPr lang="en-US" sz="1800" b="1" dirty="0">
+            <a:off x="685800" y="3108960"/>
+            <a:ext cx="4663440" cy="365760"/>
+          </a:xfrm>
+          <a:prstGeom prst="rect">
+            <a:avLst/>
+          </a:prstGeom>
+          <a:noFill/>
+          <a:ln/>
+        </p:spPr>
+        <p:txBody>
+          <a:bodyPr wrap="square" lIns="0" tIns="0" rIns="0" bIns="0" rtlCol="0" anchor="ctr"/>
+          <a:lstStyle/>
+          <a:p>
+            <a:pPr indent="0" marL="0">
+              <a:buNone/>
+            </a:pPr>
+            <a:r>
+              <a:rPr lang="en-US" sz="1700" b="1" dirty="0">
                 <a:solidFill>
                   <a:srgbClr val="1A2B3C"/>
                 </a:solidFill>
@@ -3953,7 +3953,7 @@
               </a:rPr>
               <a:t>产品链路已完整，工程交付仍需补强。</a:t>
             </a:r>
-            <a:endParaRPr lang="en-US" sz="1800" dirty="0"/>
+            <a:endParaRPr lang="en-US" sz="1700" dirty="0"/>
           </a:p>
         </p:txBody>
       </p:sp>
@@ -3965,8 +3965,8 @@
         </p:nvSpPr>
         <p:spPr>
           <a:xfrm>
-            <a:off x="685800" y="3657600"/>
-            <a:ext cx="4846320" cy="640080"/>
+            <a:off x="685800" y="3566160"/>
+            <a:ext cx="4663440" cy="731520"/>
           </a:xfrm>
           <a:prstGeom prst="rect">
             <a:avLst/>
@@ -3984,13 +3984,13 @@
             <a:r>
               <a:rPr lang="en-US" sz="1400" dirty="0">
                 <a:solidFill>
-                  <a:srgbClr val="5A6B7C"/>
-                </a:solidFill>
-                <a:latin typeface="Calibri" pitchFamily="34" charset="0"/>
-                <a:ea typeface="Calibri" pitchFamily="34" charset="-122"/>
-                <a:cs typeface="Calibri" pitchFamily="34" charset="-120"/>
-              </a:rPr>
-              <a:t>平台覆盖“描述需求 → AI 生成 → 可视化修改 → 云端部署 → 分享/下载 → 后台治理”的主流程；当前关注点应从功能扩张转向可重复验证与持续交付。</a:t>
+                  <a:srgbClr val="3D5163"/>
+                </a:solidFill>
+                <a:latin typeface="Calibri" pitchFamily="34" charset="0"/>
+                <a:ea typeface="Calibri" pitchFamily="34" charset="-122"/>
+                <a:cs typeface="Calibri" pitchFamily="34" charset="-120"/>
+              </a:rPr>
+              <a:t>平台覆盖“描述需求 → AI 生成 → 可视化修改 → 云端部署 → 分享/下载 → 后台治理”主流程；关注点应从功能扩张转向可重复验证与持续交付。</a:t>
             </a:r>
             <a:endParaRPr lang="en-US" sz="1400" dirty="0"/>
           </a:p>
@@ -4004,12 +4004,12 @@
         </p:nvSpPr>
         <p:spPr>
           <a:xfrm>
-            <a:off x="5943600" y="2697480"/>
-            <a:ext cx="2743200" cy="1783080"/>
+            <a:off x="5852160" y="2606040"/>
+            <a:ext cx="2834640" cy="1874520"/>
           </a:xfrm>
           <a:prstGeom prst="roundRect">
             <a:avLst>
-              <a:gd name="adj" fmla="val 5128"/>
+              <a:gd name="adj" fmla="val 4878"/>
             </a:avLst>
           </a:prstGeom>
           <a:solidFill>
@@ -4026,7 +4026,7 @@
         </p:nvSpPr>
         <p:spPr>
           <a:xfrm>
-            <a:off x="6126480" y="2880360"/>
+            <a:off x="6080760" y="2788920"/>
             <a:ext cx="2377440" cy="256032"/>
           </a:xfrm>
           <a:prstGeom prst="rect">
@@ -4043,7 +4043,7 @@
               <a:buNone/>
             </a:pPr>
             <a:r>
-              <a:rPr lang="en-US" sz="1200" b="1" dirty="0">
+              <a:rPr lang="en-US" sz="1300" b="1" dirty="0">
                 <a:solidFill>
                   <a:srgbClr val="02C39A"/>
                 </a:solidFill>
@@ -4053,7 +4053,7 @@
               </a:rPr>
               <a:t>状态信号</a:t>
             </a:r>
-            <a:endParaRPr lang="en-US" sz="1200" dirty="0"/>
+            <a:endParaRPr lang="en-US" sz="1300" dirty="0"/>
           </a:p>
         </p:txBody>
       </p:sp>
@@ -4065,7 +4065,7 @@
         </p:nvSpPr>
         <p:spPr>
           <a:xfrm>
-            <a:off x="6126480" y="3200400"/>
+            <a:off x="6080760" y="3154680"/>
             <a:ext cx="2377440" cy="640080"/>
           </a:xfrm>
           <a:prstGeom prst="rect">
@@ -4121,26 +4121,26 @@
         </p:nvSpPr>
         <p:spPr>
           <a:xfrm>
-            <a:off x="6126480" y="3931920"/>
-            <a:ext cx="2377440" cy="411480"/>
-          </a:xfrm>
-          <a:prstGeom prst="rect">
-            <a:avLst/>
-          </a:prstGeom>
-          <a:noFill/>
-          <a:ln/>
-        </p:spPr>
-        <p:txBody>
-          <a:bodyPr wrap="square" lIns="0" tIns="0" rIns="0" bIns="0" rtlCol="0" anchor="ctr"/>
-          <a:lstStyle/>
-          <a:p>
-            <a:pPr indent="0" marL="0">
-              <a:buNone/>
-            </a:pPr>
-            <a:r>
-              <a:rPr lang="en-US" sz="1100" dirty="0">
-                <a:solidFill>
-                  <a:srgbClr val="B8D4E0"/>
+            <a:off x="6080760" y="3886200"/>
+            <a:ext cx="2377440" cy="457200"/>
+          </a:xfrm>
+          <a:prstGeom prst="rect">
+            <a:avLst/>
+          </a:prstGeom>
+          <a:noFill/>
+          <a:ln/>
+        </p:spPr>
+        <p:txBody>
+          <a:bodyPr wrap="square" lIns="0" tIns="0" rIns="0" bIns="0" rtlCol="0" anchor="ctr"/>
+          <a:lstStyle/>
+          <a:p>
+            <a:pPr indent="0" marL="0">
+              <a:buNone/>
+            </a:pPr>
+            <a:r>
+              <a:rPr lang="en-US" sz="1200" dirty="0">
+                <a:solidFill>
+                  <a:srgbClr val="C5DCE6"/>
                 </a:solidFill>
                 <a:latin typeface="Calibri" pitchFamily="34" charset="0"/>
                 <a:ea typeface="Calibri" pitchFamily="34" charset="-122"/>
@@ -4148,16 +4148,16 @@
               </a:rPr>
               <a:t>功能面完整 · 可观测性已铺设</a:t>
             </a:r>
-            <a:endParaRPr lang="en-US" sz="1100" dirty="0"/>
-          </a:p>
-          <a:p>
-            <a:pPr indent="0" marL="0">
-              <a:buNone/>
-            </a:pPr>
-            <a:r>
-              <a:rPr lang="en-US" sz="1100" dirty="0">
-                <a:solidFill>
-                  <a:srgbClr val="B8D4E0"/>
+            <a:endParaRPr lang="en-US" sz="1200" dirty="0"/>
+          </a:p>
+          <a:p>
+            <a:pPr indent="0" marL="0">
+              <a:buNone/>
+            </a:pPr>
+            <a:r>
+              <a:rPr lang="en-US" sz="1200" dirty="0">
+                <a:solidFill>
+                  <a:srgbClr val="C5DCE6"/>
                 </a:solidFill>
                 <a:latin typeface="Calibri" pitchFamily="34" charset="0"/>
                 <a:ea typeface="Calibri" pitchFamily="34" charset="-122"/>
@@ -4165,7 +4165,7 @@
               </a:rPr>
               <a:t>CI/CD 缺失 · 活跃度偏低</a:t>
             </a:r>
-            <a:endParaRPr lang="en-US" sz="1100" dirty="0"/>
+            <a:endParaRPr lang="en-US" sz="1200" dirty="0"/>
           </a:p>
         </p:txBody>
       </p:sp>
@@ -4177,8 +4177,8 @@
         </p:nvSpPr>
         <p:spPr>
           <a:xfrm>
-            <a:off x="457200" y="4800600"/>
-            <a:ext cx="6583680" cy="256032"/>
+            <a:off x="457200" y="4773168"/>
+            <a:ext cx="6583680" cy="237744"/>
           </a:xfrm>
           <a:prstGeom prst="rect">
             <a:avLst/>
@@ -4196,7 +4196,7 @@
             <a:r>
               <a:rPr lang="en-US" sz="1000" dirty="0">
                 <a:solidFill>
-                  <a:srgbClr val="5A6B7C"/>
+                  <a:srgbClr val="3D5163"/>
                 </a:solidFill>
                 <a:latin typeface="Calibri" pitchFamily="34" charset="0"/>
                 <a:ea typeface="Calibri" pitchFamily="34" charset="-122"/>
@@ -4216,8 +4216,8 @@
         </p:nvSpPr>
         <p:spPr>
           <a:xfrm>
-            <a:off x="7589520" y="4800600"/>
-            <a:ext cx="1097280" cy="256032"/>
+            <a:off x="7589520" y="4773168"/>
+            <a:ext cx="1097280" cy="237744"/>
           </a:xfrm>
           <a:prstGeom prst="rect">
             <a:avLst/>
@@ -4235,7 +4235,7 @@
             <a:r>
               <a:rPr lang="en-US" sz="1000" dirty="0">
                 <a:solidFill>
-                  <a:srgbClr val="5A6B7C"/>
+                  <a:srgbClr val="3D5163"/>
                 </a:solidFill>
                 <a:latin typeface="Calibri" pitchFamily="34" charset="0"/>
                 <a:ea typeface="Calibri" pitchFamily="34" charset="-122"/>
@@ -4320,12 +4320,12 @@
         </p:nvSpPr>
         <p:spPr>
           <a:xfrm>
-            <a:off x="457200" y="256032"/>
-            <a:ext cx="2377440" cy="292608"/>
+            <a:off x="457200" y="292608"/>
+            <a:ext cx="2468880" cy="274320"/>
           </a:xfrm>
           <a:prstGeom prst="roundRect">
             <a:avLst>
-              <a:gd name="adj" fmla="val 18750"/>
+              <a:gd name="adj" fmla="val 20000"/>
             </a:avLst>
           </a:prstGeom>
           <a:solidFill>
@@ -4342,8 +4342,8 @@
         </p:nvSpPr>
         <p:spPr>
           <a:xfrm>
-            <a:off x="457200" y="256032"/>
-            <a:ext cx="2377440" cy="292608"/>
+            <a:off x="457200" y="292608"/>
+            <a:ext cx="2468880" cy="274320"/>
           </a:xfrm>
           <a:prstGeom prst="rect">
             <a:avLst/>
@@ -4381,24 +4381,24 @@
         </p:nvSpPr>
         <p:spPr>
           <a:xfrm>
-            <a:off x="457200" y="640080"/>
-            <a:ext cx="8229600" cy="457200"/>
-          </a:xfrm>
-          <a:prstGeom prst="rect">
-            <a:avLst/>
-          </a:prstGeom>
-          <a:noFill/>
-          <a:ln/>
-        </p:spPr>
-        <p:txBody>
-          <a:bodyPr wrap="square" lIns="0" tIns="0" rIns="0" bIns="0" rtlCol="0" anchor="ctr"/>
-          <a:lstStyle/>
-          <a:p>
-            <a:pPr indent="0" marL="0">
-              <a:buNone/>
-            </a:pPr>
-            <a:r>
-              <a:rPr lang="en-US" sz="3200" b="1" dirty="0">
+            <a:off x="457200" y="658368"/>
+            <a:ext cx="8229600" cy="411480"/>
+          </a:xfrm>
+          <a:prstGeom prst="rect">
+            <a:avLst/>
+          </a:prstGeom>
+          <a:noFill/>
+          <a:ln/>
+        </p:spPr>
+        <p:txBody>
+          <a:bodyPr wrap="square" lIns="0" tIns="0" rIns="0" bIns="0" rtlCol="0" anchor="ctr"/>
+          <a:lstStyle/>
+          <a:p>
+            <a:pPr indent="0" marL="0">
+              <a:buNone/>
+            </a:pPr>
+            <a:r>
+              <a:rPr lang="en-US" sz="3000" b="1" dirty="0">
                 <a:solidFill>
                   <a:srgbClr val="1A2B3C"/>
                 </a:solidFill>
@@ -4408,7 +4408,7 @@
               </a:rPr>
               <a:t>当前架构：双形态并存</a:t>
             </a:r>
-            <a:endParaRPr lang="en-US" sz="3200" dirty="0"/>
+            <a:endParaRPr lang="en-US" sz="3000" dirty="0"/>
           </a:p>
         </p:txBody>
       </p:sp>
@@ -4420,12 +4420,12 @@
         </p:nvSpPr>
         <p:spPr>
           <a:xfrm>
-            <a:off x="457200" y="1280160"/>
-            <a:ext cx="2743200" cy="2606040"/>
+            <a:off x="457200" y="1188720"/>
+            <a:ext cx="2651760" cy="2468880"/>
           </a:xfrm>
           <a:prstGeom prst="roundRect">
             <a:avLst>
-              <a:gd name="adj" fmla="val 3509"/>
+              <a:gd name="adj" fmla="val 3704"/>
             </a:avLst>
           </a:prstGeom>
           <a:solidFill>
@@ -4433,7 +4433,7 @@
           </a:solidFill>
           <a:ln/>
           <a:effectLst>
-            <a:outerShdw sx="100000" sy="100000" kx="0" ky="0" algn="bl" rotWithShape="0" blurRad="101600" dist="25400" dir="8100000">
+            <a:outerShdw sx="100000" sy="100000" kx="0" ky="0" algn="bl" rotWithShape="0" blurRad="76200" dist="12700" dir="8100000">
               <a:srgbClr val="000000">
                 <a:alpha val="8000"/>
               </a:srgbClr>
@@ -4449,8 +4449,8 @@
         </p:nvSpPr>
         <p:spPr>
           <a:xfrm>
-            <a:off x="457200" y="1280160"/>
-            <a:ext cx="2743200" cy="109728"/>
+            <a:off x="457200" y="1188720"/>
+            <a:ext cx="2651760" cy="91440"/>
           </a:xfrm>
           <a:prstGeom prst="rect">
             <a:avLst/>
@@ -4469,24 +4469,24 @@
         </p:nvSpPr>
         <p:spPr>
           <a:xfrm>
-            <a:off x="640080" y="1554480"/>
-            <a:ext cx="2377440" cy="320040"/>
-          </a:xfrm>
-          <a:prstGeom prst="rect">
-            <a:avLst/>
-          </a:prstGeom>
-          <a:noFill/>
-          <a:ln/>
-        </p:spPr>
-        <p:txBody>
-          <a:bodyPr wrap="square" lIns="0" tIns="0" rIns="0" bIns="0" rtlCol="0" anchor="ctr"/>
-          <a:lstStyle/>
-          <a:p>
-            <a:pPr indent="0" marL="0">
-              <a:buNone/>
-            </a:pPr>
-            <a:r>
-              <a:rPr lang="en-US" sz="1800" b="1" dirty="0">
+            <a:off x="640080" y="1417320"/>
+            <a:ext cx="2286000" cy="320040"/>
+          </a:xfrm>
+          <a:prstGeom prst="rect">
+            <a:avLst/>
+          </a:prstGeom>
+          <a:noFill/>
+          <a:ln/>
+        </p:spPr>
+        <p:txBody>
+          <a:bodyPr wrap="square" lIns="0" tIns="0" rIns="0" bIns="0" rtlCol="0" anchor="ctr"/>
+          <a:lstStyle/>
+          <a:p>
+            <a:pPr indent="0" marL="0">
+              <a:buNone/>
+            </a:pPr>
+            <a:r>
+              <a:rPr lang="en-US" sz="1700" b="1" dirty="0">
                 <a:solidFill>
                   <a:srgbClr val="1A2B3C"/>
                 </a:solidFill>
@@ -4496,7 +4496,7 @@
               </a:rPr>
               <a:t>前端体验层</a:t>
             </a:r>
-            <a:endParaRPr lang="en-US" sz="1800" dirty="0"/>
+            <a:endParaRPr lang="en-US" sz="1700" dirty="0"/>
           </a:p>
         </p:txBody>
       </p:sp>
@@ -4508,8 +4508,8 @@
         </p:nvSpPr>
         <p:spPr>
           <a:xfrm>
-            <a:off x="640080" y="1920240"/>
-            <a:ext cx="2377440" cy="320040"/>
+            <a:off x="640080" y="1783080"/>
+            <a:ext cx="2286000" cy="274320"/>
           </a:xfrm>
           <a:prstGeom prst="rect">
             <a:avLst/>
@@ -4547,7 +4547,7 @@
         </p:nvSpPr>
         <p:spPr>
           <a:xfrm>
-            <a:off x="640080" y="2487168"/>
+            <a:off x="640080" y="2286000"/>
             <a:ext cx="109728" cy="109728"/>
           </a:xfrm>
           <a:prstGeom prst="ellipse">
@@ -4567,8 +4567,8 @@
         </p:nvSpPr>
         <p:spPr>
           <a:xfrm>
-            <a:off x="841248" y="2377440"/>
-            <a:ext cx="2194560" cy="347472"/>
+            <a:off x="841248" y="2194560"/>
+            <a:ext cx="2103120" cy="320040"/>
           </a:xfrm>
           <a:prstGeom prst="rect">
             <a:avLst/>
@@ -4592,7 +4592,7 @@
                 <a:ea typeface="Calibri" pitchFamily="34" charset="-122"/>
                 <a:cs typeface="Calibri" pitchFamily="34" charset="-120"/>
               </a:rPr>
-              <a:t>AI 对话 / SSE</a:t>
+              <a:t>AI 对话与 SSE 流式输出</a:t>
             </a:r>
             <a:endParaRPr lang="en-US" sz="1300" dirty="0"/>
           </a:p>
@@ -4606,7 +4606,7 @@
         </p:nvSpPr>
         <p:spPr>
           <a:xfrm>
-            <a:off x="640080" y="2871216"/>
+            <a:off x="640080" y="2651760"/>
             <a:ext cx="109728" cy="109728"/>
           </a:xfrm>
           <a:prstGeom prst="ellipse">
@@ -4626,8 +4626,8 @@
         </p:nvSpPr>
         <p:spPr>
           <a:xfrm>
-            <a:off x="841248" y="2761488"/>
-            <a:ext cx="2194560" cy="347472"/>
+            <a:off x="841248" y="2560320"/>
+            <a:ext cx="2103120" cy="320040"/>
           </a:xfrm>
           <a:prstGeom prst="rect">
             <a:avLst/>
@@ -4651,7 +4651,7 @@
                 <a:ea typeface="Calibri" pitchFamily="34" charset="-122"/>
                 <a:cs typeface="Calibri" pitchFamily="34" charset="-120"/>
               </a:rPr>
-              <a:t>实时预览与编辑</a:t>
+              <a:t>实时预览与可视化编辑</a:t>
             </a:r>
             <a:endParaRPr lang="en-US" sz="1300" dirty="0"/>
           </a:p>
@@ -4665,7 +4665,7 @@
         </p:nvSpPr>
         <p:spPr>
           <a:xfrm>
-            <a:off x="640080" y="3255264"/>
+            <a:off x="640080" y="3017520"/>
             <a:ext cx="109728" cy="109728"/>
           </a:xfrm>
           <a:prstGeom prst="ellipse">
@@ -4685,8 +4685,8 @@
         </p:nvSpPr>
         <p:spPr>
           <a:xfrm>
-            <a:off x="841248" y="3145536"/>
-            <a:ext cx="2194560" cy="347472"/>
+            <a:off x="841248" y="2926080"/>
+            <a:ext cx="2103120" cy="320040"/>
           </a:xfrm>
           <a:prstGeom prst="rect">
             <a:avLst/>
@@ -4710,7 +4710,7 @@
                 <a:ea typeface="Calibri" pitchFamily="34" charset="-122"/>
                 <a:cs typeface="Calibri" pitchFamily="34" charset="-120"/>
               </a:rPr>
-              <a:t>部署与应用管理</a:t>
+              <a:t>部署与应用管理界面</a:t>
             </a:r>
             <a:endParaRPr lang="en-US" sz="1300" dirty="0"/>
           </a:p>
@@ -4724,12 +4724,12 @@
         </p:nvSpPr>
         <p:spPr>
           <a:xfrm>
-            <a:off x="3337560" y="1280160"/>
-            <a:ext cx="2743200" cy="2606040"/>
+            <a:off x="3291840" y="1188720"/>
+            <a:ext cx="2651760" cy="2468880"/>
           </a:xfrm>
           <a:prstGeom prst="roundRect">
             <a:avLst>
-              <a:gd name="adj" fmla="val 3509"/>
+              <a:gd name="adj" fmla="val 3704"/>
             </a:avLst>
           </a:prstGeom>
           <a:solidFill>
@@ -4737,7 +4737,7 @@
           </a:solidFill>
           <a:ln/>
           <a:effectLst>
-            <a:outerShdw sx="100000" sy="100000" kx="0" ky="0" algn="bl" rotWithShape="0" blurRad="101600" dist="25400" dir="8100000">
+            <a:outerShdw sx="100000" sy="100000" kx="0" ky="0" algn="bl" rotWithShape="0" blurRad="76200" dist="12700" dir="8100000">
               <a:srgbClr val="000000">
                 <a:alpha val="8000"/>
               </a:srgbClr>
@@ -4753,8 +4753,8 @@
         </p:nvSpPr>
         <p:spPr>
           <a:xfrm>
-            <a:off x="3337560" y="1280160"/>
-            <a:ext cx="2743200" cy="109728"/>
+            <a:off x="3291840" y="1188720"/>
+            <a:ext cx="2651760" cy="91440"/>
           </a:xfrm>
           <a:prstGeom prst="rect">
             <a:avLst/>
@@ -4773,24 +4773,24 @@
         </p:nvSpPr>
         <p:spPr>
           <a:xfrm>
-            <a:off x="3520440" y="1554480"/>
-            <a:ext cx="2377440" cy="320040"/>
-          </a:xfrm>
-          <a:prstGeom prst="rect">
-            <a:avLst/>
-          </a:prstGeom>
-          <a:noFill/>
-          <a:ln/>
-        </p:spPr>
-        <p:txBody>
-          <a:bodyPr wrap="square" lIns="0" tIns="0" rIns="0" bIns="0" rtlCol="0" anchor="ctr"/>
-          <a:lstStyle/>
-          <a:p>
-            <a:pPr indent="0" marL="0">
-              <a:buNone/>
-            </a:pPr>
-            <a:r>
-              <a:rPr lang="en-US" sz="1800" b="1" dirty="0">
+            <a:off x="3474720" y="1417320"/>
+            <a:ext cx="2286000" cy="320040"/>
+          </a:xfrm>
+          <a:prstGeom prst="rect">
+            <a:avLst/>
+          </a:prstGeom>
+          <a:noFill/>
+          <a:ln/>
+        </p:spPr>
+        <p:txBody>
+          <a:bodyPr wrap="square" lIns="0" tIns="0" rIns="0" bIns="0" rtlCol="0" anchor="ctr"/>
+          <a:lstStyle/>
+          <a:p>
+            <a:pPr indent="0" marL="0">
+              <a:buNone/>
+            </a:pPr>
+            <a:r>
+              <a:rPr lang="en-US" sz="1700" b="1" dirty="0">
                 <a:solidFill>
                   <a:srgbClr val="1A2B3C"/>
                 </a:solidFill>
@@ -4800,7 +4800,7 @@
               </a:rPr>
               <a:t>单体基线</a:t>
             </a:r>
-            <a:endParaRPr lang="en-US" sz="1800" dirty="0"/>
+            <a:endParaRPr lang="en-US" sz="1700" dirty="0"/>
           </a:p>
         </p:txBody>
       </p:sp>
@@ -4812,8 +4812,8 @@
         </p:nvSpPr>
         <p:spPr>
           <a:xfrm>
-            <a:off x="3520440" y="1920240"/>
-            <a:ext cx="2377440" cy="320040"/>
+            <a:off x="3474720" y="1783080"/>
+            <a:ext cx="2286000" cy="274320"/>
           </a:xfrm>
           <a:prstGeom prst="rect">
             <a:avLst/>
@@ -4851,7 +4851,7 @@
         </p:nvSpPr>
         <p:spPr>
           <a:xfrm>
-            <a:off x="3520440" y="2487168"/>
+            <a:off x="3474720" y="2286000"/>
             <a:ext cx="109728" cy="109728"/>
           </a:xfrm>
           <a:prstGeom prst="ellipse">
@@ -4871,8 +4871,8 @@
         </p:nvSpPr>
         <p:spPr>
           <a:xfrm>
-            <a:off x="3721608" y="2377440"/>
-            <a:ext cx="2194560" cy="347472"/>
+            <a:off x="3675888" y="2194560"/>
+            <a:ext cx="2103120" cy="320040"/>
           </a:xfrm>
           <a:prstGeom prst="rect">
             <a:avLst/>
@@ -4896,7 +4896,7 @@
                 <a:ea typeface="Calibri" pitchFamily="34" charset="-122"/>
                 <a:cs typeface="Calibri" pitchFamily="34" charset="-120"/>
               </a:rPr>
-              <a:t>AI 编排 LangChain4j / LangGraph4j</a:t>
+              <a:t>LangChain4j / LangGraph4j</a:t>
             </a:r>
             <a:endParaRPr lang="en-US" sz="1300" dirty="0"/>
           </a:p>
@@ -4910,7 +4910,7 @@
         </p:nvSpPr>
         <p:spPr>
           <a:xfrm>
-            <a:off x="3520440" y="2871216"/>
+            <a:off x="3474720" y="2651760"/>
             <a:ext cx="109728" cy="109728"/>
           </a:xfrm>
           <a:prstGeom prst="ellipse">
@@ -4930,8 +4930,8 @@
         </p:nvSpPr>
         <p:spPr>
           <a:xfrm>
-            <a:off x="3721608" y="2761488"/>
-            <a:ext cx="2194560" cy="347472"/>
+            <a:off x="3675888" y="2560320"/>
+            <a:ext cx="2103120" cy="320040"/>
           </a:xfrm>
           <a:prstGeom prst="rect">
             <a:avLst/>
@@ -4955,7 +4955,7 @@
                 <a:ea typeface="Calibri" pitchFamily="34" charset="-122"/>
                 <a:cs typeface="Calibri" pitchFamily="34" charset="-120"/>
               </a:rPr>
-              <a:t>代码引擎 解析 / 保存 / Vue 构建</a:t>
+              <a:t>解析、保存与 Vue 构建</a:t>
             </a:r>
             <a:endParaRPr lang="en-US" sz="1300" dirty="0"/>
           </a:p>
@@ -4969,7 +4969,7 @@
         </p:nvSpPr>
         <p:spPr>
           <a:xfrm>
-            <a:off x="3520440" y="3255264"/>
+            <a:off x="3474720" y="3017520"/>
             <a:ext cx="109728" cy="109728"/>
           </a:xfrm>
           <a:prstGeom prst="ellipse">
@@ -4989,8 +4989,8 @@
         </p:nvSpPr>
         <p:spPr>
           <a:xfrm>
-            <a:off x="3721608" y="3145536"/>
-            <a:ext cx="2194560" cy="347472"/>
+            <a:off x="3675888" y="2926080"/>
+            <a:ext cx="2103120" cy="320040"/>
           </a:xfrm>
           <a:prstGeom prst="rect">
             <a:avLst/>
@@ -5014,7 +5014,7 @@
                 <a:ea typeface="Calibri" pitchFamily="34" charset="-122"/>
                 <a:cs typeface="Calibri" pitchFamily="34" charset="-120"/>
               </a:rPr>
-              <a:t>业务服务 用户 / 应用 / 对话</a:t>
+              <a:t>用户 / 应用 / 对话服务</a:t>
             </a:r>
             <a:endParaRPr lang="en-US" sz="1300" dirty="0"/>
           </a:p>
@@ -5028,12 +5028,12 @@
         </p:nvSpPr>
         <p:spPr>
           <a:xfrm>
-            <a:off x="6217920" y="1280160"/>
-            <a:ext cx="2743200" cy="2606040"/>
+            <a:off x="6126480" y="1188720"/>
+            <a:ext cx="2651760" cy="2468880"/>
           </a:xfrm>
           <a:prstGeom prst="roundRect">
             <a:avLst>
-              <a:gd name="adj" fmla="val 3509"/>
+              <a:gd name="adj" fmla="val 3704"/>
             </a:avLst>
           </a:prstGeom>
           <a:solidFill>
@@ -5041,7 +5041,7 @@
           </a:solidFill>
           <a:ln/>
           <a:effectLst>
-            <a:outerShdw sx="100000" sy="100000" kx="0" ky="0" algn="bl" rotWithShape="0" blurRad="101600" dist="25400" dir="8100000">
+            <a:outerShdw sx="100000" sy="100000" kx="0" ky="0" algn="bl" rotWithShape="0" blurRad="76200" dist="12700" dir="8100000">
               <a:srgbClr val="000000">
                 <a:alpha val="8000"/>
               </a:srgbClr>
@@ -5057,8 +5057,8 @@
         </p:nvSpPr>
         <p:spPr>
           <a:xfrm>
-            <a:off x="6217920" y="1280160"/>
-            <a:ext cx="2743200" cy="109728"/>
+            <a:off x="6126480" y="1188720"/>
+            <a:ext cx="2651760" cy="91440"/>
           </a:xfrm>
           <a:prstGeom prst="rect">
             <a:avLst/>
@@ -5077,24 +5077,24 @@
         </p:nvSpPr>
         <p:spPr>
           <a:xfrm>
-            <a:off x="6400800" y="1554480"/>
-            <a:ext cx="2377440" cy="320040"/>
-          </a:xfrm>
-          <a:prstGeom prst="rect">
-            <a:avLst/>
-          </a:prstGeom>
-          <a:noFill/>
-          <a:ln/>
-        </p:spPr>
-        <p:txBody>
-          <a:bodyPr wrap="square" lIns="0" tIns="0" rIns="0" bIns="0" rtlCol="0" anchor="ctr"/>
-          <a:lstStyle/>
-          <a:p>
-            <a:pPr indent="0" marL="0">
-              <a:buNone/>
-            </a:pPr>
-            <a:r>
-              <a:rPr lang="en-US" sz="1800" b="1" dirty="0">
+            <a:off x="6309360" y="1417320"/>
+            <a:ext cx="2286000" cy="320040"/>
+          </a:xfrm>
+          <a:prstGeom prst="rect">
+            <a:avLst/>
+          </a:prstGeom>
+          <a:noFill/>
+          <a:ln/>
+        </p:spPr>
+        <p:txBody>
+          <a:bodyPr wrap="square" lIns="0" tIns="0" rIns="0" bIns="0" rtlCol="0" anchor="ctr"/>
+          <a:lstStyle/>
+          <a:p>
+            <a:pPr indent="0" marL="0">
+              <a:buNone/>
+            </a:pPr>
+            <a:r>
+              <a:rPr lang="en-US" sz="1700" b="1" dirty="0">
                 <a:solidFill>
                   <a:srgbClr val="1A2B3C"/>
                 </a:solidFill>
@@ -5104,7 +5104,7 @@
               </a:rPr>
               <a:t>微服务形态</a:t>
             </a:r>
-            <a:endParaRPr lang="en-US" sz="1800" dirty="0"/>
+            <a:endParaRPr lang="en-US" sz="1700" dirty="0"/>
           </a:p>
         </p:txBody>
       </p:sp>
@@ -5116,8 +5116,8 @@
         </p:nvSpPr>
         <p:spPr>
           <a:xfrm>
-            <a:off x="6400800" y="1920240"/>
-            <a:ext cx="2377440" cy="320040"/>
+            <a:off x="6309360" y="1783080"/>
+            <a:ext cx="2286000" cy="274320"/>
           </a:xfrm>
           <a:prstGeom prst="rect">
             <a:avLst/>
@@ -5141,7 +5141,7 @@
                 <a:ea typeface="Calibri" pitchFamily="34" charset="-122"/>
                 <a:cs typeface="Calibri" pitchFamily="34" charset="-120"/>
               </a:rPr>
-              <a:t>Spring Cloud Alibaba · Dubbo · Nacos</a:t>
+              <a:t>Dubbo · Nacos 服务治理</a:t>
             </a:r>
             <a:endParaRPr lang="en-US" sz="1200" dirty="0"/>
           </a:p>
@@ -5155,7 +5155,7 @@
         </p:nvSpPr>
         <p:spPr>
           <a:xfrm>
-            <a:off x="6400800" y="2487168"/>
+            <a:off x="6309360" y="2286000"/>
             <a:ext cx="109728" cy="109728"/>
           </a:xfrm>
           <a:prstGeom prst="ellipse">
@@ -5175,8 +5175,8 @@
         </p:nvSpPr>
         <p:spPr>
           <a:xfrm>
-            <a:off x="6601968" y="2377440"/>
-            <a:ext cx="2194560" cy="347472"/>
+            <a:off x="6510528" y="2194560"/>
+            <a:ext cx="2103120" cy="320040"/>
           </a:xfrm>
           <a:prstGeom prst="rect">
             <a:avLst/>
@@ -5214,7 +5214,7 @@
         </p:nvSpPr>
         <p:spPr>
           <a:xfrm>
-            <a:off x="6400800" y="2871216"/>
+            <a:off x="6309360" y="2651760"/>
             <a:ext cx="109728" cy="109728"/>
           </a:xfrm>
           <a:prstGeom prst="ellipse">
@@ -5234,8 +5234,8 @@
         </p:nvSpPr>
         <p:spPr>
           <a:xfrm>
-            <a:off x="6601968" y="2761488"/>
-            <a:ext cx="2194560" cy="347472"/>
+            <a:off x="6510528" y="2560320"/>
+            <a:ext cx="2103120" cy="320040"/>
           </a:xfrm>
           <a:prstGeom prst="rect">
             <a:avLst/>
@@ -5273,7 +5273,7 @@
         </p:nvSpPr>
         <p:spPr>
           <a:xfrm>
-            <a:off x="6400800" y="3255264"/>
+            <a:off x="6309360" y="3017520"/>
             <a:ext cx="109728" cy="109728"/>
           </a:xfrm>
           <a:prstGeom prst="ellipse">
@@ -5293,8 +5293,8 @@
         </p:nvSpPr>
         <p:spPr>
           <a:xfrm>
-            <a:off x="6601968" y="3145536"/>
-            <a:ext cx="2194560" cy="347472"/>
+            <a:off x="6510528" y="2926080"/>
+            <a:ext cx="2103120" cy="320040"/>
           </a:xfrm>
           <a:prstGeom prst="rect">
             <a:avLst/>
@@ -5318,7 +5318,7 @@
                 <a:ea typeface="Calibri" pitchFamily="34" charset="-122"/>
                 <a:cs typeface="Calibri" pitchFamily="34" charset="-120"/>
               </a:rPr>
-              <a:t>交付：截图 / COS / 下载</a:t>
+              <a:t>截图、COS 与源码下载</a:t>
             </a:r>
             <a:endParaRPr lang="en-US" sz="1300" dirty="0"/>
           </a:p>
@@ -5332,12 +5332,12 @@
         </p:nvSpPr>
         <p:spPr>
           <a:xfrm>
-            <a:off x="457200" y="4069080"/>
-            <a:ext cx="8229600" cy="548640"/>
+            <a:off x="457200" y="3886200"/>
+            <a:ext cx="8229600" cy="640080"/>
           </a:xfrm>
           <a:prstGeom prst="roundRect">
             <a:avLst>
-              <a:gd name="adj" fmla="val 13333"/>
+              <a:gd name="adj" fmla="val 11429"/>
             </a:avLst>
           </a:prstGeom>
           <a:solidFill>
@@ -5354,7 +5354,7 @@
         </p:nvSpPr>
         <p:spPr>
           <a:xfrm>
-            <a:off x="640080" y="4114800"/>
+            <a:off x="640080" y="3977640"/>
             <a:ext cx="7863840" cy="457200"/>
           </a:xfrm>
           <a:prstGeom prst="rect">
@@ -5393,8 +5393,8 @@
         </p:nvSpPr>
         <p:spPr>
           <a:xfrm>
-            <a:off x="457200" y="4800600"/>
-            <a:ext cx="6583680" cy="256032"/>
+            <a:off x="457200" y="4773168"/>
+            <a:ext cx="6583680" cy="237744"/>
           </a:xfrm>
           <a:prstGeom prst="rect">
             <a:avLst/>
@@ -5412,7 +5412,7 @@
             <a:r>
               <a:rPr lang="en-US" sz="1000" dirty="0">
                 <a:solidFill>
-                  <a:srgbClr val="5A6B7C"/>
+                  <a:srgbClr val="3D5163"/>
                 </a:solidFill>
                 <a:latin typeface="Calibri" pitchFamily="34" charset="0"/>
                 <a:ea typeface="Calibri" pitchFamily="34" charset="-122"/>
@@ -5432,8 +5432,8 @@
         </p:nvSpPr>
         <p:spPr>
           <a:xfrm>
-            <a:off x="7589520" y="4800600"/>
-            <a:ext cx="1097280" cy="256032"/>
+            <a:off x="7589520" y="4773168"/>
+            <a:ext cx="1097280" cy="237744"/>
           </a:xfrm>
           <a:prstGeom prst="rect">
             <a:avLst/>
@@ -5451,7 +5451,7 @@
             <a:r>
               <a:rPr lang="en-US" sz="1000" dirty="0">
                 <a:solidFill>
-                  <a:srgbClr val="5A6B7C"/>
+                  <a:srgbClr val="3D5163"/>
                 </a:solidFill>
                 <a:latin typeface="Calibri" pitchFamily="34" charset="0"/>
                 <a:ea typeface="Calibri" pitchFamily="34" charset="-122"/>
@@ -5536,12 +5536,12 @@
         </p:nvSpPr>
         <p:spPr>
           <a:xfrm>
-            <a:off x="457200" y="256032"/>
-            <a:ext cx="2377440" cy="292608"/>
+            <a:off x="457200" y="292608"/>
+            <a:ext cx="2468880" cy="274320"/>
           </a:xfrm>
           <a:prstGeom prst="roundRect">
             <a:avLst>
-              <a:gd name="adj" fmla="val 18750"/>
+              <a:gd name="adj" fmla="val 20000"/>
             </a:avLst>
           </a:prstGeom>
           <a:solidFill>
@@ -5558,8 +5558,8 @@
         </p:nvSpPr>
         <p:spPr>
           <a:xfrm>
-            <a:off x="457200" y="256032"/>
-            <a:ext cx="2377440" cy="292608"/>
+            <a:off x="457200" y="292608"/>
+            <a:ext cx="2468880" cy="274320"/>
           </a:xfrm>
           <a:prstGeom prst="rect">
             <a:avLst/>
@@ -5597,24 +5597,24 @@
         </p:nvSpPr>
         <p:spPr>
           <a:xfrm>
-            <a:off x="457200" y="640080"/>
-            <a:ext cx="8229600" cy="457200"/>
-          </a:xfrm>
-          <a:prstGeom prst="rect">
-            <a:avLst/>
-          </a:prstGeom>
-          <a:noFill/>
-          <a:ln/>
-        </p:spPr>
-        <p:txBody>
-          <a:bodyPr wrap="square" lIns="0" tIns="0" rIns="0" bIns="0" rtlCol="0" anchor="ctr"/>
-          <a:lstStyle/>
-          <a:p>
-            <a:pPr indent="0" marL="0">
-              <a:buNone/>
-            </a:pPr>
-            <a:r>
-              <a:rPr lang="en-US" sz="3200" b="1" dirty="0">
+            <a:off x="457200" y="658368"/>
+            <a:ext cx="8229600" cy="411480"/>
+          </a:xfrm>
+          <a:prstGeom prst="rect">
+            <a:avLst/>
+          </a:prstGeom>
+          <a:noFill/>
+          <a:ln/>
+        </p:spPr>
+        <p:txBody>
+          <a:bodyPr wrap="square" lIns="0" tIns="0" rIns="0" bIns="0" rtlCol="0" anchor="ctr"/>
+          <a:lstStyle/>
+          <a:p>
+            <a:pPr indent="0" marL="0">
+              <a:buNone/>
+            </a:pPr>
+            <a:r>
+              <a:rPr lang="en-US" sz="3000" b="1" dirty="0">
                 <a:solidFill>
                   <a:srgbClr val="1A2B3C"/>
                 </a:solidFill>
@@ -5624,7 +5624,7 @@
               </a:rPr>
               <a:t>核心能力已形成闭环</a:t>
             </a:r>
-            <a:endParaRPr lang="en-US" sz="3200" dirty="0"/>
+            <a:endParaRPr lang="en-US" sz="3000" dirty="0"/>
           </a:p>
         </p:txBody>
       </p:sp>
@@ -5636,12 +5636,12 @@
         </p:nvSpPr>
         <p:spPr>
           <a:xfrm>
-            <a:off x="457200" y="1234440"/>
-            <a:ext cx="4069080" cy="1371600"/>
+            <a:off x="457200" y="1188720"/>
+            <a:ext cx="4114800" cy="1417320"/>
           </a:xfrm>
           <a:prstGeom prst="roundRect">
             <a:avLst>
-              <a:gd name="adj" fmla="val 6667"/>
+              <a:gd name="adj" fmla="val 6452"/>
             </a:avLst>
           </a:prstGeom>
           <a:solidFill>
@@ -5649,7 +5649,7 @@
           </a:solidFill>
           <a:ln/>
           <a:effectLst>
-            <a:outerShdw sx="100000" sy="100000" kx="0" ky="0" algn="bl" rotWithShape="0" blurRad="101600" dist="25400" dir="8100000">
+            <a:outerShdw sx="100000" sy="100000" kx="0" ky="0" algn="bl" rotWithShape="0" blurRad="76200" dist="12700" dir="8100000">
               <a:srgbClr val="000000">
                 <a:alpha val="8000"/>
               </a:srgbClr>
@@ -5665,7 +5665,7 @@
         </p:nvSpPr>
         <p:spPr>
           <a:xfrm>
-            <a:off x="685800" y="1508760"/>
+            <a:off x="685800" y="1417320"/>
             <a:ext cx="384048" cy="384048"/>
           </a:xfrm>
           <a:prstGeom prst="ellipse">
@@ -5685,7 +5685,7 @@
         </p:nvSpPr>
         <p:spPr>
           <a:xfrm>
-            <a:off x="685800" y="1508760"/>
+            <a:off x="685800" y="1417320"/>
             <a:ext cx="384048" cy="384048"/>
           </a:xfrm>
           <a:prstGeom prst="rect">
@@ -5724,7 +5724,7 @@
         </p:nvSpPr>
         <p:spPr>
           <a:xfrm>
-            <a:off x="1234440" y="1463040"/>
+            <a:off x="1234440" y="1371600"/>
             <a:ext cx="914400" cy="228600"/>
           </a:xfrm>
           <a:prstGeom prst="rect">
@@ -5763,8 +5763,8 @@
         </p:nvSpPr>
         <p:spPr>
           <a:xfrm>
-            <a:off x="1234440" y="1691640"/>
-            <a:ext cx="3017520" cy="320040"/>
+            <a:off x="1234440" y="1600200"/>
+            <a:ext cx="3017520" cy="292608"/>
           </a:xfrm>
           <a:prstGeom prst="rect">
             <a:avLst/>
@@ -5802,8 +5802,8 @@
         </p:nvSpPr>
         <p:spPr>
           <a:xfrm>
-            <a:off x="685800" y="2103120"/>
-            <a:ext cx="3611880" cy="411480"/>
+            <a:off x="685800" y="2011680"/>
+            <a:ext cx="3657600" cy="457200"/>
           </a:xfrm>
           <a:prstGeom prst="rect">
             <a:avLst/>
@@ -5821,13 +5821,13 @@
             <a:r>
               <a:rPr lang="en-US" sz="1300" dirty="0">
                 <a:solidFill>
-                  <a:srgbClr val="5A6B7C"/>
-                </a:solidFill>
-                <a:latin typeface="Calibri" pitchFamily="34" charset="0"/>
-                <a:ea typeface="Calibri" pitchFamily="34" charset="-122"/>
-                <a:cs typeface="Calibri" pitchFamily="34" charset="-120"/>
-              </a:rPr>
-              <a:t>AI 自动路由生成策略，支持 HTML、多文件与 Vue 项目；通过工具调用写入、读取、修改文件。</a:t>
+                  <a:srgbClr val="3D5163"/>
+                </a:solidFill>
+                <a:latin typeface="Calibri" pitchFamily="34" charset="0"/>
+                <a:ea typeface="Calibri" pitchFamily="34" charset="-122"/>
+                <a:cs typeface="Calibri" pitchFamily="34" charset="-120"/>
+              </a:rPr>
+              <a:t>AI 自动路由生成策略，支持 HTML、多文件与 Vue 项目，通过工具调用读写文件。</a:t>
             </a:r>
             <a:endParaRPr lang="en-US" sz="1300" dirty="0"/>
           </a:p>
@@ -5841,12 +5841,12 @@
         </p:nvSpPr>
         <p:spPr>
           <a:xfrm>
-            <a:off x="4754880" y="1234440"/>
-            <a:ext cx="4069080" cy="1371600"/>
+            <a:off x="4800600" y="1188720"/>
+            <a:ext cx="4114800" cy="1417320"/>
           </a:xfrm>
           <a:prstGeom prst="roundRect">
             <a:avLst>
-              <a:gd name="adj" fmla="val 6667"/>
+              <a:gd name="adj" fmla="val 6452"/>
             </a:avLst>
           </a:prstGeom>
           <a:solidFill>
@@ -5854,7 +5854,7 @@
           </a:solidFill>
           <a:ln/>
           <a:effectLst>
-            <a:outerShdw sx="100000" sy="100000" kx="0" ky="0" algn="bl" rotWithShape="0" blurRad="101600" dist="25400" dir="8100000">
+            <a:outerShdw sx="100000" sy="100000" kx="0" ky="0" algn="bl" rotWithShape="0" blurRad="76200" dist="12700" dir="8100000">
               <a:srgbClr val="000000">
                 <a:alpha val="8000"/>
               </a:srgbClr>
@@ -5870,7 +5870,7 @@
         </p:nvSpPr>
         <p:spPr>
           <a:xfrm>
-            <a:off x="4983480" y="1508760"/>
+            <a:off x="5029200" y="1417320"/>
             <a:ext cx="384048" cy="384048"/>
           </a:xfrm>
           <a:prstGeom prst="ellipse">
@@ -5890,7 +5890,7 @@
         </p:nvSpPr>
         <p:spPr>
           <a:xfrm>
-            <a:off x="4983480" y="1508760"/>
+            <a:off x="5029200" y="1417320"/>
             <a:ext cx="384048" cy="384048"/>
           </a:xfrm>
           <a:prstGeom prst="rect">
@@ -5929,7 +5929,7 @@
         </p:nvSpPr>
         <p:spPr>
           <a:xfrm>
-            <a:off x="5532120" y="1463040"/>
+            <a:off x="5577840" y="1371600"/>
             <a:ext cx="914400" cy="228600"/>
           </a:xfrm>
           <a:prstGeom prst="rect">
@@ -5968,8 +5968,8 @@
         </p:nvSpPr>
         <p:spPr>
           <a:xfrm>
-            <a:off x="5532120" y="1691640"/>
-            <a:ext cx="3017520" cy="320040"/>
+            <a:off x="5577840" y="1600200"/>
+            <a:ext cx="3017520" cy="292608"/>
           </a:xfrm>
           <a:prstGeom prst="rect">
             <a:avLst/>
@@ -6007,8 +6007,8 @@
         </p:nvSpPr>
         <p:spPr>
           <a:xfrm>
-            <a:off x="4983480" y="2103120"/>
-            <a:ext cx="3611880" cy="411480"/>
+            <a:off x="5029200" y="2011680"/>
+            <a:ext cx="3657600" cy="457200"/>
           </a:xfrm>
           <a:prstGeom prst="rect">
             <a:avLst/>
@@ -6026,13 +6026,13 @@
             <a:r>
               <a:rPr lang="en-US" sz="1300" dirty="0">
                 <a:solidFill>
-                  <a:srgbClr val="5A6B7C"/>
-                </a:solidFill>
-                <a:latin typeface="Calibri" pitchFamily="34" charset="0"/>
-                <a:ea typeface="Calibri" pitchFamily="34" charset="-122"/>
-                <a:cs typeface="Calibri" pitchFamily="34" charset="-120"/>
-              </a:rPr>
-              <a:t>对话流式输出与右侧实时预览协同；支持选择页面元素后继续用自然语言迭代。</a:t>
+                  <a:srgbClr val="3D5163"/>
+                </a:solidFill>
+                <a:latin typeface="Calibri" pitchFamily="34" charset="0"/>
+                <a:ea typeface="Calibri" pitchFamily="34" charset="-122"/>
+                <a:cs typeface="Calibri" pitchFamily="34" charset="-120"/>
+              </a:rPr>
+              <a:t>对话流式输出与右侧实时预览协同，可选中页面元素后用自然语言继续迭代。</a:t>
             </a:r>
             <a:endParaRPr lang="en-US" sz="1300" dirty="0"/>
           </a:p>
@@ -6047,11 +6047,11 @@
         <p:spPr>
           <a:xfrm>
             <a:off x="457200" y="2788920"/>
-            <a:ext cx="4069080" cy="1371600"/>
+            <a:ext cx="4114800" cy="1417320"/>
           </a:xfrm>
           <a:prstGeom prst="roundRect">
             <a:avLst>
-              <a:gd name="adj" fmla="val 6667"/>
+              <a:gd name="adj" fmla="val 6452"/>
             </a:avLst>
           </a:prstGeom>
           <a:solidFill>
@@ -6059,7 +6059,7 @@
           </a:solidFill>
           <a:ln/>
           <a:effectLst>
-            <a:outerShdw sx="100000" sy="100000" kx="0" ky="0" algn="bl" rotWithShape="0" blurRad="101600" dist="25400" dir="8100000">
+            <a:outerShdw sx="100000" sy="100000" kx="0" ky="0" algn="bl" rotWithShape="0" blurRad="76200" dist="12700" dir="8100000">
               <a:srgbClr val="000000">
                 <a:alpha val="8000"/>
               </a:srgbClr>
@@ -6075,7 +6075,7 @@
         </p:nvSpPr>
         <p:spPr>
           <a:xfrm>
-            <a:off x="685800" y="3063240"/>
+            <a:off x="685800" y="3017520"/>
             <a:ext cx="384048" cy="384048"/>
           </a:xfrm>
           <a:prstGeom prst="ellipse">
@@ -6095,7 +6095,7 @@
         </p:nvSpPr>
         <p:spPr>
           <a:xfrm>
-            <a:off x="685800" y="3063240"/>
+            <a:off x="685800" y="3017520"/>
             <a:ext cx="384048" cy="384048"/>
           </a:xfrm>
           <a:prstGeom prst="rect">
@@ -6134,7 +6134,7 @@
         </p:nvSpPr>
         <p:spPr>
           <a:xfrm>
-            <a:off x="1234440" y="3017520"/>
+            <a:off x="1234440" y="2971800"/>
             <a:ext cx="914400" cy="228600"/>
           </a:xfrm>
           <a:prstGeom prst="rect">
@@ -6173,8 +6173,8 @@
         </p:nvSpPr>
         <p:spPr>
           <a:xfrm>
-            <a:off x="1234440" y="3246120"/>
-            <a:ext cx="3017520" cy="320040"/>
+            <a:off x="1234440" y="3200400"/>
+            <a:ext cx="3017520" cy="292608"/>
           </a:xfrm>
           <a:prstGeom prst="rect">
             <a:avLst/>
@@ -6212,8 +6212,8 @@
         </p:nvSpPr>
         <p:spPr>
           <a:xfrm>
-            <a:off x="685800" y="3657600"/>
-            <a:ext cx="3611880" cy="411480"/>
+            <a:off x="685800" y="3611880"/>
+            <a:ext cx="3657600" cy="457200"/>
           </a:xfrm>
           <a:prstGeom prst="rect">
             <a:avLst/>
@@ -6231,7 +6231,7 @@
             <a:r>
               <a:rPr lang="en-US" sz="1300" dirty="0">
                 <a:solidFill>
-                  <a:srgbClr val="5A6B7C"/>
+                  <a:srgbClr val="3D5163"/>
                 </a:solidFill>
                 <a:latin typeface="Calibri" pitchFamily="34" charset="0"/>
                 <a:ea typeface="Calibri" pitchFamily="34" charset="-122"/>
@@ -6251,12 +6251,12 @@
         </p:nvSpPr>
         <p:spPr>
           <a:xfrm>
-            <a:off x="4754880" y="2788920"/>
-            <a:ext cx="4069080" cy="1371600"/>
+            <a:off x="4800600" y="2788920"/>
+            <a:ext cx="4114800" cy="1417320"/>
           </a:xfrm>
           <a:prstGeom prst="roundRect">
             <a:avLst>
-              <a:gd name="adj" fmla="val 6667"/>
+              <a:gd name="adj" fmla="val 6452"/>
             </a:avLst>
           </a:prstGeom>
           <a:solidFill>
@@ -6264,7 +6264,7 @@
           </a:solidFill>
           <a:ln/>
           <a:effectLst>
-            <a:outerShdw sx="100000" sy="100000" kx="0" ky="0" algn="bl" rotWithShape="0" blurRad="101600" dist="25400" dir="8100000">
+            <a:outerShdw sx="100000" sy="100000" kx="0" ky="0" algn="bl" rotWithShape="0" blurRad="76200" dist="12700" dir="8100000">
               <a:srgbClr val="000000">
                 <a:alpha val="8000"/>
               </a:srgbClr>
@@ -6280,7 +6280,7 @@
         </p:nvSpPr>
         <p:spPr>
           <a:xfrm>
-            <a:off x="4983480" y="3063240"/>
+            <a:off x="5029200" y="3017520"/>
             <a:ext cx="384048" cy="384048"/>
           </a:xfrm>
           <a:prstGeom prst="ellipse">
@@ -6300,7 +6300,7 @@
         </p:nvSpPr>
         <p:spPr>
           <a:xfrm>
-            <a:off x="4983480" y="3063240"/>
+            <a:off x="5029200" y="3017520"/>
             <a:ext cx="384048" cy="384048"/>
           </a:xfrm>
           <a:prstGeom prst="rect">
@@ -6339,7 +6339,7 @@
         </p:nvSpPr>
         <p:spPr>
           <a:xfrm>
-            <a:off x="5532120" y="3017520"/>
+            <a:off x="5577840" y="2971800"/>
             <a:ext cx="914400" cy="228600"/>
           </a:xfrm>
           <a:prstGeom prst="rect">
@@ -6378,8 +6378,8 @@
         </p:nvSpPr>
         <p:spPr>
           <a:xfrm>
-            <a:off x="5532120" y="3246120"/>
-            <a:ext cx="3017520" cy="320040"/>
+            <a:off x="5577840" y="3200400"/>
+            <a:ext cx="3017520" cy="292608"/>
           </a:xfrm>
           <a:prstGeom prst="rect">
             <a:avLst/>
@@ -6417,8 +6417,8 @@
         </p:nvSpPr>
         <p:spPr>
           <a:xfrm>
-            <a:off x="4983480" y="3657600"/>
-            <a:ext cx="3611880" cy="411480"/>
+            <a:off x="5029200" y="3611880"/>
+            <a:ext cx="3657600" cy="457200"/>
           </a:xfrm>
           <a:prstGeom prst="rect">
             <a:avLst/>
@@ -6436,13 +6436,13 @@
             <a:r>
               <a:rPr lang="en-US" sz="1300" dirty="0">
                 <a:solidFill>
-                  <a:srgbClr val="5A6B7C"/>
-                </a:solidFill>
-                <a:latin typeface="Calibri" pitchFamily="34" charset="0"/>
-                <a:ea typeface="Calibri" pitchFamily="34" charset="-122"/>
-                <a:cs typeface="Calibri" pitchFamily="34" charset="-120"/>
-              </a:rPr>
-              <a:t>用户、应用、对话记录与精选管理；具备限流、缓存、监控和权限控制基础。</a:t>
+                  <a:srgbClr val="3D5163"/>
+                </a:solidFill>
+                <a:latin typeface="Calibri" pitchFamily="34" charset="0"/>
+                <a:ea typeface="Calibri" pitchFamily="34" charset="-122"/>
+                <a:cs typeface="Calibri" pitchFamily="34" charset="-120"/>
+              </a:rPr>
+              <a:t>用户、应用、对话与精选管理；具备限流、缓存、监控和权限控制基础。</a:t>
             </a:r>
             <a:endParaRPr lang="en-US" sz="1300" dirty="0"/>
           </a:p>
@@ -6456,8 +6456,8 @@
         </p:nvSpPr>
         <p:spPr>
           <a:xfrm>
-            <a:off x="457200" y="4800600"/>
-            <a:ext cx="6583680" cy="256032"/>
+            <a:off x="457200" y="4773168"/>
+            <a:ext cx="6583680" cy="237744"/>
           </a:xfrm>
           <a:prstGeom prst="rect">
             <a:avLst/>
@@ -6475,7 +6475,7 @@
             <a:r>
               <a:rPr lang="en-US" sz="1000" dirty="0">
                 <a:solidFill>
-                  <a:srgbClr val="5A6B7C"/>
+                  <a:srgbClr val="3D5163"/>
                 </a:solidFill>
                 <a:latin typeface="Calibri" pitchFamily="34" charset="0"/>
                 <a:ea typeface="Calibri" pitchFamily="34" charset="-122"/>
@@ -6495,8 +6495,8 @@
         </p:nvSpPr>
         <p:spPr>
           <a:xfrm>
-            <a:off x="7589520" y="4800600"/>
-            <a:ext cx="1097280" cy="256032"/>
+            <a:off x="7589520" y="4773168"/>
+            <a:ext cx="1097280" cy="237744"/>
           </a:xfrm>
           <a:prstGeom prst="rect">
             <a:avLst/>
@@ -6514,7 +6514,7 @@
             <a:r>
               <a:rPr lang="en-US" sz="1000" dirty="0">
                 <a:solidFill>
-                  <a:srgbClr val="5A6B7C"/>
+                  <a:srgbClr val="3D5163"/>
                 </a:solidFill>
                 <a:latin typeface="Calibri" pitchFamily="34" charset="0"/>
                 <a:ea typeface="Calibri" pitchFamily="34" charset="-122"/>
@@ -6599,12 +6599,12 @@
         </p:nvSpPr>
         <p:spPr>
           <a:xfrm>
-            <a:off x="457200" y="256032"/>
-            <a:ext cx="2377440" cy="292608"/>
+            <a:off x="457200" y="292608"/>
+            <a:ext cx="2468880" cy="274320"/>
           </a:xfrm>
           <a:prstGeom prst="roundRect">
             <a:avLst>
-              <a:gd name="adj" fmla="val 18750"/>
+              <a:gd name="adj" fmla="val 20000"/>
             </a:avLst>
           </a:prstGeom>
           <a:solidFill>
@@ -6621,8 +6621,8 @@
         </p:nvSpPr>
         <p:spPr>
           <a:xfrm>
-            <a:off x="457200" y="256032"/>
-            <a:ext cx="2377440" cy="292608"/>
+            <a:off x="457200" y="292608"/>
+            <a:ext cx="2468880" cy="274320"/>
           </a:xfrm>
           <a:prstGeom prst="rect">
             <a:avLst/>
@@ -6660,24 +6660,24 @@
         </p:nvSpPr>
         <p:spPr>
           <a:xfrm>
-            <a:off x="457200" y="640080"/>
-            <a:ext cx="6035040" cy="411480"/>
-          </a:xfrm>
-          <a:prstGeom prst="rect">
-            <a:avLst/>
-          </a:prstGeom>
-          <a:noFill/>
-          <a:ln/>
-        </p:spPr>
-        <p:txBody>
-          <a:bodyPr wrap="square" lIns="0" tIns="0" rIns="0" bIns="0" rtlCol="0" anchor="ctr"/>
-          <a:lstStyle/>
-          <a:p>
-            <a:pPr indent="0" marL="0">
-              <a:buNone/>
-            </a:pPr>
-            <a:r>
-              <a:rPr lang="en-US" sz="2800" b="1" dirty="0">
+            <a:off x="457200" y="658368"/>
+            <a:ext cx="5943600" cy="365760"/>
+          </a:xfrm>
+          <a:prstGeom prst="rect">
+            <a:avLst/>
+          </a:prstGeom>
+          <a:noFill/>
+          <a:ln/>
+        </p:spPr>
+        <p:txBody>
+          <a:bodyPr wrap="square" lIns="0" tIns="0" rIns="0" bIns="0" rtlCol="0" anchor="ctr"/>
+          <a:lstStyle/>
+          <a:p>
+            <a:pPr indent="0" marL="0">
+              <a:buNone/>
+            </a:pPr>
+            <a:r>
+              <a:rPr lang="en-US" sz="2600" b="1" dirty="0">
                 <a:solidFill>
                   <a:srgbClr val="1A2B3C"/>
                 </a:solidFill>
@@ -6687,7 +6687,7 @@
               </a:rPr>
               <a:t>近期进展：最近一轮聚焦工程化</a:t>
             </a:r>
-            <a:endParaRPr lang="en-US" sz="2800" dirty="0"/>
+            <a:endParaRPr lang="en-US" sz="2600" dirty="0"/>
           </a:p>
         </p:txBody>
       </p:sp>
@@ -6699,12 +6699,12 @@
         </p:nvSpPr>
         <p:spPr>
           <a:xfrm>
-            <a:off x="6675120" y="640080"/>
-            <a:ext cx="2011680" cy="411480"/>
+            <a:off x="6583680" y="658368"/>
+            <a:ext cx="2103120" cy="365760"/>
           </a:xfrm>
           <a:prstGeom prst="roundRect">
             <a:avLst>
-              <a:gd name="adj" fmla="val 17778"/>
+              <a:gd name="adj" fmla="val 20000"/>
             </a:avLst>
           </a:prstGeom>
           <a:solidFill>
@@ -6721,8 +6721,8 @@
         </p:nvSpPr>
         <p:spPr>
           <a:xfrm>
-            <a:off x="6675120" y="640080"/>
-            <a:ext cx="2011680" cy="411480"/>
+            <a:off x="6583680" y="658368"/>
+            <a:ext cx="2103120" cy="365760"/>
           </a:xfrm>
           <a:prstGeom prst="rect">
             <a:avLst/>
@@ -6760,8 +6760,8 @@
         </p:nvSpPr>
         <p:spPr>
           <a:xfrm>
-            <a:off x="731520" y="1691640"/>
-            <a:ext cx="7680960" cy="54864"/>
+            <a:off x="731520" y="1554480"/>
+            <a:ext cx="7680960" cy="45720"/>
           </a:xfrm>
           <a:prstGeom prst="rect">
             <a:avLst/>
@@ -6780,7 +6780,7 @@
         </p:nvSpPr>
         <p:spPr>
           <a:xfrm>
-            <a:off x="1280160" y="1600200"/>
+            <a:off x="1280160" y="1463040"/>
             <a:ext cx="237744" cy="237744"/>
           </a:xfrm>
           <a:prstGeom prst="ellipse">
@@ -6800,12 +6800,12 @@
         </p:nvSpPr>
         <p:spPr>
           <a:xfrm>
-            <a:off x="502920" y="2057400"/>
-            <a:ext cx="2011680" cy="1554480"/>
+            <a:off x="457200" y="1920240"/>
+            <a:ext cx="2011680" cy="1508760"/>
           </a:xfrm>
           <a:prstGeom prst="roundRect">
             <a:avLst>
-              <a:gd name="adj" fmla="val 5882"/>
+              <a:gd name="adj" fmla="val 6061"/>
             </a:avLst>
           </a:prstGeom>
           <a:solidFill>
@@ -6822,7 +6822,7 @@
         </p:nvSpPr>
         <p:spPr>
           <a:xfrm>
-            <a:off x="612648" y="2194560"/>
+            <a:off x="566928" y="2057400"/>
             <a:ext cx="1792224" cy="256032"/>
           </a:xfrm>
           <a:prstGeom prst="rect">
@@ -6861,7 +6861,7 @@
         </p:nvSpPr>
         <p:spPr>
           <a:xfrm>
-            <a:off x="612648" y="2514600"/>
+            <a:off x="566928" y="2377440"/>
             <a:ext cx="1792224" cy="320040"/>
           </a:xfrm>
           <a:prstGeom prst="rect">
@@ -6900,34 +6900,34 @@
         </p:nvSpPr>
         <p:spPr>
           <a:xfrm>
-            <a:off x="612648" y="2926080"/>
-            <a:ext cx="1792224" cy="548640"/>
-          </a:xfrm>
-          <a:prstGeom prst="rect">
-            <a:avLst/>
-          </a:prstGeom>
-          <a:noFill/>
-          <a:ln/>
-        </p:spPr>
-        <p:txBody>
-          <a:bodyPr wrap="square" lIns="0" tIns="0" rIns="0" bIns="0" rtlCol="0" anchor="ctr"/>
-          <a:lstStyle/>
-          <a:p>
-            <a:pPr indent="0" marL="0">
-              <a:buNone/>
-            </a:pPr>
-            <a:r>
-              <a:rPr lang="en-US" sz="1200" dirty="0">
-                <a:solidFill>
-                  <a:srgbClr val="5A6B7C"/>
-                </a:solidFill>
-                <a:latin typeface="Calibri" pitchFamily="34" charset="0"/>
-                <a:ea typeface="Calibri" pitchFamily="34" charset="-122"/>
-                <a:cs typeface="Calibri" pitchFamily="34" charset="-120"/>
-              </a:rPr>
-              <a:t>Prompt 审查、稳定性优化、成本优化</a:t>
-            </a:r>
-            <a:endParaRPr lang="en-US" sz="1200" dirty="0"/>
+            <a:off x="566928" y="2788920"/>
+            <a:ext cx="1792224" cy="502920"/>
+          </a:xfrm>
+          <a:prstGeom prst="rect">
+            <a:avLst/>
+          </a:prstGeom>
+          <a:noFill/>
+          <a:ln/>
+        </p:spPr>
+        <p:txBody>
+          <a:bodyPr wrap="square" lIns="0" tIns="0" rIns="0" bIns="0" rtlCol="0" anchor="ctr"/>
+          <a:lstStyle/>
+          <a:p>
+            <a:pPr indent="0" marL="0">
+              <a:buNone/>
+            </a:pPr>
+            <a:r>
+              <a:rPr lang="en-US" sz="1300" dirty="0">
+                <a:solidFill>
+                  <a:srgbClr val="3D5163"/>
+                </a:solidFill>
+                <a:latin typeface="Calibri" pitchFamily="34" charset="0"/>
+                <a:ea typeface="Calibri" pitchFamily="34" charset="-122"/>
+                <a:cs typeface="Calibri" pitchFamily="34" charset="-120"/>
+              </a:rPr>
+              <a:t>Prompt 审查、稳定性与成本优化</a:t>
+            </a:r>
+            <a:endParaRPr lang="en-US" sz="1300" dirty="0"/>
           </a:p>
         </p:txBody>
       </p:sp>
@@ -6939,7 +6939,7 @@
         </p:nvSpPr>
         <p:spPr>
           <a:xfrm>
-            <a:off x="3429000" y="1600200"/>
+            <a:off x="3451860" y="1463040"/>
             <a:ext cx="237744" cy="237744"/>
           </a:xfrm>
           <a:prstGeom prst="ellipse">
@@ -6959,12 +6959,12 @@
         </p:nvSpPr>
         <p:spPr>
           <a:xfrm>
-            <a:off x="2651760" y="2057400"/>
-            <a:ext cx="2011680" cy="1554480"/>
+            <a:off x="2628900" y="1920240"/>
+            <a:ext cx="2011680" cy="1508760"/>
           </a:xfrm>
           <a:prstGeom prst="roundRect">
             <a:avLst>
-              <a:gd name="adj" fmla="val 5882"/>
+              <a:gd name="adj" fmla="val 6061"/>
             </a:avLst>
           </a:prstGeom>
           <a:solidFill>
@@ -6981,7 +6981,7 @@
         </p:nvSpPr>
         <p:spPr>
           <a:xfrm>
-            <a:off x="2761488" y="2194560"/>
+            <a:off x="2738628" y="2057400"/>
             <a:ext cx="1792224" cy="256032"/>
           </a:xfrm>
           <a:prstGeom prst="rect">
@@ -7020,7 +7020,7 @@
         </p:nvSpPr>
         <p:spPr>
           <a:xfrm>
-            <a:off x="2761488" y="2514600"/>
+            <a:off x="2738628" y="2377440"/>
             <a:ext cx="1792224" cy="320040"/>
           </a:xfrm>
           <a:prstGeom prst="rect">
@@ -7059,34 +7059,34 @@
         </p:nvSpPr>
         <p:spPr>
           <a:xfrm>
-            <a:off x="2761488" y="2926080"/>
-            <a:ext cx="1792224" cy="548640"/>
-          </a:xfrm>
-          <a:prstGeom prst="rect">
-            <a:avLst/>
-          </a:prstGeom>
-          <a:noFill/>
-          <a:ln/>
-        </p:spPr>
-        <p:txBody>
-          <a:bodyPr wrap="square" lIns="0" tIns="0" rIns="0" bIns="0" rtlCol="0" anchor="ctr"/>
-          <a:lstStyle/>
-          <a:p>
-            <a:pPr indent="0" marL="0">
-              <a:buNone/>
-            </a:pPr>
-            <a:r>
-              <a:rPr lang="en-US" sz="1200" dirty="0">
-                <a:solidFill>
-                  <a:srgbClr val="5A6B7C"/>
-                </a:solidFill>
-                <a:latin typeface="Calibri" pitchFamily="34" charset="0"/>
-                <a:ea typeface="Calibri" pitchFamily="34" charset="-122"/>
-                <a:cs typeface="Calibri" pitchFamily="34" charset="-120"/>
-              </a:rPr>
-              <a:t>部署上线；Prometheus / Grafana 监控体系</a:t>
-            </a:r>
-            <a:endParaRPr lang="en-US" sz="1200" dirty="0"/>
+            <a:off x="2738628" y="2788920"/>
+            <a:ext cx="1792224" cy="502920"/>
+          </a:xfrm>
+          <a:prstGeom prst="rect">
+            <a:avLst/>
+          </a:prstGeom>
+          <a:noFill/>
+          <a:ln/>
+        </p:spPr>
+        <p:txBody>
+          <a:bodyPr wrap="square" lIns="0" tIns="0" rIns="0" bIns="0" rtlCol="0" anchor="ctr"/>
+          <a:lstStyle/>
+          <a:p>
+            <a:pPr indent="0" marL="0">
+              <a:buNone/>
+            </a:pPr>
+            <a:r>
+              <a:rPr lang="en-US" sz="1300" dirty="0">
+                <a:solidFill>
+                  <a:srgbClr val="3D5163"/>
+                </a:solidFill>
+                <a:latin typeface="Calibri" pitchFamily="34" charset="0"/>
+                <a:ea typeface="Calibri" pitchFamily="34" charset="-122"/>
+                <a:cs typeface="Calibri" pitchFamily="34" charset="-120"/>
+              </a:rPr>
+              <a:t>部署上线；Prometheus / Grafana</a:t>
+            </a:r>
+            <a:endParaRPr lang="en-US" sz="1300" dirty="0"/>
           </a:p>
         </p:txBody>
       </p:sp>
@@ -7098,7 +7098,7 @@
         </p:nvSpPr>
         <p:spPr>
           <a:xfrm>
-            <a:off x="5577840" y="1600200"/>
+            <a:off x="5623560" y="1463040"/>
             <a:ext cx="237744" cy="237744"/>
           </a:xfrm>
           <a:prstGeom prst="ellipse">
@@ -7118,12 +7118,12 @@
         </p:nvSpPr>
         <p:spPr>
           <a:xfrm>
-            <a:off x="4800600" y="2057400"/>
-            <a:ext cx="2011680" cy="1554480"/>
+            <a:off x="4800600" y="1920240"/>
+            <a:ext cx="2011680" cy="1508760"/>
           </a:xfrm>
           <a:prstGeom prst="roundRect">
             <a:avLst>
-              <a:gd name="adj" fmla="val 5882"/>
+              <a:gd name="adj" fmla="val 6061"/>
             </a:avLst>
           </a:prstGeom>
           <a:solidFill>
@@ -7140,7 +7140,7 @@
         </p:nvSpPr>
         <p:spPr>
           <a:xfrm>
-            <a:off x="4910328" y="2194560"/>
+            <a:off x="4910328" y="2057400"/>
             <a:ext cx="1792224" cy="256032"/>
           </a:xfrm>
           <a:prstGeom prst="rect">
@@ -7179,7 +7179,7 @@
         </p:nvSpPr>
         <p:spPr>
           <a:xfrm>
-            <a:off x="4910328" y="2514600"/>
+            <a:off x="4910328" y="2377440"/>
             <a:ext cx="1792224" cy="320040"/>
           </a:xfrm>
           <a:prstGeom prst="rect">
@@ -7218,34 +7218,34 @@
         </p:nvSpPr>
         <p:spPr>
           <a:xfrm>
-            <a:off x="4910328" y="2926080"/>
-            <a:ext cx="1792224" cy="548640"/>
-          </a:xfrm>
-          <a:prstGeom prst="rect">
-            <a:avLst/>
-          </a:prstGeom>
-          <a:noFill/>
-          <a:ln/>
-        </p:spPr>
-        <p:txBody>
-          <a:bodyPr wrap="square" lIns="0" tIns="0" rIns="0" bIns="0" rtlCol="0" anchor="ctr"/>
-          <a:lstStyle/>
-          <a:p>
-            <a:pPr indent="0" marL="0">
-              <a:buNone/>
-            </a:pPr>
-            <a:r>
-              <a:rPr lang="en-US" sz="1200" dirty="0">
-                <a:solidFill>
-                  <a:srgbClr val="5A6B7C"/>
-                </a:solidFill>
-                <a:latin typeface="Calibri" pitchFamily="34" charset="0"/>
-                <a:ea typeface="Calibri" pitchFamily="34" charset="-122"/>
-                <a:cs typeface="Calibri" pitchFamily="34" charset="-120"/>
-              </a:rPr>
-              <a:t>完成 7 模块拆分，并保留完整单体代码</a:t>
-            </a:r>
-            <a:endParaRPr lang="en-US" sz="1200" dirty="0"/>
+            <a:off x="4910328" y="2788920"/>
+            <a:ext cx="1792224" cy="502920"/>
+          </a:xfrm>
+          <a:prstGeom prst="rect">
+            <a:avLst/>
+          </a:prstGeom>
+          <a:noFill/>
+          <a:ln/>
+        </p:spPr>
+        <p:txBody>
+          <a:bodyPr wrap="square" lIns="0" tIns="0" rIns="0" bIns="0" rtlCol="0" anchor="ctr"/>
+          <a:lstStyle/>
+          <a:p>
+            <a:pPr indent="0" marL="0">
+              <a:buNone/>
+            </a:pPr>
+            <a:r>
+              <a:rPr lang="en-US" sz="1300" dirty="0">
+                <a:solidFill>
+                  <a:srgbClr val="3D5163"/>
+                </a:solidFill>
+                <a:latin typeface="Calibri" pitchFamily="34" charset="0"/>
+                <a:ea typeface="Calibri" pitchFamily="34" charset="-122"/>
+                <a:cs typeface="Calibri" pitchFamily="34" charset="-120"/>
+              </a:rPr>
+              <a:t>完成 7 模块拆分，保留单体代码</a:t>
+            </a:r>
+            <a:endParaRPr lang="en-US" sz="1300" dirty="0"/>
           </a:p>
         </p:txBody>
       </p:sp>
@@ -7257,7 +7257,7 @@
         </p:nvSpPr>
         <p:spPr>
           <a:xfrm>
-            <a:off x="7726680" y="1600200"/>
+            <a:off x="7795260" y="1463040"/>
             <a:ext cx="237744" cy="237744"/>
           </a:xfrm>
           <a:prstGeom prst="ellipse">
@@ -7277,12 +7277,12 @@
         </p:nvSpPr>
         <p:spPr>
           <a:xfrm>
-            <a:off x="6949440" y="2057400"/>
-            <a:ext cx="2011680" cy="1554480"/>
+            <a:off x="6972300" y="1920240"/>
+            <a:ext cx="2011680" cy="1508760"/>
           </a:xfrm>
           <a:prstGeom prst="roundRect">
             <a:avLst>
-              <a:gd name="adj" fmla="val 5882"/>
+              <a:gd name="adj" fmla="val 6061"/>
             </a:avLst>
           </a:prstGeom>
           <a:solidFill>
@@ -7299,7 +7299,7 @@
         </p:nvSpPr>
         <p:spPr>
           <a:xfrm>
-            <a:off x="7059168" y="2194560"/>
+            <a:off x="7082028" y="2057400"/>
             <a:ext cx="1792224" cy="256032"/>
           </a:xfrm>
           <a:prstGeom prst="rect">
@@ -7318,7 +7318,7 @@
             <a:r>
               <a:rPr lang="en-US" sz="1200" b="1" dirty="0">
                 <a:solidFill>
-                  <a:srgbClr val="00A896"/>
+                  <a:srgbClr val="C45C26"/>
                 </a:solidFill>
                 <a:latin typeface="Calibri" pitchFamily="34" charset="0"/>
                 <a:ea typeface="Calibri" pitchFamily="34" charset="-122"/>
@@ -7338,7 +7338,7 @@
         </p:nvSpPr>
         <p:spPr>
           <a:xfrm>
-            <a:off x="7059168" y="2514600"/>
+            <a:off x="7082028" y="2377440"/>
             <a:ext cx="1792224" cy="320040"/>
           </a:xfrm>
           <a:prstGeom prst="rect">
@@ -7377,26 +7377,26 @@
         </p:nvSpPr>
         <p:spPr>
           <a:xfrm>
-            <a:off x="7059168" y="2926080"/>
-            <a:ext cx="1792224" cy="548640"/>
-          </a:xfrm>
-          <a:prstGeom prst="rect">
-            <a:avLst/>
-          </a:prstGeom>
-          <a:noFill/>
-          <a:ln/>
-        </p:spPr>
-        <p:txBody>
-          <a:bodyPr wrap="square" lIns="0" tIns="0" rIns="0" bIns="0" rtlCol="0" anchor="ctr"/>
-          <a:lstStyle/>
-          <a:p>
-            <a:pPr indent="0" marL="0">
-              <a:buNone/>
-            </a:pPr>
-            <a:r>
-              <a:rPr lang="en-US" sz="1200" dirty="0">
-                <a:solidFill>
-                  <a:srgbClr val="5A6B7C"/>
+            <a:off x="7082028" y="2788920"/>
+            <a:ext cx="1792224" cy="502920"/>
+          </a:xfrm>
+          <a:prstGeom prst="rect">
+            <a:avLst/>
+          </a:prstGeom>
+          <a:noFill/>
+          <a:ln/>
+        </p:spPr>
+        <p:txBody>
+          <a:bodyPr wrap="square" lIns="0" tIns="0" rIns="0" bIns="0" rtlCol="0" anchor="ctr"/>
+          <a:lstStyle/>
+          <a:p>
+            <a:pPr indent="0" marL="0">
+              <a:buNone/>
+            </a:pPr>
+            <a:r>
+              <a:rPr lang="en-US" sz="1300" dirty="0">
+                <a:solidFill>
+                  <a:srgbClr val="3D5163"/>
                 </a:solidFill>
                 <a:latin typeface="Calibri" pitchFamily="34" charset="0"/>
                 <a:ea typeface="Calibri" pitchFamily="34" charset="-122"/>
@@ -7404,7 +7404,7 @@
               </a:rPr>
               <a:t>距最新代码提交约 333 天</a:t>
             </a:r>
-            <a:endParaRPr lang="en-US" sz="1200" dirty="0"/>
+            <a:endParaRPr lang="en-US" sz="1300" dirty="0"/>
           </a:p>
         </p:txBody>
       </p:sp>
@@ -7416,12 +7416,12 @@
         </p:nvSpPr>
         <p:spPr>
           <a:xfrm>
-            <a:off x="457200" y="3840480"/>
-            <a:ext cx="8229600" cy="731520"/>
+            <a:off x="457200" y="3657600"/>
+            <a:ext cx="8229600" cy="822960"/>
           </a:xfrm>
           <a:prstGeom prst="roundRect">
             <a:avLst>
-              <a:gd name="adj" fmla="val 10000"/>
+              <a:gd name="adj" fmla="val 8889"/>
             </a:avLst>
           </a:prstGeom>
           <a:solidFill>
@@ -7438,7 +7438,7 @@
         </p:nvSpPr>
         <p:spPr>
           <a:xfrm>
-            <a:off x="685800" y="3931920"/>
+            <a:off x="685800" y="3767328"/>
             <a:ext cx="914400" cy="228600"/>
           </a:xfrm>
           <a:prstGeom prst="rect">
@@ -7477,8 +7477,8 @@
         </p:nvSpPr>
         <p:spPr>
           <a:xfrm>
-            <a:off x="685800" y="4160520"/>
-            <a:ext cx="7772400" cy="320040"/>
+            <a:off x="685800" y="4023360"/>
+            <a:ext cx="7772400" cy="365760"/>
           </a:xfrm>
           <a:prstGeom prst="rect">
             <a:avLst/>
@@ -7502,7 +7502,7 @@
                 <a:ea typeface="Calibri" pitchFamily="34" charset="-122"/>
                 <a:cs typeface="Calibri" pitchFamily="34" charset="-120"/>
               </a:rPr>
-              <a:t>昨日与近 7 天均无业务代码变化；日常自动化仅产出状态汇报。项目已从功能搭建阶段进入“恢复维护节奏、补齐交付门禁”的阶段。</a:t>
+              <a:t>昨日与近 7 天均无业务代码变化；日常自动化仅产出状态汇报。项目已从功能搭建进入“恢复维护节奏、补齐交付门禁”阶段。</a:t>
             </a:r>
             <a:endParaRPr lang="en-US" sz="1300" dirty="0"/>
           </a:p>
@@ -7516,8 +7516,8 @@
         </p:nvSpPr>
         <p:spPr>
           <a:xfrm>
-            <a:off x="457200" y="4800600"/>
-            <a:ext cx="6583680" cy="256032"/>
+            <a:off x="457200" y="4773168"/>
+            <a:ext cx="6583680" cy="237744"/>
           </a:xfrm>
           <a:prstGeom prst="rect">
             <a:avLst/>
@@ -7535,7 +7535,7 @@
             <a:r>
               <a:rPr lang="en-US" sz="1000" dirty="0">
                 <a:solidFill>
-                  <a:srgbClr val="5A6B7C"/>
+                  <a:srgbClr val="3D5163"/>
                 </a:solidFill>
                 <a:latin typeface="Calibri" pitchFamily="34" charset="0"/>
                 <a:ea typeface="Calibri" pitchFamily="34" charset="-122"/>
@@ -7555,8 +7555,8 @@
         </p:nvSpPr>
         <p:spPr>
           <a:xfrm>
-            <a:off x="7589520" y="4800600"/>
-            <a:ext cx="1097280" cy="256032"/>
+            <a:off x="7589520" y="4773168"/>
+            <a:ext cx="1097280" cy="237744"/>
           </a:xfrm>
           <a:prstGeom prst="rect">
             <a:avLst/>
@@ -7574,7 +7574,7 @@
             <a:r>
               <a:rPr lang="en-US" sz="1000" dirty="0">
                 <a:solidFill>
-                  <a:srgbClr val="5A6B7C"/>
+                  <a:srgbClr val="3D5163"/>
                 </a:solidFill>
                 <a:latin typeface="Calibri" pitchFamily="34" charset="0"/>
                 <a:ea typeface="Calibri" pitchFamily="34" charset="-122"/>
@@ -7659,12 +7659,12 @@
         </p:nvSpPr>
         <p:spPr>
           <a:xfrm>
-            <a:off x="457200" y="256032"/>
-            <a:ext cx="2377440" cy="292608"/>
+            <a:off x="457200" y="292608"/>
+            <a:ext cx="2468880" cy="274320"/>
           </a:xfrm>
           <a:prstGeom prst="roundRect">
             <a:avLst>
-              <a:gd name="adj" fmla="val 18750"/>
+              <a:gd name="adj" fmla="val 20000"/>
             </a:avLst>
           </a:prstGeom>
           <a:solidFill>
@@ -7681,8 +7681,8 @@
         </p:nvSpPr>
         <p:spPr>
           <a:xfrm>
-            <a:off x="457200" y="256032"/>
-            <a:ext cx="2377440" cy="292608"/>
+            <a:off x="457200" y="292608"/>
+            <a:ext cx="2468880" cy="274320"/>
           </a:xfrm>
           <a:prstGeom prst="rect">
             <a:avLst/>
@@ -7720,24 +7720,24 @@
         </p:nvSpPr>
         <p:spPr>
           <a:xfrm>
-            <a:off x="457200" y="640080"/>
-            <a:ext cx="8229600" cy="411480"/>
-          </a:xfrm>
-          <a:prstGeom prst="rect">
-            <a:avLst/>
-          </a:prstGeom>
-          <a:noFill/>
-          <a:ln/>
-        </p:spPr>
-        <p:txBody>
-          <a:bodyPr wrap="square" lIns="0" tIns="0" rIns="0" bIns="0" rtlCol="0" anchor="ctr"/>
-          <a:lstStyle/>
-          <a:p>
-            <a:pPr indent="0" marL="0">
-              <a:buNone/>
-            </a:pPr>
-            <a:r>
-              <a:rPr lang="en-US" sz="3200" b="1" dirty="0">
+            <a:off x="457200" y="658368"/>
+            <a:ext cx="8229600" cy="365760"/>
+          </a:xfrm>
+          <a:prstGeom prst="rect">
+            <a:avLst/>
+          </a:prstGeom>
+          <a:noFill/>
+          <a:ln/>
+        </p:spPr>
+        <p:txBody>
+          <a:bodyPr wrap="square" lIns="0" tIns="0" rIns="0" bIns="0" rtlCol="0" anchor="ctr"/>
+          <a:lstStyle/>
+          <a:p>
+            <a:pPr indent="0" marL="0">
+              <a:buNone/>
+            </a:pPr>
+            <a:r>
+              <a:rPr lang="en-US" sz="3000" b="1" dirty="0">
                 <a:solidFill>
                   <a:srgbClr val="1A2B3C"/>
                 </a:solidFill>
@@ -7747,7 +7747,7 @@
               </a:rPr>
               <a:t>数据与质量信号</a:t>
             </a:r>
-            <a:endParaRPr lang="en-US" sz="3200" dirty="0"/>
+            <a:endParaRPr lang="en-US" sz="3000" dirty="0"/>
           </a:p>
         </p:txBody>
       </p:sp>
@@ -7759,12 +7759,12 @@
         </p:nvSpPr>
         <p:spPr>
           <a:xfrm>
-            <a:off x="457200" y="1188720"/>
-            <a:ext cx="4023360" cy="3108960"/>
+            <a:off x="457200" y="1143000"/>
+            <a:ext cx="4023360" cy="3063240"/>
           </a:xfrm>
           <a:prstGeom prst="roundRect">
             <a:avLst>
-              <a:gd name="adj" fmla="val 2941"/>
+              <a:gd name="adj" fmla="val 2985"/>
             </a:avLst>
           </a:prstGeom>
           <a:solidFill>
@@ -7781,7 +7781,7 @@
         </p:nvSpPr>
         <p:spPr>
           <a:xfrm>
-            <a:off x="685800" y="1371600"/>
+            <a:off x="685800" y="1325880"/>
             <a:ext cx="3566160" cy="320040"/>
           </a:xfrm>
           <a:prstGeom prst="rect">
@@ -7820,7 +7820,7 @@
         </p:nvSpPr>
         <p:spPr>
           <a:xfrm>
-            <a:off x="731520" y="1920240"/>
+            <a:off x="777240" y="1874520"/>
             <a:ext cx="1645920" cy="502920"/>
           </a:xfrm>
           <a:prstGeom prst="rect">
@@ -7837,7 +7837,7 @@
               <a:buNone/>
             </a:pPr>
             <a:r>
-              <a:rPr lang="en-US" sz="3200" b="1" dirty="0">
+              <a:rPr lang="en-US" sz="3400" b="1" dirty="0">
                 <a:solidFill>
                   <a:srgbClr val="028090"/>
                 </a:solidFill>
@@ -7847,7 +7847,7 @@
               </a:rPr>
               <a:t>287</a:t>
             </a:r>
-            <a:endParaRPr lang="en-US" sz="3200" dirty="0"/>
+            <a:endParaRPr lang="en-US" sz="3400" dirty="0"/>
           </a:p>
         </p:txBody>
       </p:sp>
@@ -7859,7 +7859,7 @@
         </p:nvSpPr>
         <p:spPr>
           <a:xfrm>
-            <a:off x="731520" y="2423160"/>
+            <a:off x="777240" y="2377440"/>
             <a:ext cx="1645920" cy="274320"/>
           </a:xfrm>
           <a:prstGeom prst="rect">
@@ -7876,9 +7876,9 @@
               <a:buNone/>
             </a:pPr>
             <a:r>
-              <a:rPr lang="en-US" sz="1300" dirty="0">
-                <a:solidFill>
-                  <a:srgbClr val="5A6B7C"/>
+              <a:rPr lang="en-US" sz="1400" dirty="0">
+                <a:solidFill>
+                  <a:srgbClr val="3D5163"/>
                 </a:solidFill>
                 <a:latin typeface="Calibri" pitchFamily="34" charset="0"/>
                 <a:ea typeface="Calibri" pitchFamily="34" charset="-122"/>
@@ -7886,7 +7886,7 @@
               </a:rPr>
               <a:t>Java 文件</a:t>
             </a:r>
-            <a:endParaRPr lang="en-US" sz="1300" dirty="0"/>
+            <a:endParaRPr lang="en-US" sz="1400" dirty="0"/>
           </a:p>
         </p:txBody>
       </p:sp>
@@ -7898,7 +7898,7 @@
         </p:nvSpPr>
         <p:spPr>
           <a:xfrm>
-            <a:off x="2560320" y="1920240"/>
+            <a:off x="2606040" y="1874520"/>
             <a:ext cx="1645920" cy="502920"/>
           </a:xfrm>
           <a:prstGeom prst="rect">
@@ -7915,7 +7915,7 @@
               <a:buNone/>
             </a:pPr>
             <a:r>
-              <a:rPr lang="en-US" sz="3200" b="1" dirty="0">
+              <a:rPr lang="en-US" sz="3400" b="1" dirty="0">
                 <a:solidFill>
                   <a:srgbClr val="028090"/>
                 </a:solidFill>
@@ -7925,7 +7925,7 @@
               </a:rPr>
               <a:t>17</a:t>
             </a:r>
-            <a:endParaRPr lang="en-US" sz="3200" dirty="0"/>
+            <a:endParaRPr lang="en-US" sz="3400" dirty="0"/>
           </a:p>
         </p:txBody>
       </p:sp>
@@ -7937,7 +7937,7 @@
         </p:nvSpPr>
         <p:spPr>
           <a:xfrm>
-            <a:off x="2560320" y="2423160"/>
+            <a:off x="2606040" y="2377440"/>
             <a:ext cx="1645920" cy="274320"/>
           </a:xfrm>
           <a:prstGeom prst="rect">
@@ -7954,9 +7954,9 @@
               <a:buNone/>
             </a:pPr>
             <a:r>
-              <a:rPr lang="en-US" sz="1300" dirty="0">
-                <a:solidFill>
-                  <a:srgbClr val="5A6B7C"/>
+              <a:rPr lang="en-US" sz="1400" dirty="0">
+                <a:solidFill>
+                  <a:srgbClr val="3D5163"/>
                 </a:solidFill>
                 <a:latin typeface="Calibri" pitchFamily="34" charset="0"/>
                 <a:ea typeface="Calibri" pitchFamily="34" charset="-122"/>
@@ -7964,7 +7964,7 @@
               </a:rPr>
               <a:t>Vue 文件</a:t>
             </a:r>
-            <a:endParaRPr lang="en-US" sz="1300" dirty="0"/>
+            <a:endParaRPr lang="en-US" sz="1400" dirty="0"/>
           </a:p>
         </p:txBody>
       </p:sp>
@@ -7976,7 +7976,7 @@
         </p:nvSpPr>
         <p:spPr>
           <a:xfrm>
-            <a:off x="731520" y="2971800"/>
+            <a:off x="777240" y="2880360"/>
             <a:ext cx="1645920" cy="502920"/>
           </a:xfrm>
           <a:prstGeom prst="rect">
@@ -7993,7 +7993,7 @@
               <a:buNone/>
             </a:pPr>
             <a:r>
-              <a:rPr lang="en-US" sz="3200" b="1" dirty="0">
+              <a:rPr lang="en-US" sz="3400" b="1" dirty="0">
                 <a:solidFill>
                   <a:srgbClr val="028090"/>
                 </a:solidFill>
@@ -8003,7 +8003,7 @@
               </a:rPr>
               <a:t>15</a:t>
             </a:r>
-            <a:endParaRPr lang="en-US" sz="3200" dirty="0"/>
+            <a:endParaRPr lang="en-US" sz="3400" dirty="0"/>
           </a:p>
         </p:txBody>
       </p:sp>
@@ -8015,7 +8015,7 @@
         </p:nvSpPr>
         <p:spPr>
           <a:xfrm>
-            <a:off x="731520" y="3474720"/>
+            <a:off x="777240" y="3383280"/>
             <a:ext cx="1645920" cy="274320"/>
           </a:xfrm>
           <a:prstGeom prst="rect">
@@ -8032,9 +8032,9 @@
               <a:buNone/>
             </a:pPr>
             <a:r>
-              <a:rPr lang="en-US" sz="1300" dirty="0">
-                <a:solidFill>
-                  <a:srgbClr val="5A6B7C"/>
+              <a:rPr lang="en-US" sz="1400" dirty="0">
+                <a:solidFill>
+                  <a:srgbClr val="3D5163"/>
                 </a:solidFill>
                 <a:latin typeface="Calibri" pitchFamily="34" charset="0"/>
                 <a:ea typeface="Calibri" pitchFamily="34" charset="-122"/>
@@ -8042,7 +8042,7 @@
               </a:rPr>
               <a:t>后端测试类</a:t>
             </a:r>
-            <a:endParaRPr lang="en-US" sz="1300" dirty="0"/>
+            <a:endParaRPr lang="en-US" sz="1400" dirty="0"/>
           </a:p>
         </p:txBody>
       </p:sp>
@@ -8054,7 +8054,7 @@
         </p:nvSpPr>
         <p:spPr>
           <a:xfrm>
-            <a:off x="2560320" y="2971800"/>
+            <a:off x="2606040" y="2880360"/>
             <a:ext cx="1645920" cy="502920"/>
           </a:xfrm>
           <a:prstGeom prst="rect">
@@ -8071,7 +8071,7 @@
               <a:buNone/>
             </a:pPr>
             <a:r>
-              <a:rPr lang="en-US" sz="3200" b="1" dirty="0">
+              <a:rPr lang="en-US" sz="3400" b="1" dirty="0">
                 <a:solidFill>
                   <a:srgbClr val="028090"/>
                 </a:solidFill>
@@ -8081,7 +8081,7 @@
               </a:rPr>
               <a:t>0</a:t>
             </a:r>
-            <a:endParaRPr lang="en-US" sz="3200" dirty="0"/>
+            <a:endParaRPr lang="en-US" sz="3400" dirty="0"/>
           </a:p>
         </p:txBody>
       </p:sp>
@@ -8093,7 +8093,7 @@
         </p:nvSpPr>
         <p:spPr>
           <a:xfrm>
-            <a:off x="2560320" y="3474720"/>
+            <a:off x="2606040" y="3383280"/>
             <a:ext cx="1645920" cy="274320"/>
           </a:xfrm>
           <a:prstGeom prst="rect">
@@ -8110,9 +8110,9 @@
               <a:buNone/>
             </a:pPr>
             <a:r>
-              <a:rPr lang="en-US" sz="1300" dirty="0">
-                <a:solidFill>
-                  <a:srgbClr val="5A6B7C"/>
+              <a:rPr lang="en-US" sz="1400" dirty="0">
+                <a:solidFill>
+                  <a:srgbClr val="3D5163"/>
                 </a:solidFill>
                 <a:latin typeface="Calibri" pitchFamily="34" charset="0"/>
                 <a:ea typeface="Calibri" pitchFamily="34" charset="-122"/>
@@ -8120,7 +8120,7 @@
               </a:rPr>
               <a:t>CI 工作流</a:t>
             </a:r>
-            <a:endParaRPr lang="en-US" sz="1300" dirty="0"/>
+            <a:endParaRPr lang="en-US" sz="1400" dirty="0"/>
           </a:p>
         </p:txBody>
       </p:sp>
@@ -8132,12 +8132,12 @@
         </p:nvSpPr>
         <p:spPr>
           <a:xfrm>
-            <a:off x="4709160" y="1188720"/>
-            <a:ext cx="3977640" cy="3108960"/>
+            <a:off x="4754880" y="1143000"/>
+            <a:ext cx="3931920" cy="3063240"/>
           </a:xfrm>
           <a:prstGeom prst="roundRect">
             <a:avLst>
-              <a:gd name="adj" fmla="val 2941"/>
+              <a:gd name="adj" fmla="val 2985"/>
             </a:avLst>
           </a:prstGeom>
           <a:solidFill>
@@ -8154,7 +8154,7 @@
         </p:nvSpPr>
         <p:spPr>
           <a:xfrm>
-            <a:off x="4937760" y="1371600"/>
+            <a:off x="4983480" y="1325880"/>
             <a:ext cx="3566160" cy="320040"/>
           </a:xfrm>
           <a:prstGeom prst="rect">
@@ -8193,7 +8193,7 @@
         </p:nvSpPr>
         <p:spPr>
           <a:xfrm>
-            <a:off x="4983480" y="1947672"/>
+            <a:off x="5029200" y="1920240"/>
             <a:ext cx="201168" cy="201168"/>
           </a:xfrm>
           <a:prstGeom prst="ellipse">
@@ -8213,7 +8213,7 @@
         </p:nvSpPr>
         <p:spPr>
           <a:xfrm>
-            <a:off x="5349240" y="1874520"/>
+            <a:off x="5394960" y="1828800"/>
             <a:ext cx="3017520" cy="256032"/>
           </a:xfrm>
           <a:prstGeom prst="rect">
@@ -8252,7 +8252,7 @@
         </p:nvSpPr>
         <p:spPr>
           <a:xfrm>
-            <a:off x="5349240" y="2112264"/>
+            <a:off x="5394960" y="2066544"/>
             <a:ext cx="3017520" cy="228600"/>
           </a:xfrm>
           <a:prstGeom prst="rect">
@@ -8269,9 +8269,9 @@
               <a:buNone/>
             </a:pPr>
             <a:r>
-              <a:rPr lang="en-US" sz="1200" dirty="0">
-                <a:solidFill>
-                  <a:srgbClr val="5A6B7C"/>
+              <a:rPr lang="en-US" sz="1300" dirty="0">
+                <a:solidFill>
+                  <a:srgbClr val="3D5163"/>
                 </a:solidFill>
                 <a:latin typeface="Calibri" pitchFamily="34" charset="0"/>
                 <a:ea typeface="Calibri" pitchFamily="34" charset="-122"/>
@@ -8279,7 +8279,7 @@
               </a:rPr>
               <a:t>生成 / 编辑 / 部署 / 管理</a:t>
             </a:r>
-            <a:endParaRPr lang="en-US" sz="1200" dirty="0"/>
+            <a:endParaRPr lang="en-US" sz="1300" dirty="0"/>
           </a:p>
         </p:txBody>
       </p:sp>
@@ -8291,7 +8291,7 @@
         </p:nvSpPr>
         <p:spPr>
           <a:xfrm>
-            <a:off x="4983480" y="2496312"/>
+            <a:off x="5029200" y="2450592"/>
             <a:ext cx="201168" cy="201168"/>
           </a:xfrm>
           <a:prstGeom prst="ellipse">
@@ -8311,7 +8311,7 @@
         </p:nvSpPr>
         <p:spPr>
           <a:xfrm>
-            <a:off x="5349240" y="2423160"/>
+            <a:off x="5394960" y="2359152"/>
             <a:ext cx="3017520" cy="256032"/>
           </a:xfrm>
           <a:prstGeom prst="rect">
@@ -8350,7 +8350,7 @@
         </p:nvSpPr>
         <p:spPr>
           <a:xfrm>
-            <a:off x="5349240" y="2660904"/>
+            <a:off x="5394960" y="2596896"/>
             <a:ext cx="3017520" cy="228600"/>
           </a:xfrm>
           <a:prstGeom prst="rect">
@@ -8367,9 +8367,9 @@
               <a:buNone/>
             </a:pPr>
             <a:r>
-              <a:rPr lang="en-US" sz="1200" dirty="0">
-                <a:solidFill>
-                  <a:srgbClr val="5A6B7C"/>
+              <a:rPr lang="en-US" sz="1300" dirty="0">
+                <a:solidFill>
+                  <a:srgbClr val="3D5163"/>
                 </a:solidFill>
                 <a:latin typeface="Calibri" pitchFamily="34" charset="0"/>
                 <a:ea typeface="Calibri" pitchFamily="34" charset="-122"/>
@@ -8377,7 +8377,7 @@
               </a:rPr>
               <a:t>单体 + 微服务 + 监控</a:t>
             </a:r>
-            <a:endParaRPr lang="en-US" sz="1200" dirty="0"/>
+            <a:endParaRPr lang="en-US" sz="1300" dirty="0"/>
           </a:p>
         </p:txBody>
       </p:sp>
@@ -8389,7 +8389,7 @@
         </p:nvSpPr>
         <p:spPr>
           <a:xfrm>
-            <a:off x="4983480" y="3044952"/>
+            <a:off x="5029200" y="2980944"/>
             <a:ext cx="201168" cy="201168"/>
           </a:xfrm>
           <a:prstGeom prst="ellipse">
@@ -8409,7 +8409,7 @@
         </p:nvSpPr>
         <p:spPr>
           <a:xfrm>
-            <a:off x="5349240" y="2971800"/>
+            <a:off x="5394960" y="2889504"/>
             <a:ext cx="3017520" cy="256032"/>
           </a:xfrm>
           <a:prstGeom prst="rect">
@@ -8448,7 +8448,7 @@
         </p:nvSpPr>
         <p:spPr>
           <a:xfrm>
-            <a:off x="5349240" y="3209544"/>
+            <a:off x="5394960" y="3127248"/>
             <a:ext cx="3017520" cy="228600"/>
           </a:xfrm>
           <a:prstGeom prst="rect">
@@ -8465,9 +8465,9 @@
               <a:buNone/>
             </a:pPr>
             <a:r>
-              <a:rPr lang="en-US" sz="1200" dirty="0">
-                <a:solidFill>
-                  <a:srgbClr val="5A6B7C"/>
+              <a:rPr lang="en-US" sz="1300" dirty="0">
+                <a:solidFill>
+                  <a:srgbClr val="3D5163"/>
                 </a:solidFill>
                 <a:latin typeface="Calibri" pitchFamily="34" charset="0"/>
                 <a:ea typeface="Calibri" pitchFamily="34" charset="-122"/>
@@ -8475,7 +8475,7 @@
               </a:rPr>
               <a:t>有后端测试，无前端测试</a:t>
             </a:r>
-            <a:endParaRPr lang="en-US" sz="1200" dirty="0"/>
+            <a:endParaRPr lang="en-US" sz="1300" dirty="0"/>
           </a:p>
         </p:txBody>
       </p:sp>
@@ -8487,7 +8487,7 @@
         </p:nvSpPr>
         <p:spPr>
           <a:xfrm>
-            <a:off x="4983480" y="3593592"/>
+            <a:off x="5029200" y="3511296"/>
             <a:ext cx="201168" cy="201168"/>
           </a:xfrm>
           <a:prstGeom prst="ellipse">
@@ -8507,7 +8507,7 @@
         </p:nvSpPr>
         <p:spPr>
           <a:xfrm>
-            <a:off x="5349240" y="3520440"/>
+            <a:off x="5394960" y="3419856"/>
             <a:ext cx="3017520" cy="256032"/>
           </a:xfrm>
           <a:prstGeom prst="rect">
@@ -8546,7 +8546,7 @@
         </p:nvSpPr>
         <p:spPr>
           <a:xfrm>
-            <a:off x="5349240" y="3758184"/>
+            <a:off x="5394960" y="3657600"/>
             <a:ext cx="3017520" cy="228600"/>
           </a:xfrm>
           <a:prstGeom prst="rect">
@@ -8563,9 +8563,9 @@
               <a:buNone/>
             </a:pPr>
             <a:r>
-              <a:rPr lang="en-US" sz="1200" dirty="0">
-                <a:solidFill>
-                  <a:srgbClr val="5A6B7C"/>
+              <a:rPr lang="en-US" sz="1300" dirty="0">
+                <a:solidFill>
+                  <a:srgbClr val="3D5163"/>
                 </a:solidFill>
                 <a:latin typeface="Calibri" pitchFamily="34" charset="0"/>
                 <a:ea typeface="Calibri" pitchFamily="34" charset="-122"/>
@@ -8573,7 +8573,7 @@
               </a:rPr>
               <a:t>未发现 CI 配置</a:t>
             </a:r>
-            <a:endParaRPr lang="en-US" sz="1200" dirty="0"/>
+            <a:endParaRPr lang="en-US" sz="1300" dirty="0"/>
           </a:p>
         </p:txBody>
       </p:sp>
@@ -8585,7 +8585,7 @@
         </p:nvSpPr>
         <p:spPr>
           <a:xfrm>
-            <a:off x="457200" y="4434840"/>
+            <a:off x="457200" y="4343400"/>
             <a:ext cx="8229600" cy="274320"/>
           </a:xfrm>
           <a:prstGeom prst="rect">
@@ -8604,13 +8604,13 @@
             <a:r>
               <a:rPr lang="en-US" sz="1100" dirty="0">
                 <a:solidFill>
-                  <a:srgbClr val="5A6B7C"/>
-                </a:solidFill>
-                <a:latin typeface="Calibri" pitchFamily="34" charset="0"/>
-                <a:ea typeface="Calibri" pitchFamily="34" charset="-122"/>
-                <a:cs typeface="Calibri" pitchFamily="34" charset="-120"/>
-              </a:rPr>
-              <a:t>口径说明：文件与提交数来自 Git 跟踪记录；健康度为基于仓库证据的定性评分，不代表线上 SLA、用户量或生成成功率。</a:t>
+                  <a:srgbClr val="3D5163"/>
+                </a:solidFill>
+                <a:latin typeface="Calibri" pitchFamily="34" charset="0"/>
+                <a:ea typeface="Calibri" pitchFamily="34" charset="-122"/>
+                <a:cs typeface="Calibri" pitchFamily="34" charset="-120"/>
+              </a:rPr>
+              <a:t>口径说明：文件与提交数来自 Git 跟踪记录；健康度为基于仓库证据的定性评分，不代表线上 SLA 或生成成功率。</a:t>
             </a:r>
             <a:endParaRPr lang="en-US" sz="1100" dirty="0"/>
           </a:p>
@@ -8624,8 +8624,8 @@
         </p:nvSpPr>
         <p:spPr>
           <a:xfrm>
-            <a:off x="457200" y="4800600"/>
-            <a:ext cx="6583680" cy="256032"/>
+            <a:off x="457200" y="4773168"/>
+            <a:ext cx="6583680" cy="237744"/>
           </a:xfrm>
           <a:prstGeom prst="rect">
             <a:avLst/>
@@ -8643,7 +8643,7 @@
             <a:r>
               <a:rPr lang="en-US" sz="1000" dirty="0">
                 <a:solidFill>
-                  <a:srgbClr val="5A6B7C"/>
+                  <a:srgbClr val="3D5163"/>
                 </a:solidFill>
                 <a:latin typeface="Calibri" pitchFamily="34" charset="0"/>
                 <a:ea typeface="Calibri" pitchFamily="34" charset="-122"/>
@@ -8663,8 +8663,8 @@
         </p:nvSpPr>
         <p:spPr>
           <a:xfrm>
-            <a:off x="7589520" y="4800600"/>
-            <a:ext cx="1097280" cy="256032"/>
+            <a:off x="7589520" y="4773168"/>
+            <a:ext cx="1097280" cy="237744"/>
           </a:xfrm>
           <a:prstGeom prst="rect">
             <a:avLst/>
@@ -8682,7 +8682,7 @@
             <a:r>
               <a:rPr lang="en-US" sz="1000" dirty="0">
                 <a:solidFill>
-                  <a:srgbClr val="5A6B7C"/>
+                  <a:srgbClr val="3D5163"/>
                 </a:solidFill>
                 <a:latin typeface="Calibri" pitchFamily="34" charset="0"/>
                 <a:ea typeface="Calibri" pitchFamily="34" charset="-122"/>
@@ -8767,12 +8767,12 @@
         </p:nvSpPr>
         <p:spPr>
           <a:xfrm>
-            <a:off x="457200" y="256032"/>
-            <a:ext cx="2377440" cy="292608"/>
+            <a:off x="457200" y="292608"/>
+            <a:ext cx="2468880" cy="274320"/>
           </a:xfrm>
           <a:prstGeom prst="roundRect">
             <a:avLst>
-              <a:gd name="adj" fmla="val 18750"/>
+              <a:gd name="adj" fmla="val 20000"/>
             </a:avLst>
           </a:prstGeom>
           <a:solidFill>
@@ -8789,8 +8789,8 @@
         </p:nvSpPr>
         <p:spPr>
           <a:xfrm>
-            <a:off x="457200" y="256032"/>
-            <a:ext cx="2377440" cy="292608"/>
+            <a:off x="457200" y="292608"/>
+            <a:ext cx="2468880" cy="274320"/>
           </a:xfrm>
           <a:prstGeom prst="rect">
             <a:avLst/>
@@ -8828,24 +8828,24 @@
         </p:nvSpPr>
         <p:spPr>
           <a:xfrm>
-            <a:off x="457200" y="640080"/>
-            <a:ext cx="8229600" cy="411480"/>
-          </a:xfrm>
-          <a:prstGeom prst="rect">
-            <a:avLst/>
-          </a:prstGeom>
-          <a:noFill/>
-          <a:ln/>
-        </p:spPr>
-        <p:txBody>
-          <a:bodyPr wrap="square" lIns="0" tIns="0" rIns="0" bIns="0" rtlCol="0" anchor="ctr"/>
-          <a:lstStyle/>
-          <a:p>
-            <a:pPr indent="0" marL="0">
-              <a:buNone/>
-            </a:pPr>
-            <a:r>
-              <a:rPr lang="en-US" sz="3200" b="1" dirty="0">
+            <a:off x="457200" y="658368"/>
+            <a:ext cx="8229600" cy="365760"/>
+          </a:xfrm>
+          <a:prstGeom prst="rect">
+            <a:avLst/>
+          </a:prstGeom>
+          <a:noFill/>
+          <a:ln/>
+        </p:spPr>
+        <p:txBody>
+          <a:bodyPr wrap="square" lIns="0" tIns="0" rIns="0" bIns="0" rtlCol="0" anchor="ctr"/>
+          <a:lstStyle/>
+          <a:p>
+            <a:pPr indent="0" marL="0">
+              <a:buNone/>
+            </a:pPr>
+            <a:r>
+              <a:rPr lang="en-US" sz="3000" b="1" dirty="0">
                 <a:solidFill>
                   <a:srgbClr val="1A2B3C"/>
                 </a:solidFill>
@@ -8855,7 +8855,7 @@
               </a:rPr>
               <a:t>未完成项、风险与阻塞</a:t>
             </a:r>
-            <a:endParaRPr lang="en-US" sz="3200" dirty="0"/>
+            <a:endParaRPr lang="en-US" sz="3000" dirty="0"/>
           </a:p>
         </p:txBody>
       </p:sp>
@@ -8867,12 +8867,12 @@
         </p:nvSpPr>
         <p:spPr>
           <a:xfrm>
-            <a:off x="457200" y="1143000"/>
-            <a:ext cx="8229600" cy="365760"/>
+            <a:off x="457200" y="1097280"/>
+            <a:ext cx="8229600" cy="347472"/>
           </a:xfrm>
           <a:prstGeom prst="roundRect">
             <a:avLst>
-              <a:gd name="adj" fmla="val 15000"/>
+              <a:gd name="adj" fmla="val 15789"/>
             </a:avLst>
           </a:prstGeom>
           <a:solidFill>
@@ -8889,8 +8889,8 @@
         </p:nvSpPr>
         <p:spPr>
           <a:xfrm>
-            <a:off x="548640" y="1143000"/>
-            <a:ext cx="822960" cy="365760"/>
+            <a:off x="548640" y="1097280"/>
+            <a:ext cx="822960" cy="347472"/>
           </a:xfrm>
           <a:prstGeom prst="rect">
             <a:avLst/>
@@ -8928,8 +8928,8 @@
         </p:nvSpPr>
         <p:spPr>
           <a:xfrm>
-            <a:off x="1463040" y="1143000"/>
-            <a:ext cx="2011680" cy="365760"/>
+            <a:off x="1417320" y="1097280"/>
+            <a:ext cx="1828800" cy="347472"/>
           </a:xfrm>
           <a:prstGeom prst="rect">
             <a:avLst/>
@@ -8967,8 +8967,8 @@
         </p:nvSpPr>
         <p:spPr>
           <a:xfrm>
-            <a:off x="3657600" y="1143000"/>
-            <a:ext cx="2377440" cy="365760"/>
+            <a:off x="3383280" y="1097280"/>
+            <a:ext cx="2651760" cy="347472"/>
           </a:xfrm>
           <a:prstGeom prst="rect">
             <a:avLst/>
@@ -9006,8 +9006,8 @@
         </p:nvSpPr>
         <p:spPr>
           <a:xfrm>
-            <a:off x="6217920" y="1143000"/>
-            <a:ext cx="2286000" cy="365760"/>
+            <a:off x="6126480" y="1097280"/>
+            <a:ext cx="2377440" cy="347472"/>
           </a:xfrm>
           <a:prstGeom prst="rect">
             <a:avLst/>
@@ -9045,12 +9045,12 @@
         </p:nvSpPr>
         <p:spPr>
           <a:xfrm>
-            <a:off x="457200" y="1600200"/>
-            <a:ext cx="8229600" cy="530352"/>
+            <a:off x="457200" y="1536192"/>
+            <a:ext cx="8229600" cy="512064"/>
           </a:xfrm>
           <a:prstGeom prst="roundRect">
             <a:avLst>
-              <a:gd name="adj" fmla="val 8621"/>
+              <a:gd name="adj" fmla="val 8929"/>
             </a:avLst>
           </a:prstGeom>
           <a:solidFill>
@@ -9067,7 +9067,7 @@
         </p:nvSpPr>
         <p:spPr>
           <a:xfrm>
-            <a:off x="594360" y="1728216"/>
+            <a:off x="594360" y="1655064"/>
             <a:ext cx="502920" cy="274320"/>
           </a:xfrm>
           <a:prstGeom prst="roundRect">
@@ -9089,7 +9089,7 @@
         </p:nvSpPr>
         <p:spPr>
           <a:xfrm>
-            <a:off x="594360" y="1728216"/>
+            <a:off x="594360" y="1655064"/>
             <a:ext cx="502920" cy="274320"/>
           </a:xfrm>
           <a:prstGeom prst="rect">
@@ -9128,8 +9128,8 @@
         </p:nvSpPr>
         <p:spPr>
           <a:xfrm>
-            <a:off x="1463040" y="1600200"/>
-            <a:ext cx="2011680" cy="530352"/>
+            <a:off x="1417320" y="1536192"/>
+            <a:ext cx="1828800" cy="512064"/>
           </a:xfrm>
           <a:prstGeom prst="rect">
             <a:avLst/>
@@ -9167,8 +9167,8 @@
         </p:nvSpPr>
         <p:spPr>
           <a:xfrm>
-            <a:off x="3657600" y="1600200"/>
-            <a:ext cx="2377440" cy="530352"/>
+            <a:off x="3383280" y="1536192"/>
+            <a:ext cx="2651760" cy="512064"/>
           </a:xfrm>
           <a:prstGeom prst="rect">
             <a:avLst/>
@@ -9186,13 +9186,13 @@
             <a:r>
               <a:rPr lang="en-US" sz="1200" dirty="0">
                 <a:solidFill>
-                  <a:srgbClr val="5A6B7C"/>
-                </a:solidFill>
-                <a:latin typeface="Calibri" pitchFamily="34" charset="0"/>
-                <a:ea typeface="Calibri" pitchFamily="34" charset="-122"/>
-                <a:cs typeface="Calibri" pitchFamily="34" charset="-120"/>
-              </a:rPr>
-              <a:t>未发现 GitHub Actions 等 CI 配置</a:t>
+                  <a:srgbClr val="3D5163"/>
+                </a:solidFill>
+                <a:latin typeface="Calibri" pitchFamily="34" charset="0"/>
+                <a:ea typeface="Calibri" pitchFamily="34" charset="-122"/>
+                <a:cs typeface="Calibri" pitchFamily="34" charset="-120"/>
+              </a:rPr>
+              <a:t>未发现 GitHub Actions 配置</a:t>
             </a:r>
             <a:endParaRPr lang="en-US" sz="1200" dirty="0"/>
           </a:p>
@@ -9206,8 +9206,8 @@
         </p:nvSpPr>
         <p:spPr>
           <a:xfrm>
-            <a:off x="6217920" y="1600200"/>
-            <a:ext cx="2286000" cy="530352"/>
+            <a:off x="6126480" y="1536192"/>
+            <a:ext cx="2377440" cy="512064"/>
           </a:xfrm>
           <a:prstGeom prst="rect">
             <a:avLst/>
@@ -9225,13 +9225,13 @@
             <a:r>
               <a:rPr lang="en-US" sz="1200" dirty="0">
                 <a:solidFill>
-                  <a:srgbClr val="5A6B7C"/>
-                </a:solidFill>
-                <a:latin typeface="Calibri" pitchFamily="34" charset="0"/>
-                <a:ea typeface="Calibri" pitchFamily="34" charset="-122"/>
-                <a:cs typeface="Calibri" pitchFamily="34" charset="-120"/>
-              </a:rPr>
-              <a:t>提交无法自动构建、测试和阻断回归</a:t>
+                  <a:srgbClr val="3D5163"/>
+                </a:solidFill>
+                <a:latin typeface="Calibri" pitchFamily="34" charset="0"/>
+                <a:ea typeface="Calibri" pitchFamily="34" charset="-122"/>
+                <a:cs typeface="Calibri" pitchFamily="34" charset="-120"/>
+              </a:rPr>
+              <a:t>无法自动构建测试与阻断回归</a:t>
             </a:r>
             <a:endParaRPr lang="en-US" sz="1200" dirty="0"/>
           </a:p>
@@ -9245,12 +9245,12 @@
         </p:nvSpPr>
         <p:spPr>
           <a:xfrm>
-            <a:off x="457200" y="2194560"/>
-            <a:ext cx="8229600" cy="530352"/>
+            <a:off x="457200" y="2103120"/>
+            <a:ext cx="8229600" cy="512064"/>
           </a:xfrm>
           <a:prstGeom prst="roundRect">
             <a:avLst>
-              <a:gd name="adj" fmla="val 8621"/>
+              <a:gd name="adj" fmla="val 8929"/>
             </a:avLst>
           </a:prstGeom>
           <a:solidFill>
@@ -9267,7 +9267,7 @@
         </p:nvSpPr>
         <p:spPr>
           <a:xfrm>
-            <a:off x="594360" y="2322576"/>
+            <a:off x="594360" y="2221992"/>
             <a:ext cx="502920" cy="274320"/>
           </a:xfrm>
           <a:prstGeom prst="roundRect">
@@ -9289,7 +9289,7 @@
         </p:nvSpPr>
         <p:spPr>
           <a:xfrm>
-            <a:off x="594360" y="2322576"/>
+            <a:off x="594360" y="2221992"/>
             <a:ext cx="502920" cy="274320"/>
           </a:xfrm>
           <a:prstGeom prst="rect">
@@ -9328,8 +9328,8 @@
         </p:nvSpPr>
         <p:spPr>
           <a:xfrm>
-            <a:off x="1463040" y="2194560"/>
-            <a:ext cx="2011680" cy="530352"/>
+            <a:off x="1417320" y="2103120"/>
+            <a:ext cx="1828800" cy="512064"/>
           </a:xfrm>
           <a:prstGeom prst="rect">
             <a:avLst/>
@@ -9367,8 +9367,8 @@
         </p:nvSpPr>
         <p:spPr>
           <a:xfrm>
-            <a:off x="3657600" y="2194560"/>
-            <a:ext cx="2377440" cy="530352"/>
+            <a:off x="3383280" y="2103120"/>
+            <a:ext cx="2651760" cy="512064"/>
           </a:xfrm>
           <a:prstGeom prst="rect">
             <a:avLst/>
@@ -9386,13 +9386,13 @@
             <a:r>
               <a:rPr lang="en-US" sz="1200" dirty="0">
                 <a:solidFill>
-                  <a:srgbClr val="5A6B7C"/>
-                </a:solidFill>
-                <a:latin typeface="Calibri" pitchFamily="34" charset="0"/>
-                <a:ea typeface="Calibri" pitchFamily="34" charset="-122"/>
-                <a:cs typeface="Calibri" pitchFamily="34" charset="-120"/>
-              </a:rPr>
-              <a:t>模型 API、MySQL / Redis / Nacos、COS 与浏览器</a:t>
+                  <a:srgbClr val="3D5163"/>
+                </a:solidFill>
+                <a:latin typeface="Calibri" pitchFamily="34" charset="0"/>
+                <a:ea typeface="Calibri" pitchFamily="34" charset="-122"/>
+                <a:cs typeface="Calibri" pitchFamily="34" charset="-120"/>
+              </a:rPr>
+              <a:t>依赖模型 API、MySQL、Redis、Nacos</a:t>
             </a:r>
             <a:endParaRPr lang="en-US" sz="1200" dirty="0"/>
           </a:p>
@@ -9406,8 +9406,8 @@
         </p:nvSpPr>
         <p:spPr>
           <a:xfrm>
-            <a:off x="6217920" y="2194560"/>
-            <a:ext cx="2286000" cy="530352"/>
+            <a:off x="6126480" y="2103120"/>
+            <a:ext cx="2377440" cy="512064"/>
           </a:xfrm>
           <a:prstGeom prst="rect">
             <a:avLst/>
@@ -9425,13 +9425,13 @@
             <a:r>
               <a:rPr lang="en-US" sz="1200" dirty="0">
                 <a:solidFill>
-                  <a:srgbClr val="5A6B7C"/>
-                </a:solidFill>
-                <a:latin typeface="Calibri" pitchFamily="34" charset="0"/>
-                <a:ea typeface="Calibri" pitchFamily="34" charset="-122"/>
-                <a:cs typeface="Calibri" pitchFamily="34" charset="-120"/>
-              </a:rPr>
-              <a:t>本地与集成测试易受外部服务影响</a:t>
+                  <a:srgbClr val="3D5163"/>
+                </a:solidFill>
+                <a:latin typeface="Calibri" pitchFamily="34" charset="0"/>
+                <a:ea typeface="Calibri" pitchFamily="34" charset="-122"/>
+                <a:cs typeface="Calibri" pitchFamily="34" charset="-120"/>
+              </a:rPr>
+              <a:t>本地与集成测试受外部服务影响</a:t>
             </a:r>
             <a:endParaRPr lang="en-US" sz="1200" dirty="0"/>
           </a:p>
@@ -9445,12 +9445,12 @@
         </p:nvSpPr>
         <p:spPr>
           <a:xfrm>
-            <a:off x="457200" y="2788920"/>
-            <a:ext cx="8229600" cy="530352"/>
+            <a:off x="457200" y="2670048"/>
+            <a:ext cx="8229600" cy="512064"/>
           </a:xfrm>
           <a:prstGeom prst="roundRect">
             <a:avLst>
-              <a:gd name="adj" fmla="val 8621"/>
+              <a:gd name="adj" fmla="val 8929"/>
             </a:avLst>
           </a:prstGeom>
           <a:solidFill>
@@ -9467,7 +9467,7 @@
         </p:nvSpPr>
         <p:spPr>
           <a:xfrm>
-            <a:off x="594360" y="2916936"/>
+            <a:off x="594360" y="2788920"/>
             <a:ext cx="502920" cy="274320"/>
           </a:xfrm>
           <a:prstGeom prst="roundRect">
@@ -9489,7 +9489,7 @@
         </p:nvSpPr>
         <p:spPr>
           <a:xfrm>
-            <a:off x="594360" y="2916936"/>
+            <a:off x="594360" y="2788920"/>
             <a:ext cx="502920" cy="274320"/>
           </a:xfrm>
           <a:prstGeom prst="rect">
@@ -9528,8 +9528,8 @@
         </p:nvSpPr>
         <p:spPr>
           <a:xfrm>
-            <a:off x="1463040" y="2788920"/>
-            <a:ext cx="2011680" cy="530352"/>
+            <a:off x="1417320" y="2670048"/>
+            <a:ext cx="1828800" cy="512064"/>
           </a:xfrm>
           <a:prstGeom prst="rect">
             <a:avLst/>
@@ -9567,8 +9567,8 @@
         </p:nvSpPr>
         <p:spPr>
           <a:xfrm>
-            <a:off x="3657600" y="2788920"/>
-            <a:ext cx="2377440" cy="530352"/>
+            <a:off x="3383280" y="2670048"/>
+            <a:ext cx="2651760" cy="512064"/>
           </a:xfrm>
           <a:prstGeom prst="rect">
             <a:avLst/>
@@ -9586,7 +9586,7 @@
             <a:r>
               <a:rPr lang="en-US" sz="1200" dirty="0">
                 <a:solidFill>
-                  <a:srgbClr val="5A6B7C"/>
+                  <a:srgbClr val="3D5163"/>
                 </a:solidFill>
                 <a:latin typeface="Calibri" pitchFamily="34" charset="0"/>
                 <a:ea typeface="Calibri" pitchFamily="34" charset="-122"/>
@@ -9606,8 +9606,8 @@
         </p:nvSpPr>
         <p:spPr>
           <a:xfrm>
-            <a:off x="6217920" y="2788920"/>
-            <a:ext cx="2286000" cy="530352"/>
+            <a:off x="6126480" y="2670048"/>
+            <a:ext cx="2377440" cy="512064"/>
           </a:xfrm>
           <a:prstGeom prst="rect">
             <a:avLst/>
@@ -9625,13 +9625,13 @@
             <a:r>
               <a:rPr lang="en-US" sz="1200" dirty="0">
                 <a:solidFill>
-                  <a:srgbClr val="5A6B7C"/>
-                </a:solidFill>
-                <a:latin typeface="Calibri" pitchFamily="34" charset="0"/>
-                <a:ea typeface="Calibri" pitchFamily="34" charset="-122"/>
-                <a:cs typeface="Calibri" pitchFamily="34" charset="-120"/>
-              </a:rPr>
-              <a:t>修复需双线同步，存在实现漂移风险</a:t>
+                  <a:srgbClr val="3D5163"/>
+                </a:solidFill>
+                <a:latin typeface="Calibri" pitchFamily="34" charset="0"/>
+                <a:ea typeface="Calibri" pitchFamily="34" charset="-122"/>
+                <a:cs typeface="Calibri" pitchFamily="34" charset="-120"/>
+              </a:rPr>
+              <a:t>修复需双线同步，易出现漂移</a:t>
             </a:r>
             <a:endParaRPr lang="en-US" sz="1200" dirty="0"/>
           </a:p>
@@ -9645,12 +9645,12 @@
         </p:nvSpPr>
         <p:spPr>
           <a:xfrm>
-            <a:off x="457200" y="3383280"/>
-            <a:ext cx="8229600" cy="530352"/>
+            <a:off x="457200" y="3236976"/>
+            <a:ext cx="8229600" cy="512064"/>
           </a:xfrm>
           <a:prstGeom prst="roundRect">
             <a:avLst>
-              <a:gd name="adj" fmla="val 8621"/>
+              <a:gd name="adj" fmla="val 8929"/>
             </a:avLst>
           </a:prstGeom>
           <a:solidFill>
@@ -9667,7 +9667,7 @@
         </p:nvSpPr>
         <p:spPr>
           <a:xfrm>
-            <a:off x="594360" y="3511296"/>
+            <a:off x="594360" y="3355848"/>
             <a:ext cx="502920" cy="274320"/>
           </a:xfrm>
           <a:prstGeom prst="roundRect">
@@ -9689,7 +9689,7 @@
         </p:nvSpPr>
         <p:spPr>
           <a:xfrm>
-            <a:off x="594360" y="3511296"/>
+            <a:off x="594360" y="3355848"/>
             <a:ext cx="502920" cy="274320"/>
           </a:xfrm>
           <a:prstGeom prst="rect">
@@ -9728,8 +9728,8 @@
         </p:nvSpPr>
         <p:spPr>
           <a:xfrm>
-            <a:off x="1463040" y="3383280"/>
-            <a:ext cx="2011680" cy="530352"/>
+            <a:off x="1417320" y="3236976"/>
+            <a:ext cx="1828800" cy="512064"/>
           </a:xfrm>
           <a:prstGeom prst="rect">
             <a:avLst/>
@@ -9767,8 +9767,8 @@
         </p:nvSpPr>
         <p:spPr>
           <a:xfrm>
-            <a:off x="3657600" y="3383280"/>
-            <a:ext cx="2377440" cy="530352"/>
+            <a:off x="3383280" y="3236976"/>
+            <a:ext cx="2651760" cy="512064"/>
           </a:xfrm>
           <a:prstGeom prst="rect">
             <a:avLst/>
@@ -9786,13 +9786,13 @@
             <a:r>
               <a:rPr lang="en-US" sz="1200" dirty="0">
                 <a:solidFill>
-                  <a:srgbClr val="5A6B7C"/>
-                </a:solidFill>
-                <a:latin typeface="Calibri" pitchFamily="34" charset="0"/>
-                <a:ea typeface="Calibri" pitchFamily="34" charset="-122"/>
-                <a:cs typeface="Calibri" pitchFamily="34" charset="-120"/>
-              </a:rPr>
-              <a:t>Issue #5：reasoning_content 字段缺失</a:t>
+                  <a:srgbClr val="3D5163"/>
+                </a:solidFill>
+                <a:latin typeface="Calibri" pitchFamily="34" charset="0"/>
+                <a:ea typeface="Calibri" pitchFamily="34" charset="-122"/>
+                <a:cs typeface="Calibri" pitchFamily="34" charset="-120"/>
+              </a:rPr>
+              <a:t>Issue #5：reasoning_content 缺失</a:t>
             </a:r>
             <a:endParaRPr lang="en-US" sz="1200" dirty="0"/>
           </a:p>
@@ -9806,8 +9806,8 @@
         </p:nvSpPr>
         <p:spPr>
           <a:xfrm>
-            <a:off x="6217920" y="3383280"/>
-            <a:ext cx="2286000" cy="530352"/>
+            <a:off x="6126480" y="3236976"/>
+            <a:ext cx="2377440" cy="512064"/>
           </a:xfrm>
           <a:prstGeom prst="rect">
             <a:avLst/>
@@ -9825,13 +9825,13 @@
             <a:r>
               <a:rPr lang="en-US" sz="1200" dirty="0">
                 <a:solidFill>
-                  <a:srgbClr val="5A6B7C"/>
-                </a:solidFill>
-                <a:latin typeface="Calibri" pitchFamily="34" charset="0"/>
-                <a:ea typeface="Calibri" pitchFamily="34" charset="-122"/>
-                <a:cs typeface="Calibri" pitchFamily="34" charset="-120"/>
-              </a:rPr>
-              <a:t>DeepSeek 等思考模型生成 Vue 项目失败</a:t>
+                  <a:srgbClr val="3D5163"/>
+                </a:solidFill>
+                <a:latin typeface="Calibri" pitchFamily="34" charset="0"/>
+                <a:ea typeface="Calibri" pitchFamily="34" charset="-122"/>
+                <a:cs typeface="Calibri" pitchFamily="34" charset="-120"/>
+              </a:rPr>
+              <a:t>DeepSeek 思考模式生成 Vue 失败</a:t>
             </a:r>
             <a:endParaRPr lang="en-US" sz="1200" dirty="0"/>
           </a:p>
@@ -9845,8 +9845,8 @@
         </p:nvSpPr>
         <p:spPr>
           <a:xfrm>
-            <a:off x="457200" y="4114800"/>
-            <a:ext cx="8229600" cy="365760"/>
+            <a:off x="457200" y="3977640"/>
+            <a:ext cx="8229600" cy="502920"/>
           </a:xfrm>
           <a:prstGeom prst="rect">
             <a:avLst/>
@@ -9870,7 +9870,7 @@
                 <a:ea typeface="Calibri" pitchFamily="34" charset="-122"/>
                 <a:cs typeface="Calibri" pitchFamily="34" charset="-120"/>
               </a:rPr>
-              <a:t>当前没有明确的权限或依赖安装阻塞；主要阻塞是缺少可复现、自动化的验证环境，以及已知模型兼容问题未合入修复。</a:t>
+              <a:t>当前无权限或依赖安装阻塞；主要阻塞是缺少可复现的自动化验证环境，以及已知模型兼容问题未合入修复。</a:t>
             </a:r>
             <a:endParaRPr lang="en-US" sz="1300" dirty="0"/>
           </a:p>
@@ -9884,8 +9884,8 @@
         </p:nvSpPr>
         <p:spPr>
           <a:xfrm>
-            <a:off x="457200" y="4800600"/>
-            <a:ext cx="6583680" cy="256032"/>
+            <a:off x="457200" y="4773168"/>
+            <a:ext cx="6583680" cy="237744"/>
           </a:xfrm>
           <a:prstGeom prst="rect">
             <a:avLst/>
@@ -9903,7 +9903,7 @@
             <a:r>
               <a:rPr lang="en-US" sz="1000" dirty="0">
                 <a:solidFill>
-                  <a:srgbClr val="5A6B7C"/>
+                  <a:srgbClr val="3D5163"/>
                 </a:solidFill>
                 <a:latin typeface="Calibri" pitchFamily="34" charset="0"/>
                 <a:ea typeface="Calibri" pitchFamily="34" charset="-122"/>
@@ -9923,8 +9923,8 @@
         </p:nvSpPr>
         <p:spPr>
           <a:xfrm>
-            <a:off x="7589520" y="4800600"/>
-            <a:ext cx="1097280" cy="256032"/>
+            <a:off x="7589520" y="4773168"/>
+            <a:ext cx="1097280" cy="237744"/>
           </a:xfrm>
           <a:prstGeom prst="rect">
             <a:avLst/>
@@ -9942,7 +9942,7 @@
             <a:r>
               <a:rPr lang="en-US" sz="1000" dirty="0">
                 <a:solidFill>
-                  <a:srgbClr val="5A6B7C"/>
+                  <a:srgbClr val="3D5163"/>
                 </a:solidFill>
                 <a:latin typeface="Calibri" pitchFamily="34" charset="0"/>
                 <a:ea typeface="Calibri" pitchFamily="34" charset="-122"/>
@@ -10027,12 +10027,12 @@
         </p:nvSpPr>
         <p:spPr>
           <a:xfrm>
-            <a:off x="457200" y="256032"/>
-            <a:ext cx="2377440" cy="292608"/>
+            <a:off x="457200" y="292608"/>
+            <a:ext cx="2468880" cy="274320"/>
           </a:xfrm>
           <a:prstGeom prst="roundRect">
             <a:avLst>
-              <a:gd name="adj" fmla="val 18750"/>
+              <a:gd name="adj" fmla="val 20000"/>
             </a:avLst>
           </a:prstGeom>
           <a:solidFill>
@@ -10049,8 +10049,8 @@
         </p:nvSpPr>
         <p:spPr>
           <a:xfrm>
-            <a:off x="457200" y="256032"/>
-            <a:ext cx="2377440" cy="292608"/>
+            <a:off x="457200" y="292608"/>
+            <a:ext cx="2468880" cy="274320"/>
           </a:xfrm>
           <a:prstGeom prst="rect">
             <a:avLst/>
@@ -10088,24 +10088,24 @@
         </p:nvSpPr>
         <p:spPr>
           <a:xfrm>
-            <a:off x="457200" y="640080"/>
-            <a:ext cx="8229600" cy="411480"/>
-          </a:xfrm>
-          <a:prstGeom prst="rect">
-            <a:avLst/>
-          </a:prstGeom>
-          <a:noFill/>
-          <a:ln/>
-        </p:spPr>
-        <p:txBody>
-          <a:bodyPr wrap="square" lIns="0" tIns="0" rIns="0" bIns="0" rtlCol="0" anchor="ctr"/>
-          <a:lstStyle/>
-          <a:p>
-            <a:pPr indent="0" marL="0">
-              <a:buNone/>
-            </a:pPr>
-            <a:r>
-              <a:rPr lang="en-US" sz="3200" b="1" dirty="0">
+            <a:off x="457200" y="658368"/>
+            <a:ext cx="8229600" cy="365760"/>
+          </a:xfrm>
+          <a:prstGeom prst="rect">
+            <a:avLst/>
+          </a:prstGeom>
+          <a:noFill/>
+          <a:ln/>
+        </p:spPr>
+        <p:txBody>
+          <a:bodyPr wrap="square" lIns="0" tIns="0" rIns="0" bIns="0" rtlCol="0" anchor="ctr"/>
+          <a:lstStyle/>
+          <a:p>
+            <a:pPr indent="0" marL="0">
+              <a:buNone/>
+            </a:pPr>
+            <a:r>
+              <a:rPr lang="en-US" sz="3000" b="1" dirty="0">
                 <a:solidFill>
                   <a:srgbClr val="1A2B3C"/>
                 </a:solidFill>
@@ -10115,7 +10115,7 @@
               </a:rPr>
               <a:t>测试与可运维性现状</a:t>
             </a:r>
-            <a:endParaRPr lang="en-US" sz="3200" dirty="0"/>
+            <a:endParaRPr lang="en-US" sz="3000" dirty="0"/>
           </a:p>
         </p:txBody>
       </p:sp>
@@ -10127,12 +10127,12 @@
         </p:nvSpPr>
         <p:spPr>
           <a:xfrm>
-            <a:off x="457200" y="1234440"/>
-            <a:ext cx="2743200" cy="2880360"/>
+            <a:off x="457200" y="1143000"/>
+            <a:ext cx="2651760" cy="2880360"/>
           </a:xfrm>
           <a:prstGeom prst="roundRect">
             <a:avLst>
-              <a:gd name="adj" fmla="val 3333"/>
+              <a:gd name="adj" fmla="val 3448"/>
             </a:avLst>
           </a:prstGeom>
           <a:solidFill>
@@ -10140,7 +10140,7 @@
           </a:solidFill>
           <a:ln/>
           <a:effectLst>
-            <a:outerShdw sx="100000" sy="100000" kx="0" ky="0" algn="bl" rotWithShape="0" blurRad="101600" dist="25400" dir="8100000">
+            <a:outerShdw sx="100000" sy="100000" kx="0" ky="0" algn="bl" rotWithShape="0" blurRad="76200" dist="12700" dir="8100000">
               <a:srgbClr val="000000">
                 <a:alpha val="8000"/>
               </a:srgbClr>
@@ -10156,7 +10156,7 @@
         </p:nvSpPr>
         <p:spPr>
           <a:xfrm>
-            <a:off x="685800" y="1463040"/>
+            <a:off x="658368" y="1371600"/>
             <a:ext cx="384048" cy="384048"/>
           </a:xfrm>
           <a:prstGeom prst="ellipse">
@@ -10176,7 +10176,7 @@
         </p:nvSpPr>
         <p:spPr>
           <a:xfrm>
-            <a:off x="685800" y="1463040"/>
+            <a:off x="658368" y="1371600"/>
             <a:ext cx="384048" cy="384048"/>
           </a:xfrm>
           <a:prstGeom prst="rect">
@@ -10215,24 +10215,24 @@
         </p:nvSpPr>
         <p:spPr>
           <a:xfrm>
-            <a:off x="1188720" y="1490472"/>
-            <a:ext cx="1828800" cy="320040"/>
-          </a:xfrm>
-          <a:prstGeom prst="rect">
-            <a:avLst/>
-          </a:prstGeom>
-          <a:noFill/>
-          <a:ln/>
-        </p:spPr>
-        <p:txBody>
-          <a:bodyPr wrap="square" lIns="0" tIns="0" rIns="0" bIns="0" rtlCol="0" anchor="ctr"/>
-          <a:lstStyle/>
-          <a:p>
-            <a:pPr indent="0" marL="0">
-              <a:buNone/>
-            </a:pPr>
-            <a:r>
-              <a:rPr lang="en-US" sz="1800" b="1" dirty="0">
+            <a:off x="1170432" y="1417320"/>
+            <a:ext cx="1737360" cy="320040"/>
+          </a:xfrm>
+          <a:prstGeom prst="rect">
+            <a:avLst/>
+          </a:prstGeom>
+          <a:noFill/>
+          <a:ln/>
+        </p:spPr>
+        <p:txBody>
+          <a:bodyPr wrap="square" lIns="0" tIns="0" rIns="0" bIns="0" rtlCol="0" anchor="ctr"/>
+          <a:lstStyle/>
+          <a:p>
+            <a:pPr indent="0" marL="0">
+              <a:buNone/>
+            </a:pPr>
+            <a:r>
+              <a:rPr lang="en-US" sz="1700" b="1" dirty="0">
                 <a:solidFill>
                   <a:srgbClr val="1A2B3C"/>
                 </a:solidFill>
@@ -10242,7 +10242,7 @@
               </a:rPr>
               <a:t>测试基础</a:t>
             </a:r>
-            <a:endParaRPr lang="en-US" sz="1800" dirty="0"/>
+            <a:endParaRPr lang="en-US" sz="1700" dirty="0"/>
           </a:p>
         </p:txBody>
       </p:sp>
@@ -10254,8 +10254,8 @@
         </p:nvSpPr>
         <p:spPr>
           <a:xfrm>
-            <a:off x="685800" y="2011680"/>
-            <a:ext cx="2286000" cy="274320"/>
+            <a:off x="658368" y="1920240"/>
+            <a:ext cx="2240280" cy="274320"/>
           </a:xfrm>
           <a:prstGeom prst="rect">
             <a:avLst/>
@@ -10293,24 +10293,24 @@
         </p:nvSpPr>
         <p:spPr>
           <a:xfrm>
-            <a:off x="685800" y="2468880"/>
-            <a:ext cx="2286000" cy="365760"/>
-          </a:xfrm>
-          <a:prstGeom prst="rect">
-            <a:avLst/>
-          </a:prstGeom>
-          <a:noFill/>
-          <a:ln/>
-        </p:spPr>
-        <p:txBody>
-          <a:bodyPr wrap="square" lIns="0" tIns="0" rIns="0" bIns="0" rtlCol="0" anchor="ctr"/>
-          <a:lstStyle/>
-          <a:p>
-            <a:pPr indent="0" marL="0">
-              <a:buNone/>
-            </a:pPr>
-            <a:r>
-              <a:rPr lang="en-US" sz="1300" dirty="0">
+            <a:off x="658368" y="2423160"/>
+            <a:ext cx="2240280" cy="365760"/>
+          </a:xfrm>
+          <a:prstGeom prst="rect">
+            <a:avLst/>
+          </a:prstGeom>
+          <a:noFill/>
+          <a:ln/>
+        </p:spPr>
+        <p:txBody>
+          <a:bodyPr wrap="square" lIns="0" tIns="0" rIns="0" bIns="0" rtlCol="0" anchor="ctr"/>
+          <a:lstStyle/>
+          <a:p>
+            <a:pPr indent="0" marL="0">
+              <a:buNone/>
+            </a:pPr>
+            <a:r>
+              <a:rPr lang="en-US" sz="1400" dirty="0">
                 <a:solidFill>
                   <a:srgbClr val="1A2B3C"/>
                 </a:solidFill>
@@ -10320,7 +10320,7 @@
               </a:rPr>
               <a:t>15 个后端测试类</a:t>
             </a:r>
-            <a:endParaRPr lang="en-US" sz="1300" dirty="0"/>
+            <a:endParaRPr lang="en-US" sz="1400" dirty="0"/>
           </a:p>
         </p:txBody>
       </p:sp>
@@ -10332,24 +10332,24 @@
         </p:nvSpPr>
         <p:spPr>
           <a:xfrm>
-            <a:off x="685800" y="2880360"/>
-            <a:ext cx="2286000" cy="365760"/>
-          </a:xfrm>
-          <a:prstGeom prst="rect">
-            <a:avLst/>
-          </a:prstGeom>
-          <a:noFill/>
-          <a:ln/>
-        </p:spPr>
-        <p:txBody>
-          <a:bodyPr wrap="square" lIns="0" tIns="0" rIns="0" bIns="0" rtlCol="0" anchor="ctr"/>
-          <a:lstStyle/>
-          <a:p>
-            <a:pPr indent="0" marL="0">
-              <a:buNone/>
-            </a:pPr>
-            <a:r>
-              <a:rPr lang="en-US" sz="1300" dirty="0">
+            <a:off x="658368" y="2834640"/>
+            <a:ext cx="2240280" cy="365760"/>
+          </a:xfrm>
+          <a:prstGeom prst="rect">
+            <a:avLst/>
+          </a:prstGeom>
+          <a:noFill/>
+          <a:ln/>
+        </p:spPr>
+        <p:txBody>
+          <a:bodyPr wrap="square" lIns="0" tIns="0" rIns="0" bIns="0" rtlCol="0" anchor="ctr"/>
+          <a:lstStyle/>
+          <a:p>
+            <a:pPr indent="0" marL="0">
+              <a:buNone/>
+            </a:pPr>
+            <a:r>
+              <a:rPr lang="en-US" sz="1400" dirty="0">
                 <a:solidFill>
                   <a:srgbClr val="1A2B3C"/>
                 </a:solidFill>
@@ -10357,9 +10357,9 @@
                 <a:ea typeface="Calibri" pitchFamily="34" charset="-122"/>
                 <a:cs typeface="Calibri" pitchFamily="34" charset="-120"/>
               </a:rPr>
-              <a:t>覆盖解析、路由、工作流、截图</a:t>
-            </a:r>
-            <a:endParaRPr lang="en-US" sz="1300" dirty="0"/>
+              <a:t>覆盖解析、路由、工作流</a:t>
+            </a:r>
+            <a:endParaRPr lang="en-US" sz="1400" dirty="0"/>
           </a:p>
         </p:txBody>
       </p:sp>
@@ -10371,24 +10371,24 @@
         </p:nvSpPr>
         <p:spPr>
           <a:xfrm>
-            <a:off x="685800" y="3291840"/>
-            <a:ext cx="2286000" cy="365760"/>
-          </a:xfrm>
-          <a:prstGeom prst="rect">
-            <a:avLst/>
-          </a:prstGeom>
-          <a:noFill/>
-          <a:ln/>
-        </p:spPr>
-        <p:txBody>
-          <a:bodyPr wrap="square" lIns="0" tIns="0" rIns="0" bIns="0" rtlCol="0" anchor="ctr"/>
-          <a:lstStyle/>
-          <a:p>
-            <a:pPr indent="0" marL="0">
-              <a:buNone/>
-            </a:pPr>
-            <a:r>
-              <a:rPr lang="en-US" sz="1300" dirty="0">
+            <a:off x="658368" y="3246120"/>
+            <a:ext cx="2240280" cy="365760"/>
+          </a:xfrm>
+          <a:prstGeom prst="rect">
+            <a:avLst/>
+          </a:prstGeom>
+          <a:noFill/>
+          <a:ln/>
+        </p:spPr>
+        <p:txBody>
+          <a:bodyPr wrap="square" lIns="0" tIns="0" rIns="0" bIns="0" rtlCol="0" anchor="ctr"/>
+          <a:lstStyle/>
+          <a:p>
+            <a:pPr indent="0" marL="0">
+              <a:buNone/>
+            </a:pPr>
+            <a:r>
+              <a:rPr lang="en-US" sz="1400" dirty="0">
                 <a:solidFill>
                   <a:srgbClr val="1A2B3C"/>
                 </a:solidFill>
@@ -10396,9 +10396,9 @@
                 <a:ea typeface="Calibri" pitchFamily="34" charset="-122"/>
                 <a:cs typeface="Calibri" pitchFamily="34" charset="-120"/>
               </a:rPr>
-              <a:t>多数为 SpringBootTest，依赖外部环境</a:t>
-            </a:r>
-            <a:endParaRPr lang="en-US" sz="1300" dirty="0"/>
+              <a:t>多数依赖外部环境</a:t>
+            </a:r>
+            <a:endParaRPr lang="en-US" sz="1400" dirty="0"/>
           </a:p>
         </p:txBody>
       </p:sp>
@@ -10410,12 +10410,12 @@
         </p:nvSpPr>
         <p:spPr>
           <a:xfrm>
-            <a:off x="3337560" y="1234440"/>
-            <a:ext cx="2743200" cy="2880360"/>
+            <a:off x="3291840" y="1143000"/>
+            <a:ext cx="2651760" cy="2880360"/>
           </a:xfrm>
           <a:prstGeom prst="roundRect">
             <a:avLst>
-              <a:gd name="adj" fmla="val 3333"/>
+              <a:gd name="adj" fmla="val 3448"/>
             </a:avLst>
           </a:prstGeom>
           <a:solidFill>
@@ -10423,7 +10423,7 @@
           </a:solidFill>
           <a:ln/>
           <a:effectLst>
-            <a:outerShdw sx="100000" sy="100000" kx="0" ky="0" algn="bl" rotWithShape="0" blurRad="101600" dist="25400" dir="8100000">
+            <a:outerShdw sx="100000" sy="100000" kx="0" ky="0" algn="bl" rotWithShape="0" blurRad="76200" dist="12700" dir="8100000">
               <a:srgbClr val="000000">
                 <a:alpha val="8000"/>
               </a:srgbClr>
@@ -10439,7 +10439,7 @@
         </p:nvSpPr>
         <p:spPr>
           <a:xfrm>
-            <a:off x="3566160" y="1463040"/>
+            <a:off x="3493008" y="1371600"/>
             <a:ext cx="384048" cy="384048"/>
           </a:xfrm>
           <a:prstGeom prst="ellipse">
@@ -10459,7 +10459,7 @@
         </p:nvSpPr>
         <p:spPr>
           <a:xfrm>
-            <a:off x="3566160" y="1463040"/>
+            <a:off x="3493008" y="1371600"/>
             <a:ext cx="384048" cy="384048"/>
           </a:xfrm>
           <a:prstGeom prst="rect">
@@ -10498,24 +10498,24 @@
         </p:nvSpPr>
         <p:spPr>
           <a:xfrm>
-            <a:off x="4069080" y="1490472"/>
-            <a:ext cx="1828800" cy="320040"/>
-          </a:xfrm>
-          <a:prstGeom prst="rect">
-            <a:avLst/>
-          </a:prstGeom>
-          <a:noFill/>
-          <a:ln/>
-        </p:spPr>
-        <p:txBody>
-          <a:bodyPr wrap="square" lIns="0" tIns="0" rIns="0" bIns="0" rtlCol="0" anchor="ctr"/>
-          <a:lstStyle/>
-          <a:p>
-            <a:pPr indent="0" marL="0">
-              <a:buNone/>
-            </a:pPr>
-            <a:r>
-              <a:rPr lang="en-US" sz="1800" b="1" dirty="0">
+            <a:off x="4005072" y="1417320"/>
+            <a:ext cx="1737360" cy="320040"/>
+          </a:xfrm>
+          <a:prstGeom prst="rect">
+            <a:avLst/>
+          </a:prstGeom>
+          <a:noFill/>
+          <a:ln/>
+        </p:spPr>
+        <p:txBody>
+          <a:bodyPr wrap="square" lIns="0" tIns="0" rIns="0" bIns="0" rtlCol="0" anchor="ctr"/>
+          <a:lstStyle/>
+          <a:p>
+            <a:pPr indent="0" marL="0">
+              <a:buNone/>
+            </a:pPr>
+            <a:r>
+              <a:rPr lang="en-US" sz="1700" b="1" dirty="0">
                 <a:solidFill>
                   <a:srgbClr val="1A2B3C"/>
                 </a:solidFill>
@@ -10525,7 +10525,7 @@
               </a:rPr>
               <a:t>可观测性</a:t>
             </a:r>
-            <a:endParaRPr lang="en-US" sz="1800" dirty="0"/>
+            <a:endParaRPr lang="en-US" sz="1700" dirty="0"/>
           </a:p>
         </p:txBody>
       </p:sp>
@@ -10537,8 +10537,8 @@
         </p:nvSpPr>
         <p:spPr>
           <a:xfrm>
-            <a:off x="3566160" y="2011680"/>
-            <a:ext cx="2286000" cy="274320"/>
+            <a:off x="3493008" y="1920240"/>
+            <a:ext cx="2240280" cy="274320"/>
           </a:xfrm>
           <a:prstGeom prst="rect">
             <a:avLst/>
@@ -10576,24 +10576,24 @@
         </p:nvSpPr>
         <p:spPr>
           <a:xfrm>
-            <a:off x="3566160" y="2468880"/>
-            <a:ext cx="2286000" cy="365760"/>
-          </a:xfrm>
-          <a:prstGeom prst="rect">
-            <a:avLst/>
-          </a:prstGeom>
-          <a:noFill/>
-          <a:ln/>
-        </p:spPr>
-        <p:txBody>
-          <a:bodyPr wrap="square" lIns="0" tIns="0" rIns="0" bIns="0" rtlCol="0" anchor="ctr"/>
-          <a:lstStyle/>
-          <a:p>
-            <a:pPr indent="0" marL="0">
-              <a:buNone/>
-            </a:pPr>
-            <a:r>
-              <a:rPr lang="en-US" sz="1300" dirty="0">
+            <a:off x="3493008" y="2423160"/>
+            <a:ext cx="2240280" cy="365760"/>
+          </a:xfrm>
+          <a:prstGeom prst="rect">
+            <a:avLst/>
+          </a:prstGeom>
+          <a:noFill/>
+          <a:ln/>
+        </p:spPr>
+        <p:txBody>
+          <a:bodyPr wrap="square" lIns="0" tIns="0" rIns="0" bIns="0" rtlCol="0" anchor="ctr"/>
+          <a:lstStyle/>
+          <a:p>
+            <a:pPr indent="0" marL="0">
+              <a:buNone/>
+            </a:pPr>
+            <a:r>
+              <a:rPr lang="en-US" sz="1400" dirty="0">
                 <a:solidFill>
                   <a:srgbClr val="1A2B3C"/>
                 </a:solidFill>
@@ -10601,9 +10601,9 @@
                 <a:ea typeface="Calibri" pitchFamily="34" charset="-122"/>
                 <a:cs typeface="Calibri" pitchFamily="34" charset="-120"/>
               </a:rPr>
-              <a:t>Spring Actuator + Micrometer</a:t>
-            </a:r>
-            <a:endParaRPr lang="en-US" sz="1300" dirty="0"/>
+              <a:t>Actuator + Micrometer</a:t>
+            </a:r>
+            <a:endParaRPr lang="en-US" sz="1400" dirty="0"/>
           </a:p>
         </p:txBody>
       </p:sp>
@@ -10615,24 +10615,24 @@
         </p:nvSpPr>
         <p:spPr>
           <a:xfrm>
-            <a:off x="3566160" y="2880360"/>
-            <a:ext cx="2286000" cy="365760"/>
-          </a:xfrm>
-          <a:prstGeom prst="rect">
-            <a:avLst/>
-          </a:prstGeom>
-          <a:noFill/>
-          <a:ln/>
-        </p:spPr>
-        <p:txBody>
-          <a:bodyPr wrap="square" lIns="0" tIns="0" rIns="0" bIns="0" rtlCol="0" anchor="ctr"/>
-          <a:lstStyle/>
-          <a:p>
-            <a:pPr indent="0" marL="0">
-              <a:buNone/>
-            </a:pPr>
-            <a:r>
-              <a:rPr lang="en-US" sz="1300" dirty="0">
+            <a:off x="3493008" y="2834640"/>
+            <a:ext cx="2240280" cy="365760"/>
+          </a:xfrm>
+          <a:prstGeom prst="rect">
+            <a:avLst/>
+          </a:prstGeom>
+          <a:noFill/>
+          <a:ln/>
+        </p:spPr>
+        <p:txBody>
+          <a:bodyPr wrap="square" lIns="0" tIns="0" rIns="0" bIns="0" rtlCol="0" anchor="ctr"/>
+          <a:lstStyle/>
+          <a:p>
+            <a:pPr indent="0" marL="0">
+              <a:buNone/>
+            </a:pPr>
+            <a:r>
+              <a:rPr lang="en-US" sz="1400" dirty="0">
                 <a:solidFill>
                   <a:srgbClr val="1A2B3C"/>
                 </a:solidFill>
@@ -10642,7 +10642,7 @@
               </a:rPr>
               <a:t>Prometheus 指标采集</a:t>
             </a:r>
-            <a:endParaRPr lang="en-US" sz="1300" dirty="0"/>
+            <a:endParaRPr lang="en-US" sz="1400" dirty="0"/>
           </a:p>
         </p:txBody>
       </p:sp>
@@ -10654,24 +10654,24 @@
         </p:nvSpPr>
         <p:spPr>
           <a:xfrm>
-            <a:off x="3566160" y="3291840"/>
-            <a:ext cx="2286000" cy="365760"/>
-          </a:xfrm>
-          <a:prstGeom prst="rect">
-            <a:avLst/>
-          </a:prstGeom>
-          <a:noFill/>
-          <a:ln/>
-        </p:spPr>
-        <p:txBody>
-          <a:bodyPr wrap="square" lIns="0" tIns="0" rIns="0" bIns="0" rtlCol="0" anchor="ctr"/>
-          <a:lstStyle/>
-          <a:p>
-            <a:pPr indent="0" marL="0">
-              <a:buNone/>
-            </a:pPr>
-            <a:r>
-              <a:rPr lang="en-US" sz="1300" dirty="0">
+            <a:off x="3493008" y="3246120"/>
+            <a:ext cx="2240280" cy="365760"/>
+          </a:xfrm>
+          <a:prstGeom prst="rect">
+            <a:avLst/>
+          </a:prstGeom>
+          <a:noFill/>
+          <a:ln/>
+        </p:spPr>
+        <p:txBody>
+          <a:bodyPr wrap="square" lIns="0" tIns="0" rIns="0" bIns="0" rtlCol="0" anchor="ctr"/>
+          <a:lstStyle/>
+          <a:p>
+            <a:pPr indent="0" marL="0">
+              <a:buNone/>
+            </a:pPr>
+            <a:r>
+              <a:rPr lang="en-US" sz="1400" dirty="0">
                 <a:solidFill>
                   <a:srgbClr val="1A2B3C"/>
                 </a:solidFill>
@@ -10679,9 +10679,9 @@
                 <a:ea typeface="Calibri" pitchFamily="34" charset="-122"/>
                 <a:cs typeface="Calibri" pitchFamily="34" charset="-120"/>
               </a:rPr>
-              <a:t>Grafana AI 模型面板配置</a:t>
-            </a:r>
-            <a:endParaRPr lang="en-US" sz="1300" dirty="0"/>
+              <a:t>Grafana AI 模型面板</a:t>
+            </a:r>
+            <a:endParaRPr lang="en-US" sz="1400" dirty="0"/>
           </a:p>
         </p:txBody>
       </p:sp>
@@ -10693,12 +10693,12 @@
         </p:nvSpPr>
         <p:spPr>
           <a:xfrm>
-            <a:off x="6217920" y="1234440"/>
-            <a:ext cx="2743200" cy="2880360"/>
+            <a:off x="6126480" y="1143000"/>
+            <a:ext cx="2651760" cy="2880360"/>
           </a:xfrm>
           <a:prstGeom prst="roundRect">
             <a:avLst>
-              <a:gd name="adj" fmla="val 3333"/>
+              <a:gd name="adj" fmla="val 3448"/>
             </a:avLst>
           </a:prstGeom>
           <a:solidFill>
@@ -10706,7 +10706,7 @@
           </a:solidFill>
           <a:ln/>
           <a:effectLst>
-            <a:outerShdw sx="100000" sy="100000" kx="0" ky="0" algn="bl" rotWithShape="0" blurRad="101600" dist="25400" dir="8100000">
+            <a:outerShdw sx="100000" sy="100000" kx="0" ky="0" algn="bl" rotWithShape="0" blurRad="76200" dist="12700" dir="8100000">
               <a:srgbClr val="000000">
                 <a:alpha val="8000"/>
               </a:srgbClr>
@@ -10722,7 +10722,7 @@
         </p:nvSpPr>
         <p:spPr>
           <a:xfrm>
-            <a:off x="6446520" y="1463040"/>
+            <a:off x="6327648" y="1371600"/>
             <a:ext cx="384048" cy="384048"/>
           </a:xfrm>
           <a:prstGeom prst="ellipse">
@@ -10742,7 +10742,7 @@
         </p:nvSpPr>
         <p:spPr>
           <a:xfrm>
-            <a:off x="6446520" y="1463040"/>
+            <a:off x="6327648" y="1371600"/>
             <a:ext cx="384048" cy="384048"/>
           </a:xfrm>
           <a:prstGeom prst="rect">
@@ -10781,24 +10781,24 @@
         </p:nvSpPr>
         <p:spPr>
           <a:xfrm>
-            <a:off x="6949440" y="1490472"/>
-            <a:ext cx="1828800" cy="320040"/>
-          </a:xfrm>
-          <a:prstGeom prst="rect">
-            <a:avLst/>
-          </a:prstGeom>
-          <a:noFill/>
-          <a:ln/>
-        </p:spPr>
-        <p:txBody>
-          <a:bodyPr wrap="square" lIns="0" tIns="0" rIns="0" bIns="0" rtlCol="0" anchor="ctr"/>
-          <a:lstStyle/>
-          <a:p>
-            <a:pPr indent="0" marL="0">
-              <a:buNone/>
-            </a:pPr>
-            <a:r>
-              <a:rPr lang="en-US" sz="1800" b="1" dirty="0">
+            <a:off x="6839712" y="1417320"/>
+            <a:ext cx="1737360" cy="320040"/>
+          </a:xfrm>
+          <a:prstGeom prst="rect">
+            <a:avLst/>
+          </a:prstGeom>
+          <a:noFill/>
+          <a:ln/>
+        </p:spPr>
+        <p:txBody>
+          <a:bodyPr wrap="square" lIns="0" tIns="0" rIns="0" bIns="0" rtlCol="0" anchor="ctr"/>
+          <a:lstStyle/>
+          <a:p>
+            <a:pPr indent="0" marL="0">
+              <a:buNone/>
+            </a:pPr>
+            <a:r>
+              <a:rPr lang="en-US" sz="1700" b="1" dirty="0">
                 <a:solidFill>
                   <a:srgbClr val="1A2B3C"/>
                 </a:solidFill>
@@ -10808,7 +10808,7 @@
               </a:rPr>
               <a:t>交付门禁</a:t>
             </a:r>
-            <a:endParaRPr lang="en-US" sz="1800" dirty="0"/>
+            <a:endParaRPr lang="en-US" sz="1700" dirty="0"/>
           </a:p>
         </p:txBody>
       </p:sp>
@@ -10820,8 +10820,8 @@
         </p:nvSpPr>
         <p:spPr>
           <a:xfrm>
-            <a:off x="6446520" y="2011680"/>
-            <a:ext cx="2286000" cy="274320"/>
+            <a:off x="6327648" y="1920240"/>
+            <a:ext cx="2240280" cy="274320"/>
           </a:xfrm>
           <a:prstGeom prst="rect">
             <a:avLst/>
@@ -10839,7 +10839,7 @@
             <a:r>
               <a:rPr lang="en-US" sz="1300" b="1" dirty="0">
                 <a:solidFill>
-                  <a:srgbClr val="00A896"/>
+                  <a:srgbClr val="C45C26"/>
                 </a:solidFill>
                 <a:latin typeface="Calibri" pitchFamily="34" charset="0"/>
                 <a:ea typeface="Calibri" pitchFamily="34" charset="-122"/>
@@ -10859,24 +10859,24 @@
         </p:nvSpPr>
         <p:spPr>
           <a:xfrm>
-            <a:off x="6446520" y="2468880"/>
-            <a:ext cx="2286000" cy="365760"/>
-          </a:xfrm>
-          <a:prstGeom prst="rect">
-            <a:avLst/>
-          </a:prstGeom>
-          <a:noFill/>
-          <a:ln/>
-        </p:spPr>
-        <p:txBody>
-          <a:bodyPr wrap="square" lIns="0" tIns="0" rIns="0" bIns="0" rtlCol="0" anchor="ctr"/>
-          <a:lstStyle/>
-          <a:p>
-            <a:pPr indent="0" marL="0">
-              <a:buNone/>
-            </a:pPr>
-            <a:r>
-              <a:rPr lang="en-US" sz="1300" dirty="0">
+            <a:off x="6327648" y="2423160"/>
+            <a:ext cx="2240280" cy="365760"/>
+          </a:xfrm>
+          <a:prstGeom prst="rect">
+            <a:avLst/>
+          </a:prstGeom>
+          <a:noFill/>
+          <a:ln/>
+        </p:spPr>
+        <p:txBody>
+          <a:bodyPr wrap="square" lIns="0" tIns="0" rIns="0" bIns="0" rtlCol="0" anchor="ctr"/>
+          <a:lstStyle/>
+          <a:p>
+            <a:pPr indent="0" marL="0">
+              <a:buNone/>
+            </a:pPr>
+            <a:r>
+              <a:rPr lang="en-US" sz="1400" dirty="0">
                 <a:solidFill>
                   <a:srgbClr val="1A2B3C"/>
                 </a:solidFill>
@@ -10886,137 +10886,137 @@
               </a:rPr>
               <a:t>未发现 CI 工作流</a:t>
             </a:r>
+            <a:endParaRPr lang="en-US" sz="1400" dirty="0"/>
+          </a:p>
+        </p:txBody>
+      </p:sp>
+      <p:sp>
+        <p:nvSpPr>
+          <p:cNvPr id="29" name="Text 27"/>
+          <p:cNvSpPr/>
+          <p:nvPr/>
+        </p:nvSpPr>
+        <p:spPr>
+          <a:xfrm>
+            <a:off x="6327648" y="2834640"/>
+            <a:ext cx="2240280" cy="365760"/>
+          </a:xfrm>
+          <a:prstGeom prst="rect">
+            <a:avLst/>
+          </a:prstGeom>
+          <a:noFill/>
+          <a:ln/>
+        </p:spPr>
+        <p:txBody>
+          <a:bodyPr wrap="square" lIns="0" tIns="0" rIns="0" bIns="0" rtlCol="0" anchor="ctr"/>
+          <a:lstStyle/>
+          <a:p>
+            <a:pPr indent="0" marL="0">
+              <a:buNone/>
+            </a:pPr>
+            <a:r>
+              <a:rPr lang="en-US" sz="1400" dirty="0">
+                <a:solidFill>
+                  <a:srgbClr val="1A2B3C"/>
+                </a:solidFill>
+                <a:latin typeface="Calibri" pitchFamily="34" charset="0"/>
+                <a:ea typeface="Calibri" pitchFamily="34" charset="-122"/>
+                <a:cs typeface="Calibri" pitchFamily="34" charset="-120"/>
+              </a:rPr>
+              <a:t>前端无自动化测试</a:t>
+            </a:r>
+            <a:endParaRPr lang="en-US" sz="1400" dirty="0"/>
+          </a:p>
+        </p:txBody>
+      </p:sp>
+      <p:sp>
+        <p:nvSpPr>
+          <p:cNvPr id="30" name="Text 28"/>
+          <p:cNvSpPr/>
+          <p:nvPr/>
+        </p:nvSpPr>
+        <p:spPr>
+          <a:xfrm>
+            <a:off x="6327648" y="3246120"/>
+            <a:ext cx="2240280" cy="365760"/>
+          </a:xfrm>
+          <a:prstGeom prst="rect">
+            <a:avLst/>
+          </a:prstGeom>
+          <a:noFill/>
+          <a:ln/>
+        </p:spPr>
+        <p:txBody>
+          <a:bodyPr wrap="square" lIns="0" tIns="0" rIns="0" bIns="0" rtlCol="0" anchor="ctr"/>
+          <a:lstStyle/>
+          <a:p>
+            <a:pPr indent="0" marL="0">
+              <a:buNone/>
+            </a:pPr>
+            <a:r>
+              <a:rPr lang="en-US" sz="1400" dirty="0">
+                <a:solidFill>
+                  <a:srgbClr val="1A2B3C"/>
+                </a:solidFill>
+                <a:latin typeface="Calibri" pitchFamily="34" charset="0"/>
+                <a:ea typeface="Calibri" pitchFamily="34" charset="-122"/>
+                <a:cs typeface="Calibri" pitchFamily="34" charset="-120"/>
+              </a:rPr>
+              <a:t>无近期流水线可核验</a:t>
+            </a:r>
+            <a:endParaRPr lang="en-US" sz="1400" dirty="0"/>
+          </a:p>
+        </p:txBody>
+      </p:sp>
+      <p:sp>
+        <p:nvSpPr>
+          <p:cNvPr id="31" name="Text 29"/>
+          <p:cNvSpPr/>
+          <p:nvPr/>
+        </p:nvSpPr>
+        <p:spPr>
+          <a:xfrm>
+            <a:off x="457200" y="4206240"/>
+            <a:ext cx="8229600" cy="320040"/>
+          </a:xfrm>
+          <a:prstGeom prst="rect">
+            <a:avLst/>
+          </a:prstGeom>
+          <a:noFill/>
+          <a:ln/>
+        </p:spPr>
+        <p:txBody>
+          <a:bodyPr wrap="square" lIns="0" tIns="0" rIns="0" bIns="0" rtlCol="0" anchor="ctr"/>
+          <a:lstStyle/>
+          <a:p>
+            <a:pPr indent="0" marL="0">
+              <a:buNone/>
+            </a:pPr>
+            <a:r>
+              <a:rPr lang="en-US" sz="1300" b="1" dirty="0">
+                <a:solidFill>
+                  <a:srgbClr val="065A82"/>
+                </a:solidFill>
+                <a:latin typeface="Calibri" pitchFamily="34" charset="0"/>
+                <a:ea typeface="Calibri" pitchFamily="34" charset="-122"/>
+                <a:cs typeface="Calibri" pitchFamily="34" charset="-120"/>
+              </a:rPr>
+              <a:t>最近 CI 状态：不适用——仓库未配置可识别的 CI 流水线。</a:t>
+            </a:r>
             <a:endParaRPr lang="en-US" sz="1300" dirty="0"/>
           </a:p>
         </p:txBody>
       </p:sp>
       <p:sp>
         <p:nvSpPr>
-          <p:cNvPr id="29" name="Text 27"/>
-          <p:cNvSpPr/>
-          <p:nvPr/>
-        </p:nvSpPr>
-        <p:spPr>
-          <a:xfrm>
-            <a:off x="6446520" y="2880360"/>
-            <a:ext cx="2286000" cy="365760"/>
-          </a:xfrm>
-          <a:prstGeom prst="rect">
-            <a:avLst/>
-          </a:prstGeom>
-          <a:noFill/>
-          <a:ln/>
-        </p:spPr>
-        <p:txBody>
-          <a:bodyPr wrap="square" lIns="0" tIns="0" rIns="0" bIns="0" rtlCol="0" anchor="ctr"/>
-          <a:lstStyle/>
-          <a:p>
-            <a:pPr indent="0" marL="0">
-              <a:buNone/>
-            </a:pPr>
-            <a:r>
-              <a:rPr lang="en-US" sz="1300" dirty="0">
-                <a:solidFill>
-                  <a:srgbClr val="1A2B3C"/>
-                </a:solidFill>
-                <a:latin typeface="Calibri" pitchFamily="34" charset="0"/>
-                <a:ea typeface="Calibri" pitchFamily="34" charset="-122"/>
-                <a:cs typeface="Calibri" pitchFamily="34" charset="-120"/>
-              </a:rPr>
-              <a:t>前端无自动化测试文件</a:t>
-            </a:r>
-            <a:endParaRPr lang="en-US" sz="1300" dirty="0"/>
-          </a:p>
-        </p:txBody>
-      </p:sp>
-      <p:sp>
-        <p:nvSpPr>
-          <p:cNvPr id="30" name="Text 28"/>
-          <p:cNvSpPr/>
-          <p:nvPr/>
-        </p:nvSpPr>
-        <p:spPr>
-          <a:xfrm>
-            <a:off x="6446520" y="3291840"/>
-            <a:ext cx="2286000" cy="365760"/>
-          </a:xfrm>
-          <a:prstGeom prst="rect">
-            <a:avLst/>
-          </a:prstGeom>
-          <a:noFill/>
-          <a:ln/>
-        </p:spPr>
-        <p:txBody>
-          <a:bodyPr wrap="square" lIns="0" tIns="0" rIns="0" bIns="0" rtlCol="0" anchor="ctr"/>
-          <a:lstStyle/>
-          <a:p>
-            <a:pPr indent="0" marL="0">
-              <a:buNone/>
-            </a:pPr>
-            <a:r>
-              <a:rPr lang="en-US" sz="1300" dirty="0">
-                <a:solidFill>
-                  <a:srgbClr val="1A2B3C"/>
-                </a:solidFill>
-                <a:latin typeface="Calibri" pitchFamily="34" charset="0"/>
-                <a:ea typeface="Calibri" pitchFamily="34" charset="-122"/>
-                <a:cs typeface="Calibri" pitchFamily="34" charset="-120"/>
-              </a:rPr>
-              <a:t>没有近期流水线状态可核验</a:t>
-            </a:r>
-            <a:endParaRPr lang="en-US" sz="1300" dirty="0"/>
-          </a:p>
-        </p:txBody>
-      </p:sp>
-      <p:sp>
-        <p:nvSpPr>
-          <p:cNvPr id="31" name="Text 29"/>
-          <p:cNvSpPr/>
-          <p:nvPr/>
-        </p:nvSpPr>
-        <p:spPr>
-          <a:xfrm>
-            <a:off x="457200" y="4297680"/>
-            <a:ext cx="8229600" cy="274320"/>
-          </a:xfrm>
-          <a:prstGeom prst="rect">
-            <a:avLst/>
-          </a:prstGeom>
-          <a:noFill/>
-          <a:ln/>
-        </p:spPr>
-        <p:txBody>
-          <a:bodyPr wrap="square" lIns="0" tIns="0" rIns="0" bIns="0" rtlCol="0" anchor="ctr"/>
-          <a:lstStyle/>
-          <a:p>
-            <a:pPr indent="0" marL="0">
-              <a:buNone/>
-            </a:pPr>
-            <a:r>
-              <a:rPr lang="en-US" sz="1300" b="1" dirty="0">
-                <a:solidFill>
-                  <a:srgbClr val="065A82"/>
-                </a:solidFill>
-                <a:latin typeface="Calibri" pitchFamily="34" charset="0"/>
-                <a:ea typeface="Calibri" pitchFamily="34" charset="-122"/>
-                <a:cs typeface="Calibri" pitchFamily="34" charset="-120"/>
-              </a:rPr>
-              <a:t>最近 CI 状态：不适用——仓库未配置可识别的 CI 流水线。</a:t>
-            </a:r>
-            <a:endParaRPr lang="en-US" sz="1300" dirty="0"/>
-          </a:p>
-        </p:txBody>
-      </p:sp>
-      <p:sp>
-        <p:nvSpPr>
           <p:cNvPr id="32" name="Text 30"/>
           <p:cNvSpPr/>
           <p:nvPr/>
         </p:nvSpPr>
         <p:spPr>
           <a:xfrm>
-            <a:off x="457200" y="4800600"/>
-            <a:ext cx="6583680" cy="256032"/>
+            <a:off x="457200" y="4773168"/>
+            <a:ext cx="6583680" cy="237744"/>
           </a:xfrm>
           <a:prstGeom prst="rect">
             <a:avLst/>
@@ -11034,7 +11034,7 @@
             <a:r>
               <a:rPr lang="en-US" sz="1000" dirty="0">
                 <a:solidFill>
-                  <a:srgbClr val="5A6B7C"/>
+                  <a:srgbClr val="3D5163"/>
                 </a:solidFill>
                 <a:latin typeface="Calibri" pitchFamily="34" charset="0"/>
                 <a:ea typeface="Calibri" pitchFamily="34" charset="-122"/>
@@ -11054,8 +11054,8 @@
         </p:nvSpPr>
         <p:spPr>
           <a:xfrm>
-            <a:off x="7589520" y="4800600"/>
-            <a:ext cx="1097280" cy="256032"/>
+            <a:off x="7589520" y="4773168"/>
+            <a:ext cx="1097280" cy="237744"/>
           </a:xfrm>
           <a:prstGeom prst="rect">
             <a:avLst/>
@@ -11073,7 +11073,7 @@
             <a:r>
               <a:rPr lang="en-US" sz="1000" dirty="0">
                 <a:solidFill>
-                  <a:srgbClr val="5A6B7C"/>
+                  <a:srgbClr val="3D5163"/>
                 </a:solidFill>
                 <a:latin typeface="Calibri" pitchFamily="34" charset="0"/>
                 <a:ea typeface="Calibri" pitchFamily="34" charset="-122"/>
@@ -11158,12 +11158,12 @@
         </p:nvSpPr>
         <p:spPr>
           <a:xfrm>
-            <a:off x="457200" y="256032"/>
-            <a:ext cx="2377440" cy="292608"/>
+            <a:off x="457200" y="292608"/>
+            <a:ext cx="2468880" cy="274320"/>
           </a:xfrm>
           <a:prstGeom prst="roundRect">
             <a:avLst>
-              <a:gd name="adj" fmla="val 18750"/>
+              <a:gd name="adj" fmla="val 20000"/>
             </a:avLst>
           </a:prstGeom>
           <a:solidFill>
@@ -11180,8 +11180,8 @@
         </p:nvSpPr>
         <p:spPr>
           <a:xfrm>
-            <a:off x="457200" y="256032"/>
-            <a:ext cx="2377440" cy="292608"/>
+            <a:off x="457200" y="292608"/>
+            <a:ext cx="2468880" cy="274320"/>
           </a:xfrm>
           <a:prstGeom prst="rect">
             <a:avLst/>
@@ -11219,24 +11219,24 @@
         </p:nvSpPr>
         <p:spPr>
           <a:xfrm>
-            <a:off x="457200" y="640080"/>
-            <a:ext cx="8229600" cy="411480"/>
-          </a:xfrm>
-          <a:prstGeom prst="rect">
-            <a:avLst/>
-          </a:prstGeom>
-          <a:noFill/>
-          <a:ln/>
-        </p:spPr>
-        <p:txBody>
-          <a:bodyPr wrap="square" lIns="0" tIns="0" rIns="0" bIns="0" rtlCol="0" anchor="ctr"/>
-          <a:lstStyle/>
-          <a:p>
-            <a:pPr indent="0" marL="0">
-              <a:buNone/>
-            </a:pPr>
-            <a:r>
-              <a:rPr lang="en-US" sz="3200" b="1" dirty="0">
+            <a:off x="457200" y="658368"/>
+            <a:ext cx="8229600" cy="365760"/>
+          </a:xfrm>
+          <a:prstGeom prst="rect">
+            <a:avLst/>
+          </a:prstGeom>
+          <a:noFill/>
+          <a:ln/>
+        </p:spPr>
+        <p:txBody>
+          <a:bodyPr wrap="square" lIns="0" tIns="0" rIns="0" bIns="0" rtlCol="0" anchor="ctr"/>
+          <a:lstStyle/>
+          <a:p>
+            <a:pPr indent="0" marL="0">
+              <a:buNone/>
+            </a:pPr>
+            <a:r>
+              <a:rPr lang="en-US" sz="3000" b="1" dirty="0">
                 <a:solidFill>
                   <a:srgbClr val="1A2B3C"/>
                 </a:solidFill>
@@ -11246,7 +11246,7 @@
               </a:rPr>
               <a:t>建议的下一步</a:t>
             </a:r>
-            <a:endParaRPr lang="en-US" sz="3200" dirty="0"/>
+            <a:endParaRPr lang="en-US" sz="3000" dirty="0"/>
           </a:p>
         </p:txBody>
       </p:sp>
@@ -11258,12 +11258,12 @@
         </p:nvSpPr>
         <p:spPr>
           <a:xfrm>
-            <a:off x="457200" y="1143000"/>
-            <a:ext cx="8229600" cy="685800"/>
+            <a:off x="457200" y="1097280"/>
+            <a:ext cx="8229600" cy="713232"/>
           </a:xfrm>
           <a:prstGeom prst="roundRect">
             <a:avLst>
-              <a:gd name="adj" fmla="val 10667"/>
+              <a:gd name="adj" fmla="val 10256"/>
             </a:avLst>
           </a:prstGeom>
           <a:solidFill>
@@ -11280,7 +11280,7 @@
         </p:nvSpPr>
         <p:spPr>
           <a:xfrm>
-            <a:off x="594360" y="1280160"/>
+            <a:off x="594360" y="1243584"/>
             <a:ext cx="640080" cy="411480"/>
           </a:xfrm>
           <a:prstGeom prst="roundRect">
@@ -11302,7 +11302,7 @@
         </p:nvSpPr>
         <p:spPr>
           <a:xfrm>
-            <a:off x="594360" y="1280160"/>
+            <a:off x="594360" y="1243584"/>
             <a:ext cx="640080" cy="411480"/>
           </a:xfrm>
           <a:prstGeom prst="rect">
@@ -11341,7 +11341,7 @@
         </p:nvSpPr>
         <p:spPr>
           <a:xfrm>
-            <a:off x="1371600" y="1325880"/>
+            <a:off x="1417320" y="1280160"/>
             <a:ext cx="457200" cy="320040"/>
           </a:xfrm>
           <a:prstGeom prst="roundRect">
@@ -11363,7 +11363,7 @@
         </p:nvSpPr>
         <p:spPr>
           <a:xfrm>
-            <a:off x="1371600" y="1325880"/>
+            <a:off x="1417320" y="1280160"/>
             <a:ext cx="457200" cy="320040"/>
           </a:xfrm>
           <a:prstGeom prst="rect">
@@ -11402,7 +11402,7 @@
         </p:nvSpPr>
         <p:spPr>
           <a:xfrm>
-            <a:off x="2011680" y="1216152"/>
+            <a:off x="2057400" y="1188720"/>
             <a:ext cx="6400800" cy="274320"/>
           </a:xfrm>
           <a:prstGeom prst="rect">
@@ -11441,8 +11441,8 @@
         </p:nvSpPr>
         <p:spPr>
           <a:xfrm>
-            <a:off x="2011680" y="1490472"/>
-            <a:ext cx="6400800" cy="274320"/>
+            <a:off x="2057400" y="1481328"/>
+            <a:ext cx="6400800" cy="256032"/>
           </a:xfrm>
           <a:prstGeom prst="rect">
             <a:avLst/>
@@ -11460,13 +11460,13 @@
             <a:r>
               <a:rPr lang="en-US" sz="1300" dirty="0">
                 <a:solidFill>
-                  <a:srgbClr val="5A6B7C"/>
-                </a:solidFill>
-                <a:latin typeface="Calibri" pitchFamily="34" charset="0"/>
-                <a:ea typeface="Calibri" pitchFamily="34" charset="-122"/>
-                <a:cs typeface="Calibri" pitchFamily="34" charset="-120"/>
-              </a:rPr>
-              <a:t>后端执行编译与可独立运行的单元测试；前端执行 type-check、build 与只读 lint。</a:t>
+                  <a:srgbClr val="3D5163"/>
+                </a:solidFill>
+                <a:latin typeface="Calibri" pitchFamily="34" charset="0"/>
+                <a:ea typeface="Calibri" pitchFamily="34" charset="-122"/>
+                <a:cs typeface="Calibri" pitchFamily="34" charset="-120"/>
+              </a:rPr>
+              <a:t>后端编译与可独立运行单元测试；前端 type-check、build 与只读 lint。</a:t>
             </a:r>
             <a:endParaRPr lang="en-US" sz="1300" dirty="0"/>
           </a:p>
@@ -11480,12 +11480,12 @@
         </p:nvSpPr>
         <p:spPr>
           <a:xfrm>
-            <a:off x="457200" y="1920240"/>
-            <a:ext cx="8229600" cy="685800"/>
+            <a:off x="457200" y="1901952"/>
+            <a:ext cx="8229600" cy="713232"/>
           </a:xfrm>
           <a:prstGeom prst="roundRect">
             <a:avLst>
-              <a:gd name="adj" fmla="val 10667"/>
+              <a:gd name="adj" fmla="val 10256"/>
             </a:avLst>
           </a:prstGeom>
           <a:solidFill>
@@ -11502,7 +11502,7 @@
         </p:nvSpPr>
         <p:spPr>
           <a:xfrm>
-            <a:off x="594360" y="2057400"/>
+            <a:off x="594360" y="2048256"/>
             <a:ext cx="640080" cy="411480"/>
           </a:xfrm>
           <a:prstGeom prst="roundRect">
@@ -11524,7 +11524,7 @@
         </p:nvSpPr>
         <p:spPr>
           <a:xfrm>
-            <a:off x="594360" y="2057400"/>
+            <a:off x="594360" y="2048256"/>
             <a:ext cx="640080" cy="411480"/>
           </a:xfrm>
           <a:prstGeom prst="rect">
@@ -11563,7 +11563,7 @@
         </p:nvSpPr>
         <p:spPr>
           <a:xfrm>
-            <a:off x="1371600" y="2103120"/>
+            <a:off x="1417320" y="2084832"/>
             <a:ext cx="457200" cy="320040"/>
           </a:xfrm>
           <a:prstGeom prst="roundRect">
@@ -11585,7 +11585,7 @@
         </p:nvSpPr>
         <p:spPr>
           <a:xfrm>
-            <a:off x="1371600" y="2103120"/>
+            <a:off x="1417320" y="2084832"/>
             <a:ext cx="457200" cy="320040"/>
           </a:xfrm>
           <a:prstGeom prst="rect">
@@ -11624,7 +11624,7 @@
         </p:nvSpPr>
         <p:spPr>
           <a:xfrm>
-            <a:off x="2011680" y="1993392"/>
+            <a:off x="2057400" y="1993392"/>
             <a:ext cx="6400800" cy="274320"/>
           </a:xfrm>
           <a:prstGeom prst="rect">
@@ -11663,8 +11663,8 @@
         </p:nvSpPr>
         <p:spPr>
           <a:xfrm>
-            <a:off x="2011680" y="2267712"/>
-            <a:ext cx="6400800" cy="274320"/>
+            <a:off x="2057400" y="2286000"/>
+            <a:ext cx="6400800" cy="256032"/>
           </a:xfrm>
           <a:prstGeom prst="rect">
             <a:avLst/>
@@ -11682,13 +11682,13 @@
             <a:r>
               <a:rPr lang="en-US" sz="1300" dirty="0">
                 <a:solidFill>
-                  <a:srgbClr val="5A6B7C"/>
-                </a:solidFill>
-                <a:latin typeface="Calibri" pitchFamily="34" charset="0"/>
-                <a:ea typeface="Calibri" pitchFamily="34" charset="-122"/>
-                <a:cs typeface="Calibri" pitchFamily="34" charset="-120"/>
-              </a:rPr>
-              <a:t>将 MySQL、Redis、Nacos 与外部 AI/COS 依赖分层；为关键链路提供 mock 或测试配置。</a:t>
+                  <a:srgbClr val="3D5163"/>
+                </a:solidFill>
+                <a:latin typeface="Calibri" pitchFamily="34" charset="0"/>
+                <a:ea typeface="Calibri" pitchFamily="34" charset="-122"/>
+                <a:cs typeface="Calibri" pitchFamily="34" charset="-120"/>
+              </a:rPr>
+              <a:t>分层隔离 MySQL、Redis、Nacos 与外部 AI/COS；关键链路提供 mock。</a:t>
             </a:r>
             <a:endParaRPr lang="en-US" sz="1300" dirty="0"/>
           </a:p>
@@ -11702,12 +11702,12 @@
         </p:nvSpPr>
         <p:spPr>
           <a:xfrm>
-            <a:off x="457200" y="2697480"/>
-            <a:ext cx="8229600" cy="685800"/>
+            <a:off x="457200" y="2706624"/>
+            <a:ext cx="8229600" cy="713232"/>
           </a:xfrm>
           <a:prstGeom prst="roundRect">
             <a:avLst>
-              <a:gd name="adj" fmla="val 10667"/>
+              <a:gd name="adj" fmla="val 10256"/>
             </a:avLst>
           </a:prstGeom>
           <a:solidFill>
@@ -11724,7 +11724,7 @@
         </p:nvSpPr>
         <p:spPr>
           <a:xfrm>
-            <a:off x="594360" y="2834640"/>
+            <a:off x="594360" y="2852928"/>
             <a:ext cx="640080" cy="411480"/>
           </a:xfrm>
           <a:prstGeom prst="roundRect">
@@ -11746,7 +11746,7 @@
         </p:nvSpPr>
         <p:spPr>
           <a:xfrm>
-            <a:off x="594360" y="2834640"/>
+            <a:off x="594360" y="2852928"/>
             <a:ext cx="640080" cy="411480"/>
           </a:xfrm>
           <a:prstGeom prst="rect">
@@ -11785,7 +11785,7 @@
         </p:nvSpPr>
         <p:spPr>
           <a:xfrm>
-            <a:off x="1371600" y="2880360"/>
+            <a:off x="1417320" y="2889504"/>
             <a:ext cx="457200" cy="320040"/>
           </a:xfrm>
           <a:prstGeom prst="roundRect">
@@ -11807,7 +11807,7 @@
         </p:nvSpPr>
         <p:spPr>
           <a:xfrm>
-            <a:off x="1371600" y="2880360"/>
+            <a:off x="1417320" y="2889504"/>
             <a:ext cx="457200" cy="320040"/>
           </a:xfrm>
           <a:prstGeom prst="rect">
@@ -11846,7 +11846,7 @@
         </p:nvSpPr>
         <p:spPr>
           <a:xfrm>
-            <a:off x="2011680" y="2770632"/>
+            <a:off x="2057400" y="2798064"/>
             <a:ext cx="6400800" cy="274320"/>
           </a:xfrm>
           <a:prstGeom prst="rect">
@@ -11885,8 +11885,8 @@
         </p:nvSpPr>
         <p:spPr>
           <a:xfrm>
-            <a:off x="2011680" y="3044952"/>
-            <a:ext cx="6400800" cy="274320"/>
+            <a:off x="2057400" y="3090672"/>
+            <a:ext cx="6400800" cy="256032"/>
           </a:xfrm>
           <a:prstGeom prst="rect">
             <a:avLst/>
@@ -11904,13 +11904,13 @@
             <a:r>
               <a:rPr lang="en-US" sz="1300" dirty="0">
                 <a:solidFill>
-                  <a:srgbClr val="5A6B7C"/>
-                </a:solidFill>
-                <a:latin typeface="Calibri" pitchFamily="34" charset="0"/>
-                <a:ea typeface="Calibri" pitchFamily="34" charset="-122"/>
-                <a:cs typeface="Calibri" pitchFamily="34" charset="-120"/>
-              </a:rPr>
-              <a:t>明确单体与微服务的主维护线、同步边界和发布策略，避免同一缺陷重复修复。</a:t>
+                  <a:srgbClr val="3D5163"/>
+                </a:solidFill>
+                <a:latin typeface="Calibri" pitchFamily="34" charset="0"/>
+                <a:ea typeface="Calibri" pitchFamily="34" charset="-122"/>
+                <a:cs typeface="Calibri" pitchFamily="34" charset="-120"/>
+              </a:rPr>
+              <a:t>明确单体与微服务主维护线、同步边界和发布策略，避免重复修复。</a:t>
             </a:r>
             <a:endParaRPr lang="en-US" sz="1300" dirty="0"/>
           </a:p>
@@ -11924,12 +11924,12 @@
         </p:nvSpPr>
         <p:spPr>
           <a:xfrm>
-            <a:off x="457200" y="3474720"/>
-            <a:ext cx="8229600" cy="685800"/>
+            <a:off x="457200" y="3511296"/>
+            <a:ext cx="8229600" cy="713232"/>
           </a:xfrm>
           <a:prstGeom prst="roundRect">
             <a:avLst>
-              <a:gd name="adj" fmla="val 10667"/>
+              <a:gd name="adj" fmla="val 10256"/>
             </a:avLst>
           </a:prstGeom>
           <a:solidFill>
@@ -11946,7 +11946,7 @@
         </p:nvSpPr>
         <p:spPr>
           <a:xfrm>
-            <a:off x="594360" y="3611880"/>
+            <a:off x="594360" y="3657600"/>
             <a:ext cx="640080" cy="411480"/>
           </a:xfrm>
           <a:prstGeom prst="roundRect">
@@ -11968,7 +11968,7 @@
         </p:nvSpPr>
         <p:spPr>
           <a:xfrm>
-            <a:off x="594360" y="3611880"/>
+            <a:off x="594360" y="3657600"/>
             <a:ext cx="640080" cy="411480"/>
           </a:xfrm>
           <a:prstGeom prst="rect">
@@ -12007,7 +12007,7 @@
         </p:nvSpPr>
         <p:spPr>
           <a:xfrm>
-            <a:off x="1371600" y="3657600"/>
+            <a:off x="1417320" y="3694176"/>
             <a:ext cx="457200" cy="320040"/>
           </a:xfrm>
           <a:prstGeom prst="roundRect">
@@ -12029,7 +12029,7 @@
         </p:nvSpPr>
         <p:spPr>
           <a:xfrm>
-            <a:off x="1371600" y="3657600"/>
+            <a:off x="1417320" y="3694176"/>
             <a:ext cx="457200" cy="320040"/>
           </a:xfrm>
           <a:prstGeom prst="rect">
@@ -12068,7 +12068,7 @@
         </p:nvSpPr>
         <p:spPr>
           <a:xfrm>
-            <a:off x="2011680" y="3547872"/>
+            <a:off x="2057400" y="3602736"/>
             <a:ext cx="6400800" cy="274320"/>
           </a:xfrm>
           <a:prstGeom prst="rect">
@@ -12107,8 +12107,8 @@
         </p:nvSpPr>
         <p:spPr>
           <a:xfrm>
-            <a:off x="2011680" y="3822192"/>
-            <a:ext cx="6400800" cy="274320"/>
+            <a:off x="2057400" y="3895344"/>
+            <a:ext cx="6400800" cy="256032"/>
           </a:xfrm>
           <a:prstGeom prst="rect">
             <a:avLst/>
@@ -12126,13 +12126,13 @@
             <a:r>
               <a:rPr lang="en-US" sz="1300" dirty="0">
                 <a:solidFill>
-                  <a:srgbClr val="5A6B7C"/>
-                </a:solidFill>
-                <a:latin typeface="Calibri" pitchFamily="34" charset="0"/>
-                <a:ea typeface="Calibri" pitchFamily="34" charset="-122"/>
-                <a:cs typeface="Calibri" pitchFamily="34" charset="-120"/>
-              </a:rPr>
-              <a:t>跟进 Issue #5（reasoning_content）；采集生成成功率、首 token 延迟、部署成功率。</a:t>
+                  <a:srgbClr val="3D5163"/>
+                </a:solidFill>
+                <a:latin typeface="Calibri" pitchFamily="34" charset="0"/>
+                <a:ea typeface="Calibri" pitchFamily="34" charset="-122"/>
+                <a:cs typeface="Calibri" pitchFamily="34" charset="-120"/>
+              </a:rPr>
+              <a:t>跟进 Issue #5（reasoning_content）；采集生成成功率与部署成功率。</a:t>
             </a:r>
             <a:endParaRPr lang="en-US" sz="1300" dirty="0"/>
           </a:p>
@@ -12146,8 +12146,8 @@
         </p:nvSpPr>
         <p:spPr>
           <a:xfrm>
-            <a:off x="457200" y="4800600"/>
-            <a:ext cx="6583680" cy="256032"/>
+            <a:off x="457200" y="4773168"/>
+            <a:ext cx="6583680" cy="237744"/>
           </a:xfrm>
           <a:prstGeom prst="rect">
             <a:avLst/>
@@ -12165,7 +12165,7 @@
             <a:r>
               <a:rPr lang="en-US" sz="1000" dirty="0">
                 <a:solidFill>
-                  <a:srgbClr val="5A6B7C"/>
+                  <a:srgbClr val="3D5163"/>
                 </a:solidFill>
                 <a:latin typeface="Calibri" pitchFamily="34" charset="0"/>
                 <a:ea typeface="Calibri" pitchFamily="34" charset="-122"/>
@@ -12185,8 +12185,8 @@
         </p:nvSpPr>
         <p:spPr>
           <a:xfrm>
-            <a:off x="7589520" y="4800600"/>
-            <a:ext cx="1097280" cy="256032"/>
+            <a:off x="7589520" y="4773168"/>
+            <a:ext cx="1097280" cy="237744"/>
           </a:xfrm>
           <a:prstGeom prst="rect">
             <a:avLst/>
@@ -12204,7 +12204,7 @@
             <a:r>
               <a:rPr lang="en-US" sz="1000" dirty="0">
                 <a:solidFill>
-                  <a:srgbClr val="5A6B7C"/>
+                  <a:srgbClr val="3D5163"/>
                 </a:solidFill>
                 <a:latin typeface="Calibri" pitchFamily="34" charset="0"/>
                 <a:ea typeface="Calibri" pitchFamily="34" charset="-122"/>
